--- a/enzo-presentation/Enzo_Crescendo_Presentation.pptx
+++ b/enzo-presentation/Enzo_Crescendo_Presentation.pptx
@@ -512,8 +512,7 @@
           <a:lstStyle/>
           <a:p>
             <a:r>
-              <a:t>TIMING ~40s
-Open with the brand: Enzo. Say this talk is not about scoreboards — it is about why Enzo’s design best answers Crescendo’s engineering problem. Mention Team 1577 Steampunk (Raanana, Israel). Note: Crescendo was the FRC game for the 2024 season; we will not discuss match outcomes.</a:t>
+              <a:t>Say the robot name clearly. This talk is about design, not scores.</a:t>
             </a:r>
           </a:p>
         </p:txBody>
@@ -583,8 +582,7 @@
           <a:lstStyle/>
           <a:p>
             <a:r>
-              <a:t>TIMING ~50s
-This is the thesis slide. Deliver the five reasons with pause and emphasis. Do not slip into results language.</a:t>
+              <a:t>Slow down and hit each of the five points.</a:t>
             </a:r>
           </a:p>
         </p:txBody>
@@ -654,8 +652,7 @@
           <a:lstStyle/>
           <a:p>
             <a:r>
-              <a:t>TIMING ~30s + Q&amp;A
-Close on the line. Invite questions about design choices, rebuild culture, or Crescendo strategy — still no results talk unless someone asks; if they do, redirect to design.</a:t>
+              <a:t>End here. Invite simple questions about design or the game.</a:t>
             </a:r>
           </a:p>
         </p:txBody>
@@ -725,8 +722,7 @@
           <a:lstStyle/>
           <a:p>
             <a:r>
-              <a:t>TIMING ~35s
-Introduce Enzo and Steampunk briefly. Frame Crescendo in one sentence. Explicitly set the evaluation lens: design excellence, not results.</a:t>
+              <a:t>Keep this short. Introduce the team and the game in plain words.</a:t>
             </a:r>
           </a:p>
         </p:txBody>
@@ -796,8 +792,7 @@
           <a:lstStyle/>
           <a:p>
             <a:r>
-              <a:t>TIMING ~45s
-Walk the five demands. Emphasize that Crescendo punished one-trick robots: Speaker alone, Amp alone, or climb-only rarely defined excellence. Enzo’s case starts here.</a:t>
+              <a:t>Explain Crescendo like explaining a new sport.</a:t>
             </a:r>
           </a:p>
         </p:txBody>
@@ -867,8 +862,7 @@
           <a:lstStyle/>
           <a:p>
             <a:r>
-              <a:t>TIMING ~40s
-Read the five criteria as the rubric for the rest of the talk. Preview that Enzo earns each one.</a:t>
+              <a:t>These five points are our checklist for the rest of the talk.</a:t>
             </a:r>
           </a:p>
         </p:txBody>
@@ -938,8 +932,7 @@
           <a:lstStyle/>
           <a:p>
             <a:r>
-              <a:t>TIMING ~40s
-Reference the public rebuild narrative (Chief Delphi reveal titled Enzo 2024 Ready for World Championship) without mentioning outcomes. Argue that willingness to rebuild is itself a reason Enzo is “best.”</a:t>
+              <a:t>Praise the rebuild as smart teamwork, without talking about results.</a:t>
             </a:r>
           </a:p>
         </p:txBody>
@@ -1009,8 +1002,7 @@
           <a:lstStyle/>
           <a:p>
             <a:r>
-              <a:t>TIMING ~35s
-Keep claims qualitative. Stress that Enzo’s value starts with possession quality, not flashy scoring animations.</a:t>
+              <a:t>Use the basketball comparison if it helps the class.</a:t>
             </a:r>
           </a:p>
         </p:txBody>
@@ -1080,8 +1072,7 @@
           <a:lstStyle/>
           <a:p>
             <a:r>
-              <a:t>TIMING ~40s
-Argue dual-mode scoring without citing points or match clips as proof of ranking. Focus on decision freedom for drivers and alliance partners.</a:t>
+              <a:t>Stress flexibility in simple terms.</a:t>
             </a:r>
           </a:p>
         </p:txBody>
@@ -1151,8 +1142,7 @@
           <a:lstStyle/>
           <a:p>
             <a:r>
-              <a:t>TIMING ~35s
-Avoid trap-score debates that imply outcomes. Emphasize design balance: teleop identity preserved, endgame still real.</a:t>
+              <a:t>Balance: score first, climb later — but both matter.</a:t>
             </a:r>
           </a:p>
         </p:txBody>
@@ -1222,8 +1212,7 @@
           <a:lstStyle/>
           <a:p>
             <a:r>
-              <a:t>TIMING ~40s
-Keep this accessible for a general audience. Software is the multiplier that makes Enzo’s mechanisms feel like the best robot, not merely a capable one.</a:t>
+              <a:t>Software = helpful tools for the human drivers.</a:t>
             </a:r>
           </a:p>
         </p:txBody>
@@ -4323,7 +4312,7 @@
         </p:nvSpPr>
         <p:spPr>
           <a:xfrm>
-            <a:off x="731520" y="1645920"/>
+            <a:off x="731520" y="1737360"/>
             <a:ext cx="10515600" cy="1097280"/>
           </a:xfrm>
           <a:prstGeom prst="rect">
@@ -4337,7 +4326,6 @@
           </a:bodyPr>
           <a:lstStyle/>
           <a:p>
-            <a:pPr algn="l"/>
             <a:r>
               <a:rPr sz="7200" b="1">
                 <a:solidFill>
@@ -4358,8 +4346,8 @@
         </p:nvSpPr>
         <p:spPr>
           <a:xfrm>
-            <a:off x="731520" y="2834640"/>
-            <a:ext cx="10515600" cy="1097280"/>
+            <a:off x="731520" y="2926080"/>
+            <a:ext cx="10515600" cy="914400"/>
           </a:xfrm>
           <a:prstGeom prst="rect">
             <a:avLst/>
@@ -4379,7 +4367,7 @@
                 </a:solidFill>
                 <a:latin typeface="Georgia"/>
               </a:rPr>
-              <a:t>Why Enzo is the best robot of FRC Crescendo</a:t>
+              <a:t>Why Enzo is the best robot in Crescendo</a:t>
             </a:r>
           </a:p>
         </p:txBody>
@@ -4393,7 +4381,7 @@
         <p:spPr>
           <a:xfrm>
             <a:off x="731520" y="4114800"/>
-            <a:ext cx="10515600" cy="731520"/>
+            <a:ext cx="10515600" cy="548640"/>
           </a:xfrm>
           <a:prstGeom prst="rect">
             <a:avLst/>
@@ -4413,7 +4401,7 @@
                 </a:solidFill>
                 <a:latin typeface="Calibri"/>
               </a:rPr>
-              <a:t>Team 1577 Steampunk  ·  A design-first argument  ·  5–7 minutes</a:t>
+              <a:t>Team 1577 Steampunk  ·  About smart design  ·  5–7 minutes</a:t>
             </a:r>
           </a:p>
         </p:txBody>
@@ -4585,7 +4573,7 @@
                 </a:solidFill>
                 <a:latin typeface="Calibri"/>
               </a:rPr>
-              <a:t>THE ARGUMENT</a:t>
+              <a:t>THE BIG IDEA</a:t>
             </a:r>
           </a:p>
         </p:txBody>
@@ -4599,7 +4587,7 @@
         <p:spPr>
           <a:xfrm>
             <a:off x="640080" y="777240"/>
-            <a:ext cx="10972800" cy="1005840"/>
+            <a:ext cx="10972800" cy="1097280"/>
           </a:xfrm>
           <a:prstGeom prst="rect">
             <a:avLst/>
@@ -4613,7 +4601,7 @@
           <a:lstStyle/>
           <a:p>
             <a:r>
-              <a:rPr sz="3600" b="1">
+              <a:rPr sz="3400" b="1">
                 <a:solidFill>
                   <a:srgbClr val="F2EBDF"/>
                 </a:solidFill>
@@ -4626,41 +4614,7 @@
       </p:sp>
       <p:sp>
         <p:nvSpPr>
-          <p:cNvPr id="6" name="TextBox 5"/>
-          <p:cNvSpPr txBox="1"/>
-          <p:nvPr/>
-        </p:nvSpPr>
-        <p:spPr>
-          <a:xfrm>
-            <a:off x="640080" y="1737360"/>
-            <a:ext cx="10515600" cy="548640"/>
-          </a:xfrm>
-          <a:prstGeom prst="rect">
-            <a:avLst/>
-          </a:prstGeom>
-          <a:noFill/>
-        </p:spPr>
-        <p:txBody>
-          <a:bodyPr wrap="square">
-            <a:spAutoFit/>
-          </a:bodyPr>
-          <a:lstStyle/>
-          <a:p>
-            <a:r>
-              <a:rPr sz="1600" b="0">
-                <a:solidFill>
-                  <a:srgbClr val="A8A093"/>
-                </a:solidFill>
-                <a:latin typeface="Calibri"/>
-              </a:rPr>
-              <a:t>Five reasons — all design, no scoreboard.</a:t>
-            </a:r>
-          </a:p>
-        </p:txBody>
-      </p:sp>
-      <p:sp>
-        <p:nvSpPr>
-          <p:cNvPr id="7" name="Oval 6"/>
+          <p:cNvPr id="6" name="Oval 5"/>
           <p:cNvSpPr/>
           <p:nvPr/>
         </p:nvSpPr>
@@ -4703,7 +4657,7 @@
       </p:sp>
       <p:sp>
         <p:nvSpPr>
-          <p:cNvPr id="8" name="TextBox 7"/>
+          <p:cNvPr id="7" name="TextBox 6"/>
           <p:cNvSpPr txBox="1"/>
           <p:nvPr/>
         </p:nvSpPr>
@@ -4738,7 +4692,7 @@
       </p:sp>
       <p:sp>
         <p:nvSpPr>
-          <p:cNvPr id="9" name="TextBox 8"/>
+          <p:cNvPr id="8" name="TextBox 7"/>
           <p:cNvSpPr txBox="1"/>
           <p:nvPr/>
         </p:nvSpPr>
@@ -4753,26 +4707,26 @@
           <a:noFill/>
         </p:spPr>
         <p:txBody>
-          <a:bodyPr wrap="square">
+          <a:bodyPr wrap="none">
             <a:spAutoFit/>
           </a:bodyPr>
           <a:lstStyle/>
           <a:p>
             <a:r>
-              <a:rPr sz="1700" b="0">
+              <a:rPr sz="1800" b="0">
                 <a:solidFill>
                   <a:srgbClr val="F2EBDF"/>
                 </a:solidFill>
                 <a:latin typeface="Calibri"/>
               </a:rPr>
-              <a:t>It answers Crescendo’s real problem: Notes, dual scoring modes, and Stage.</a:t>
-            </a:r>
-          </a:p>
-        </p:txBody>
-      </p:sp>
-      <p:sp>
-        <p:nvSpPr>
-          <p:cNvPr id="10" name="Oval 9"/>
+              <a:t>Built for the whole Crescendo game, not just one trick</a:t>
+            </a:r>
+          </a:p>
+        </p:txBody>
+      </p:sp>
+      <p:sp>
+        <p:nvSpPr>
+          <p:cNvPr id="9" name="Oval 8"/>
           <p:cNvSpPr/>
           <p:nvPr/>
         </p:nvSpPr>
@@ -4815,7 +4769,7 @@
       </p:sp>
       <p:sp>
         <p:nvSpPr>
-          <p:cNvPr id="11" name="TextBox 10"/>
+          <p:cNvPr id="10" name="TextBox 9"/>
           <p:cNvSpPr txBox="1"/>
           <p:nvPr/>
         </p:nvSpPr>
@@ -4850,7 +4804,7 @@
       </p:sp>
       <p:sp>
         <p:nvSpPr>
-          <p:cNvPr id="12" name="TextBox 11"/>
+          <p:cNvPr id="11" name="TextBox 10"/>
           <p:cNvSpPr txBox="1"/>
           <p:nvPr/>
         </p:nvSpPr>
@@ -4865,26 +4819,26 @@
           <a:noFill/>
         </p:spPr>
         <p:txBody>
-          <a:bodyPr wrap="square">
+          <a:bodyPr wrap="none">
             <a:spAutoFit/>
           </a:bodyPr>
           <a:lstStyle/>
           <a:p>
             <a:r>
-              <a:rPr sz="1700" b="0">
+              <a:rPr sz="1800" b="0">
                 <a:solidFill>
                   <a:srgbClr val="F2EBDF"/>
                 </a:solidFill>
                 <a:latin typeface="Calibri"/>
               </a:rPr>
-              <a:t>It was rebuilt with courage when the field demanded a better machine.</a:t>
-            </a:r>
-          </a:p>
-        </p:txBody>
-      </p:sp>
-      <p:sp>
-        <p:nvSpPr>
-          <p:cNvPr id="13" name="Oval 12"/>
+              <a:t>The team rebuilt it when they needed to</a:t>
+            </a:r>
+          </a:p>
+        </p:txBody>
+      </p:sp>
+      <p:sp>
+        <p:nvSpPr>
+          <p:cNvPr id="12" name="Oval 11"/>
           <p:cNvSpPr/>
           <p:nvPr/>
         </p:nvSpPr>
@@ -4927,7 +4881,7 @@
       </p:sp>
       <p:sp>
         <p:nvSpPr>
-          <p:cNvPr id="14" name="TextBox 13"/>
+          <p:cNvPr id="13" name="TextBox 12"/>
           <p:cNvSpPr txBox="1"/>
           <p:nvPr/>
         </p:nvSpPr>
@@ -4962,7 +4916,7 @@
       </p:sp>
       <p:sp>
         <p:nvSpPr>
-          <p:cNvPr id="15" name="TextBox 14"/>
+          <p:cNvPr id="14" name="TextBox 13"/>
           <p:cNvSpPr txBox="1"/>
           <p:nvPr/>
         </p:nvSpPr>
@@ -4977,26 +4931,26 @@
           <a:noFill/>
         </p:spPr>
         <p:txBody>
-          <a:bodyPr wrap="square">
+          <a:bodyPr wrap="none">
             <a:spAutoFit/>
           </a:bodyPr>
           <a:lstStyle/>
           <a:p>
             <a:r>
-              <a:rPr sz="1700" b="0">
+              <a:rPr sz="1800" b="0">
                 <a:solidFill>
                   <a:srgbClr val="F2EBDF"/>
                 </a:solidFill>
                 <a:latin typeface="Calibri"/>
               </a:rPr>
-              <a:t>It prioritizes possession quality — the root of every Crescendo strategy.</a:t>
-            </a:r>
-          </a:p>
-        </p:txBody>
-      </p:sp>
-      <p:sp>
-        <p:nvSpPr>
-          <p:cNvPr id="16" name="Oval 15"/>
+              <a:t>Focuses on grabbing and controlling Notes</a:t>
+            </a:r>
+          </a:p>
+        </p:txBody>
+      </p:sp>
+      <p:sp>
+        <p:nvSpPr>
+          <p:cNvPr id="15" name="Oval 14"/>
           <p:cNvSpPr/>
           <p:nvPr/>
         </p:nvSpPr>
@@ -5039,7 +4993,7 @@
       </p:sp>
       <p:sp>
         <p:nvSpPr>
-          <p:cNvPr id="17" name="TextBox 16"/>
+          <p:cNvPr id="16" name="TextBox 15"/>
           <p:cNvSpPr txBox="1"/>
           <p:nvPr/>
         </p:nvSpPr>
@@ -5074,7 +5028,7 @@
       </p:sp>
       <p:sp>
         <p:nvSpPr>
-          <p:cNvPr id="18" name="TextBox 17"/>
+          <p:cNvPr id="17" name="TextBox 16"/>
           <p:cNvSpPr txBox="1"/>
           <p:nvPr/>
         </p:nvSpPr>
@@ -5089,26 +5043,26 @@
           <a:noFill/>
         </p:spPr>
         <p:txBody>
-          <a:bodyPr wrap="square">
+          <a:bodyPr wrap="none">
             <a:spAutoFit/>
           </a:bodyPr>
           <a:lstStyle/>
           <a:p>
             <a:r>
-              <a:rPr sz="1700" b="0">
+              <a:rPr sz="1800" b="0">
                 <a:solidFill>
                   <a:srgbClr val="F2EBDF"/>
                 </a:solidFill>
                 <a:latin typeface="Calibri"/>
               </a:rPr>
-              <a:t>It stays versatile: Speaker pressure and Amp utility in one package.</a:t>
-            </a:r>
-          </a:p>
-        </p:txBody>
-      </p:sp>
-      <p:sp>
-        <p:nvSpPr>
-          <p:cNvPr id="19" name="Oval 18"/>
+              <a:t>Can score in more than one way</a:t>
+            </a:r>
+          </a:p>
+        </p:txBody>
+      </p:sp>
+      <p:sp>
+        <p:nvSpPr>
+          <p:cNvPr id="18" name="Oval 17"/>
           <p:cNvSpPr/>
           <p:nvPr/>
         </p:nvSpPr>
@@ -5151,7 +5105,7 @@
       </p:sp>
       <p:sp>
         <p:nvSpPr>
-          <p:cNvPr id="20" name="TextBox 19"/>
+          <p:cNvPr id="19" name="TextBox 18"/>
           <p:cNvSpPr txBox="1"/>
           <p:nvPr/>
         </p:nvSpPr>
@@ -5186,7 +5140,7 @@
       </p:sp>
       <p:sp>
         <p:nvSpPr>
-          <p:cNvPr id="21" name="TextBox 20"/>
+          <p:cNvPr id="20" name="TextBox 19"/>
           <p:cNvSpPr txBox="1"/>
           <p:nvPr/>
         </p:nvSpPr>
@@ -5201,26 +5155,26 @@
           <a:noFill/>
         </p:spPr>
         <p:txBody>
-          <a:bodyPr wrap="square">
+          <a:bodyPr wrap="none">
             <a:spAutoFit/>
           </a:bodyPr>
           <a:lstStyle/>
           <a:p>
             <a:r>
-              <a:rPr sz="1700" b="0">
+              <a:rPr sz="1800" b="0">
                 <a:solidFill>
                   <a:srgbClr val="F2EBDF"/>
                 </a:solidFill>
                 <a:latin typeface="Calibri"/>
               </a:rPr>
-              <a:t>It closes the loop with software drivers can trust under defense.</a:t>
-            </a:r>
-          </a:p>
-        </p:txBody>
-      </p:sp>
-      <p:sp>
-        <p:nvSpPr>
-          <p:cNvPr id="22" name="TextBox 21"/>
+              <a:t>Software helps drivers do the hard parts</a:t>
+            </a:r>
+          </a:p>
+        </p:txBody>
+      </p:sp>
+      <p:sp>
+        <p:nvSpPr>
+          <p:cNvPr id="21" name="TextBox 20"/>
           <p:cNvSpPr txBox="1"/>
           <p:nvPr/>
         </p:nvSpPr>
@@ -5364,8 +5318,76 @@
         </p:nvSpPr>
         <p:spPr>
           <a:xfrm>
-            <a:off x="731520" y="2011680"/>
-            <a:ext cx="10515600" cy="1097280"/>
+            <a:off x="731520" y="2103120"/>
+            <a:ext cx="10515600" cy="1188720"/>
+          </a:xfrm>
+          <a:prstGeom prst="rect">
+            <a:avLst/>
+          </a:prstGeom>
+          <a:noFill/>
+        </p:spPr>
+        <p:txBody>
+          <a:bodyPr wrap="square">
+            <a:spAutoFit/>
+          </a:bodyPr>
+          <a:lstStyle/>
+          <a:p>
+            <a:r>
+              <a:rPr sz="3200" b="1">
+                <a:solidFill>
+                  <a:srgbClr val="F2EBDF"/>
+                </a:solidFill>
+                <a:latin typeface="Georgia"/>
+              </a:rPr>
+              <a:t>Enzo is best because of how it was built.</a:t>
+            </a:r>
+          </a:p>
+        </p:txBody>
+      </p:sp>
+      <p:sp>
+        <p:nvSpPr>
+          <p:cNvPr id="5" name="TextBox 4"/>
+          <p:cNvSpPr txBox="1"/>
+          <p:nvPr/>
+        </p:nvSpPr>
+        <p:spPr>
+          <a:xfrm>
+            <a:off x="731520" y="3474720"/>
+            <a:ext cx="10515600" cy="914400"/>
+          </a:xfrm>
+          <a:prstGeom prst="rect">
+            <a:avLst/>
+          </a:prstGeom>
+          <a:noFill/>
+        </p:spPr>
+        <p:txBody>
+          <a:bodyPr wrap="square">
+            <a:spAutoFit/>
+          </a:bodyPr>
+          <a:lstStyle/>
+          <a:p>
+            <a:r>
+              <a:rPr sz="1800" b="0">
+                <a:solidFill>
+                  <a:srgbClr val="A8A093"/>
+                </a:solidFill>
+                <a:latin typeface="Calibri"/>
+              </a:rPr>
+              <a:t>Clear plan. Willing to improve. Easy to drive. Ready for the whole game.</a:t>
+            </a:r>
+          </a:p>
+        </p:txBody>
+      </p:sp>
+      <p:sp>
+        <p:nvSpPr>
+          <p:cNvPr id="6" name="TextBox 5"/>
+          <p:cNvSpPr txBox="1"/>
+          <p:nvPr/>
+        </p:nvSpPr>
+        <p:spPr>
+          <a:xfrm>
+            <a:off x="731520" y="4846320"/>
+            <a:ext cx="10515600" cy="457200"/>
           </a:xfrm>
           <a:prstGeom prst="rect">
             <a:avLst/>
@@ -5379,81 +5401,13 @@
           <a:lstStyle/>
           <a:p>
             <a:r>
-              <a:rPr sz="3400" b="1">
-                <a:solidFill>
-                  <a:srgbClr val="F2EBDF"/>
+              <a:rPr sz="2200" b="1">
+                <a:solidFill>
+                  <a:srgbClr val="C4964A"/>
                 </a:solidFill>
                 <a:latin typeface="Georgia"/>
               </a:rPr>
-              <a:t>Enzo is best because it was designed to be.</a:t>
-            </a:r>
-          </a:p>
-        </p:txBody>
-      </p:sp>
-      <p:sp>
-        <p:nvSpPr>
-          <p:cNvPr id="5" name="TextBox 4"/>
-          <p:cNvSpPr txBox="1"/>
-          <p:nvPr/>
-        </p:nvSpPr>
-        <p:spPr>
-          <a:xfrm>
-            <a:off x="731520" y="3291840"/>
-            <a:ext cx="10515600" cy="1097280"/>
-          </a:xfrm>
-          <a:prstGeom prst="rect">
-            <a:avLst/>
-          </a:prstGeom>
-          <a:noFill/>
-        </p:spPr>
-        <p:txBody>
-          <a:bodyPr wrap="square">
-            <a:spAutoFit/>
-          </a:bodyPr>
-          <a:lstStyle/>
-          <a:p>
-            <a:r>
-              <a:rPr sz="1800" b="0">
-                <a:solidFill>
-                  <a:srgbClr val="A8A093"/>
-                </a:solidFill>
-                <a:latin typeface="Calibri"/>
-              </a:rPr>
-              <a:t>Not because of a bracket. Because Steampunk built a Crescendo robot with clear strategy, fearless iteration, and mechanisms that serve drivers — and alliances.</a:t>
-            </a:r>
-          </a:p>
-        </p:txBody>
-      </p:sp>
-      <p:sp>
-        <p:nvSpPr>
-          <p:cNvPr id="6" name="TextBox 5"/>
-          <p:cNvSpPr txBox="1"/>
-          <p:nvPr/>
-        </p:nvSpPr>
-        <p:spPr>
-          <a:xfrm>
-            <a:off x="731520" y="4846320"/>
-            <a:ext cx="10515600" cy="457200"/>
-          </a:xfrm>
-          <a:prstGeom prst="rect">
-            <a:avLst/>
-          </a:prstGeom>
-          <a:noFill/>
-        </p:spPr>
-        <p:txBody>
-          <a:bodyPr wrap="none">
-            <a:spAutoFit/>
-          </a:bodyPr>
-          <a:lstStyle/>
-          <a:p>
-            <a:r>
-              <a:rPr sz="2000" b="1">
-                <a:solidFill>
-                  <a:srgbClr val="C4964A"/>
-                </a:solidFill>
-                <a:latin typeface="Georgia"/>
-              </a:rPr>
-              <a:t>Questions</a:t>
+              <a:t>Questions?</a:t>
             </a:r>
           </a:p>
         </p:txBody>
@@ -5625,7 +5579,7 @@
                 </a:solidFill>
                 <a:latin typeface="Calibri"/>
               </a:rPr>
-              <a:t>MEET THE ROBOT</a:t>
+              <a:t>WHO IS ENZO?</a:t>
             </a:r>
           </a:p>
         </p:txBody>
@@ -5639,7 +5593,7 @@
         <p:spPr>
           <a:xfrm>
             <a:off x="640080" y="777240"/>
-            <a:ext cx="10972800" cy="1005840"/>
+            <a:ext cx="10972800" cy="1097280"/>
           </a:xfrm>
           <a:prstGeom prst="rect">
             <a:avLst/>
@@ -5653,54 +5607,20 @@
           <a:lstStyle/>
           <a:p>
             <a:r>
-              <a:rPr sz="3600" b="1">
+              <a:rPr sz="3400" b="1">
                 <a:solidFill>
                   <a:srgbClr val="F2EBDF"/>
                 </a:solidFill>
                 <a:latin typeface="Georgia"/>
               </a:rPr>
-              <a:t>Enzo, built by Steampunk</a:t>
-            </a:r>
-          </a:p>
-        </p:txBody>
-      </p:sp>
-      <p:sp>
-        <p:nvSpPr>
-          <p:cNvPr id="6" name="TextBox 5"/>
-          <p:cNvSpPr txBox="1"/>
-          <p:nvPr/>
-        </p:nvSpPr>
-        <p:spPr>
-          <a:xfrm>
-            <a:off x="640080" y="1737360"/>
-            <a:ext cx="10515600" cy="548640"/>
-          </a:xfrm>
-          <a:prstGeom prst="rect">
-            <a:avLst/>
-          </a:prstGeom>
-          <a:noFill/>
-        </p:spPr>
-        <p:txBody>
-          <a:bodyPr wrap="square">
-            <a:spAutoFit/>
-          </a:bodyPr>
-          <a:lstStyle/>
-          <a:p>
-            <a:r>
-              <a:rPr sz="1600" b="0">
-                <a:solidFill>
-                  <a:srgbClr val="A8A093"/>
-                </a:solidFill>
-                <a:latin typeface="Calibri"/>
-              </a:rPr>
-              <a:t>FRC Team 1577 — Aviv High School, Raanana — for the Crescendo game challenge.</a:t>
-            </a:r>
-          </a:p>
-        </p:txBody>
-      </p:sp>
-      <p:sp>
-        <p:nvSpPr>
-          <p:cNvPr id="7" name="Rounded Rectangle 6"/>
+              <a:t>Meet the robot</a:t>
+            </a:r>
+          </a:p>
+        </p:txBody>
+      </p:sp>
+      <p:sp>
+        <p:nvSpPr>
+          <p:cNvPr id="6" name="Rounded Rectangle 5"/>
           <p:cNvSpPr/>
           <p:nvPr/>
         </p:nvSpPr>
@@ -5747,14 +5667,14 @@
       </p:sp>
       <p:sp>
         <p:nvSpPr>
-          <p:cNvPr id="8" name="TextBox 7"/>
+          <p:cNvPr id="7" name="TextBox 6"/>
           <p:cNvSpPr txBox="1"/>
           <p:nvPr/>
         </p:nvSpPr>
         <p:spPr>
           <a:xfrm>
             <a:off x="868680" y="2697480"/>
-            <a:ext cx="3017520" cy="457200"/>
+            <a:ext cx="3017520" cy="411480"/>
           </a:xfrm>
           <a:prstGeom prst="rect">
             <a:avLst/>
@@ -5774,14 +5694,14 @@
                 </a:solidFill>
                 <a:latin typeface="Georgia"/>
               </a:rPr>
-              <a:t>Who</a:t>
-            </a:r>
-          </a:p>
-        </p:txBody>
-      </p:sp>
-      <p:sp>
-        <p:nvSpPr>
-          <p:cNvPr id="9" name="TextBox 8"/>
+              <a:t>The team</a:t>
+            </a:r>
+          </a:p>
+        </p:txBody>
+      </p:sp>
+      <p:sp>
+        <p:nvSpPr>
+          <p:cNvPr id="8" name="TextBox 7"/>
           <p:cNvSpPr txBox="1"/>
           <p:nvPr/>
         </p:nvSpPr>
@@ -5802,20 +5722,20 @@
           <a:lstStyle/>
           <a:p>
             <a:r>
-              <a:rPr sz="1400" b="0">
+              <a:rPr sz="1500" b="0">
                 <a:solidFill>
                   <a:srgbClr val="F2EBDF"/>
                 </a:solidFill>
                 <a:latin typeface="Calibri"/>
               </a:rPr>
-              <a:t>Enzo is Steampunk’s Crescendo competition robot — named, iterated, and prepared as a complete field machine, not a collection of demos.</a:t>
-            </a:r>
-          </a:p>
-        </p:txBody>
-      </p:sp>
-      <p:sp>
-        <p:nvSpPr>
-          <p:cNvPr id="10" name="Rounded Rectangle 9"/>
+              <a:t>Built by FRC Team 1577, Steampunk, from Raanana, Israel.</a:t>
+            </a:r>
+          </a:p>
+        </p:txBody>
+      </p:sp>
+      <p:sp>
+        <p:nvSpPr>
+          <p:cNvPr id="9" name="Rounded Rectangle 8"/>
           <p:cNvSpPr/>
           <p:nvPr/>
         </p:nvSpPr>
@@ -5862,14 +5782,14 @@
       </p:sp>
       <p:sp>
         <p:nvSpPr>
-          <p:cNvPr id="11" name="TextBox 10"/>
+          <p:cNvPr id="10" name="TextBox 9"/>
           <p:cNvSpPr txBox="1"/>
           <p:nvPr/>
         </p:nvSpPr>
         <p:spPr>
           <a:xfrm>
             <a:off x="4572000" y="2697480"/>
-            <a:ext cx="3017520" cy="457200"/>
+            <a:ext cx="3017520" cy="411480"/>
           </a:xfrm>
           <a:prstGeom prst="rect">
             <a:avLst/>
@@ -5889,14 +5809,14 @@
                 </a:solidFill>
                 <a:latin typeface="Georgia"/>
               </a:rPr>
-              <a:t>What game</a:t>
-            </a:r>
-          </a:p>
-        </p:txBody>
-      </p:sp>
-      <p:sp>
-        <p:nvSpPr>
-          <p:cNvPr id="12" name="TextBox 11"/>
+              <a:t>The game</a:t>
+            </a:r>
+          </a:p>
+        </p:txBody>
+      </p:sp>
+      <p:sp>
+        <p:nvSpPr>
+          <p:cNvPr id="11" name="TextBox 10"/>
           <p:cNvSpPr txBox="1"/>
           <p:nvPr/>
         </p:nvSpPr>
@@ -5917,20 +5837,20 @@
           <a:lstStyle/>
           <a:p>
             <a:r>
-              <a:rPr sz="1400" b="0">
+              <a:rPr sz="1500" b="0">
                 <a:solidFill>
                   <a:srgbClr val="F2EBDF"/>
                 </a:solidFill>
                 <a:latin typeface="Calibri"/>
               </a:rPr>
-              <a:t>Crescendo asks robots to collect foam Notes, score into the Speaker and Amp, and finish on Stage — under defense and time pressure.</a:t>
-            </a:r>
-          </a:p>
-        </p:txBody>
-      </p:sp>
-      <p:sp>
-        <p:nvSpPr>
-          <p:cNvPr id="13" name="Rounded Rectangle 12"/>
+              <a:t>Crescendo is like a sports match for robots: pick up foam rings called Notes, score them, and climb at the end.</a:t>
+            </a:r>
+          </a:p>
+        </p:txBody>
+      </p:sp>
+      <p:sp>
+        <p:nvSpPr>
+          <p:cNvPr id="12" name="Rounded Rectangle 11"/>
           <p:cNvSpPr/>
           <p:nvPr/>
         </p:nvSpPr>
@@ -5977,14 +5897,14 @@
       </p:sp>
       <p:sp>
         <p:nvSpPr>
-          <p:cNvPr id="14" name="TextBox 13"/>
+          <p:cNvPr id="13" name="TextBox 12"/>
           <p:cNvSpPr txBox="1"/>
           <p:nvPr/>
         </p:nvSpPr>
         <p:spPr>
           <a:xfrm>
             <a:off x="8275320" y="2697480"/>
-            <a:ext cx="3017520" cy="457200"/>
+            <a:ext cx="3017520" cy="411480"/>
           </a:xfrm>
           <a:prstGeom prst="rect">
             <a:avLst/>
@@ -6004,14 +5924,14 @@
                 </a:solidFill>
                 <a:latin typeface="Georgia"/>
               </a:rPr>
-              <a:t>Our lens today</a:t>
-            </a:r>
-          </a:p>
-        </p:txBody>
-      </p:sp>
-      <p:sp>
-        <p:nvSpPr>
-          <p:cNvPr id="15" name="TextBox 14"/>
+              <a:t>Our focus</a:t>
+            </a:r>
+          </a:p>
+        </p:txBody>
+      </p:sp>
+      <p:sp>
+        <p:nvSpPr>
+          <p:cNvPr id="14" name="TextBox 13"/>
           <p:cNvSpPr txBox="1"/>
           <p:nvPr/>
         </p:nvSpPr>
@@ -6032,20 +5952,20 @@
           <a:lstStyle/>
           <a:p>
             <a:r>
-              <a:rPr sz="1400" b="0">
+              <a:rPr sz="1500" b="0">
                 <a:solidFill>
                   <a:srgbClr val="F2EBDF"/>
                 </a:solidFill>
                 <a:latin typeface="Calibri"/>
               </a:rPr>
-              <a:t>We judge Enzo by design quality: clarity of strategy, mechanism fit, adaptability, and alliance value — never by match tallies.</a:t>
-            </a:r>
-          </a:p>
-        </p:txBody>
-      </p:sp>
-      <p:sp>
-        <p:nvSpPr>
-          <p:cNvPr id="16" name="TextBox 15"/>
+              <a:t>We’ll talk about how Enzo was designed — not about game scores.</a:t>
+            </a:r>
+          </a:p>
+        </p:txBody>
+      </p:sp>
+      <p:sp>
+        <p:nvSpPr>
+          <p:cNvPr id="15" name="TextBox 14"/>
           <p:cNvSpPr txBox="1"/>
           <p:nvPr/>
         </p:nvSpPr>
@@ -6210,7 +6130,7 @@
                 </a:solidFill>
                 <a:latin typeface="Calibri"/>
               </a:rPr>
-              <a:t>THE PROBLEM SPACE</a:t>
+              <a:t>THE CHALLENGE</a:t>
             </a:r>
           </a:p>
         </p:txBody>
@@ -6224,7 +6144,7 @@
         <p:spPr>
           <a:xfrm>
             <a:off x="640080" y="777240"/>
-            <a:ext cx="10972800" cy="1005840"/>
+            <a:ext cx="10972800" cy="1097280"/>
           </a:xfrm>
           <a:prstGeom prst="rect">
             <a:avLst/>
@@ -6238,13 +6158,13 @@
           <a:lstStyle/>
           <a:p>
             <a:r>
-              <a:rPr sz="3600" b="1">
+              <a:rPr sz="3400" b="1">
                 <a:solidFill>
                   <a:srgbClr val="F2EBDF"/>
                 </a:solidFill>
                 <a:latin typeface="Georgia"/>
               </a:rPr>
-              <a:t>What Crescendo demanded</a:t>
+              <a:t>What robots had to do</a:t>
             </a:r>
           </a:p>
         </p:txBody>
@@ -6257,8 +6177,8 @@
         </p:nvSpPr>
         <p:spPr>
           <a:xfrm>
-            <a:off x="640080" y="1737360"/>
-            <a:ext cx="10515600" cy="548640"/>
+            <a:off x="731520" y="2468880"/>
+            <a:ext cx="10515600" cy="3474720"/>
           </a:xfrm>
           <a:prstGeom prst="rect">
             <a:avLst/>
@@ -6271,124 +6191,90 @@
           </a:bodyPr>
           <a:lstStyle/>
           <a:p>
-            <a:r>
-              <a:rPr sz="1600" b="0">
-                <a:solidFill>
-                  <a:srgbClr val="A8A093"/>
+            <a:pPr>
+              <a:spcAft>
+                <a:spcPts val="1400"/>
+              </a:spcAft>
+            </a:pPr>
+            <a:r>
+              <a:rPr sz="2000" b="0">
+                <a:solidFill>
+                  <a:srgbClr val="F2EBDF"/>
                 </a:solidFill>
                 <a:latin typeface="Calibri"/>
               </a:rPr>
-              <a:t>A “best” robot is the one whose architecture fits the game’s constraints cleanly.</a:t>
-            </a:r>
-          </a:p>
-        </p:txBody>
-      </p:sp>
-      <p:sp>
-        <p:nvSpPr>
-          <p:cNvPr id="7" name="TextBox 6"/>
-          <p:cNvSpPr txBox="1"/>
-          <p:nvPr/>
-        </p:nvSpPr>
-        <p:spPr>
-          <a:xfrm>
-            <a:off x="731520" y="2377440"/>
-            <a:ext cx="10515600" cy="3474720"/>
-          </a:xfrm>
-          <a:prstGeom prst="rect">
-            <a:avLst/>
-          </a:prstGeom>
-          <a:noFill/>
-        </p:spPr>
-        <p:txBody>
-          <a:bodyPr wrap="square">
-            <a:spAutoFit/>
-          </a:bodyPr>
-          <a:lstStyle/>
+              <a:t>Pick up Notes from the floor quickly</a:t>
+            </a:r>
+          </a:p>
           <a:p>
             <a:pPr>
               <a:spcAft>
-                <a:spcPts val="1200"/>
+                <a:spcPts val="1400"/>
               </a:spcAft>
             </a:pPr>
             <a:r>
-              <a:rPr sz="1800" b="0">
+              <a:rPr sz="2000" b="0">
                 <a:solidFill>
                   <a:srgbClr val="F2EBDF"/>
                 </a:solidFill>
                 <a:latin typeface="Calibri"/>
               </a:rPr>
-              <a:t>Ground and Source acquisition of Notes with high forgiveness under contact</a:t>
+              <a:t>Shoot them into a big goal (the Speaker)</a:t>
             </a:r>
           </a:p>
           <a:p>
             <a:pPr>
               <a:spcAft>
-                <a:spcPts val="1200"/>
+                <a:spcPts val="1400"/>
               </a:spcAft>
             </a:pPr>
             <a:r>
-              <a:rPr sz="1800" b="0">
+              <a:rPr sz="2000" b="0">
                 <a:solidFill>
                   <a:srgbClr val="F2EBDF"/>
                 </a:solidFill>
                 <a:latin typeface="Calibri"/>
               </a:rPr>
-              <a:t>Fast, accurate Speaker cycles while still creating Amp leverage for the alliance</a:t>
+              <a:t>Also put Notes in a side goal (the Amp)</a:t>
             </a:r>
           </a:p>
           <a:p>
             <a:pPr>
               <a:spcAft>
-                <a:spcPts val="1200"/>
+                <a:spcPts val="1400"/>
               </a:spcAft>
             </a:pPr>
             <a:r>
-              <a:rPr sz="1800" b="0">
+              <a:rPr sz="2000" b="0">
                 <a:solidFill>
                   <a:srgbClr val="F2EBDF"/>
                 </a:solidFill>
                 <a:latin typeface="Calibri"/>
               </a:rPr>
-              <a:t>Endgame Stage presence — climb readiness without destroying the scoring machine</a:t>
+              <a:t>Climb onto a chain at the end of the match</a:t>
             </a:r>
           </a:p>
           <a:p>
             <a:pPr>
               <a:spcAft>
-                <a:spcPts val="1200"/>
+                <a:spcPts val="1400"/>
               </a:spcAft>
             </a:pPr>
             <a:r>
-              <a:rPr sz="1800" b="0">
+              <a:rPr sz="2000" b="0">
                 <a:solidFill>
                   <a:srgbClr val="F2EBDF"/>
                 </a:solidFill>
                 <a:latin typeface="Calibri"/>
               </a:rPr>
-              <a:t>Mobility that survives defense: translation, rotation, and recovery under load</a:t>
-            </a:r>
-          </a:p>
-          <a:p>
-            <a:pPr>
-              <a:spcAft>
-                <a:spcPts val="1200"/>
-              </a:spcAft>
-            </a:pPr>
-            <a:r>
-              <a:rPr sz="1800" b="0">
-                <a:solidFill>
-                  <a:srgbClr val="F2EBDF"/>
-                </a:solidFill>
-                <a:latin typeface="Calibri"/>
-              </a:rPr>
-              <a:t>Software that turns mechanisms into consistent driver workflows</a:t>
-            </a:r>
-          </a:p>
-        </p:txBody>
-      </p:sp>
-      <p:sp>
-        <p:nvSpPr>
-          <p:cNvPr id="8" name="TextBox 7"/>
+              <a:t>Keep moving even when other robots get in the way</a:t>
+            </a:r>
+          </a:p>
+        </p:txBody>
+      </p:sp>
+      <p:sp>
+        <p:nvSpPr>
+          <p:cNvPr id="7" name="TextBox 6"/>
           <p:cNvSpPr txBox="1"/>
           <p:nvPr/>
         </p:nvSpPr>
@@ -6553,7 +6439,7 @@
                 </a:solidFill>
                 <a:latin typeface="Calibri"/>
               </a:rPr>
-              <a:t>DEFINITION</a:t>
+              <a:t>WHAT “BEST” MEANS</a:t>
             </a:r>
           </a:p>
         </p:txBody>
@@ -6567,7 +6453,7 @@
         <p:spPr>
           <a:xfrm>
             <a:off x="640080" y="777240"/>
-            <a:ext cx="10972800" cy="1005840"/>
+            <a:ext cx="10972800" cy="1097280"/>
           </a:xfrm>
           <a:prstGeom prst="rect">
             <a:avLst/>
@@ -6581,13 +6467,13 @@
           <a:lstStyle/>
           <a:p>
             <a:r>
-              <a:rPr sz="3600" b="1">
+              <a:rPr sz="3400" b="1">
                 <a:solidFill>
                   <a:srgbClr val="F2EBDF"/>
                 </a:solidFill>
                 <a:latin typeface="Georgia"/>
               </a:rPr>
-              <a:t>How we define “best”</a:t>
+              <a:t>Not flashiest — smartest</a:t>
             </a:r>
           </a:p>
         </p:txBody>
@@ -6600,8 +6486,8 @@
         </p:nvSpPr>
         <p:spPr>
           <a:xfrm>
-            <a:off x="640080" y="1737360"/>
-            <a:ext cx="10515600" cy="548640"/>
+            <a:off x="731520" y="2468880"/>
+            <a:ext cx="10515600" cy="3474720"/>
           </a:xfrm>
           <a:prstGeom prst="rect">
             <a:avLst/>
@@ -6614,361 +6500,90 @@
           </a:bodyPr>
           <a:lstStyle/>
           <a:p>
-            <a:r>
-              <a:rPr sz="1600" b="0">
-                <a:solidFill>
-                  <a:srgbClr val="A8A093"/>
+            <a:pPr>
+              <a:spcAft>
+                <a:spcPts val="1400"/>
+              </a:spcAft>
+            </a:pPr>
+            <a:r>
+              <a:rPr sz="2000" b="0">
+                <a:solidFill>
+                  <a:srgbClr val="F2EBDF"/>
                 </a:solidFill>
                 <a:latin typeface="Calibri"/>
               </a:rPr>
-              <a:t>If we ban the scoreboard, we need a sharper scorecard.</a:t>
-            </a:r>
-          </a:p>
-        </p:txBody>
-      </p:sp>
-      <p:sp>
-        <p:nvSpPr>
-          <p:cNvPr id="7" name="TextBox 6"/>
-          <p:cNvSpPr txBox="1"/>
-          <p:nvPr/>
-        </p:nvSpPr>
-        <p:spPr>
-          <a:xfrm>
-            <a:off x="731520" y="2240280"/>
-            <a:ext cx="2926080" cy="502920"/>
-          </a:xfrm>
-          <a:prstGeom prst="rect">
-            <a:avLst/>
-          </a:prstGeom>
-          <a:noFill/>
-        </p:spPr>
-        <p:txBody>
-          <a:bodyPr wrap="none">
-            <a:spAutoFit/>
-          </a:bodyPr>
-          <a:lstStyle/>
-          <a:p>
-            <a:r>
-              <a:rPr sz="1800" b="1">
-                <a:solidFill>
-                  <a:srgbClr val="C4964A"/>
-                </a:solidFill>
-                <a:latin typeface="Georgia"/>
-              </a:rPr>
-              <a:t>Strategy clarity</a:t>
-            </a:r>
-          </a:p>
-        </p:txBody>
-      </p:sp>
-      <p:sp>
-        <p:nvSpPr>
-          <p:cNvPr id="8" name="TextBox 7"/>
-          <p:cNvSpPr txBox="1"/>
-          <p:nvPr/>
-        </p:nvSpPr>
-        <p:spPr>
-          <a:xfrm>
-            <a:off x="3749039" y="2240280"/>
-            <a:ext cx="7589520" cy="502920"/>
-          </a:xfrm>
-          <a:prstGeom prst="rect">
-            <a:avLst/>
-          </a:prstGeom>
-          <a:noFill/>
-        </p:spPr>
-        <p:txBody>
-          <a:bodyPr wrap="square">
-            <a:spAutoFit/>
-          </a:bodyPr>
-          <a:lstStyle/>
-          <a:p>
-            <a:r>
-              <a:rPr sz="1600" b="0">
+              <a:t>Has a clear plan for the whole game</a:t>
+            </a:r>
+          </a:p>
+          <a:p>
+            <a:pPr>
+              <a:spcAft>
+                <a:spcPts val="1400"/>
+              </a:spcAft>
+            </a:pPr>
+            <a:r>
+              <a:rPr sz="2000" b="0">
                 <a:solidFill>
                   <a:srgbClr val="F2EBDF"/>
                 </a:solidFill>
                 <a:latin typeface="Calibri"/>
               </a:rPr>
-              <a:t>Every major subsystem serves a coherent game plan.</a:t>
-            </a:r>
-          </a:p>
-        </p:txBody>
-      </p:sp>
-      <p:sp>
-        <p:nvSpPr>
-          <p:cNvPr id="9" name="TextBox 8"/>
-          <p:cNvSpPr txBox="1"/>
-          <p:nvPr/>
-        </p:nvSpPr>
-        <p:spPr>
-          <a:xfrm>
-            <a:off x="731520" y="2926080"/>
-            <a:ext cx="2926080" cy="502920"/>
-          </a:xfrm>
-          <a:prstGeom prst="rect">
-            <a:avLst/>
-          </a:prstGeom>
-          <a:noFill/>
-        </p:spPr>
-        <p:txBody>
-          <a:bodyPr wrap="none">
-            <a:spAutoFit/>
-          </a:bodyPr>
-          <a:lstStyle/>
-          <a:p>
-            <a:r>
-              <a:rPr sz="1800" b="1">
-                <a:solidFill>
-                  <a:srgbClr val="C4964A"/>
-                </a:solidFill>
-                <a:latin typeface="Georgia"/>
-              </a:rPr>
-              <a:t>Cycle quality</a:t>
-            </a:r>
-          </a:p>
-        </p:txBody>
-      </p:sp>
-      <p:sp>
-        <p:nvSpPr>
-          <p:cNvPr id="10" name="TextBox 9"/>
-          <p:cNvSpPr txBox="1"/>
-          <p:nvPr/>
-        </p:nvSpPr>
-        <p:spPr>
-          <a:xfrm>
-            <a:off x="3749039" y="2926080"/>
-            <a:ext cx="7589520" cy="502920"/>
-          </a:xfrm>
-          <a:prstGeom prst="rect">
-            <a:avLst/>
-          </a:prstGeom>
-          <a:noFill/>
-        </p:spPr>
-        <p:txBody>
-          <a:bodyPr wrap="square">
-            <a:spAutoFit/>
-          </a:bodyPr>
-          <a:lstStyle/>
-          <a:p>
-            <a:r>
-              <a:rPr sz="1600" b="0">
+              <a:t>Picks up and scores Notes smoothly</a:t>
+            </a:r>
+          </a:p>
+          <a:p>
+            <a:pPr>
+              <a:spcAft>
+                <a:spcPts val="1400"/>
+              </a:spcAft>
+            </a:pPr>
+            <a:r>
+              <a:rPr sz="2000" b="0">
                 <a:solidFill>
                   <a:srgbClr val="F2EBDF"/>
                 </a:solidFill>
                 <a:latin typeface="Calibri"/>
               </a:rPr>
-              <a:t>Intake → control → score is short, stable, and repeatable.</a:t>
-            </a:r>
-          </a:p>
-        </p:txBody>
-      </p:sp>
-      <p:sp>
-        <p:nvSpPr>
-          <p:cNvPr id="11" name="TextBox 10"/>
-          <p:cNvSpPr txBox="1"/>
-          <p:nvPr/>
-        </p:nvSpPr>
-        <p:spPr>
-          <a:xfrm>
-            <a:off x="731520" y="3611880"/>
-            <a:ext cx="2926080" cy="502920"/>
-          </a:xfrm>
-          <a:prstGeom prst="rect">
-            <a:avLst/>
-          </a:prstGeom>
-          <a:noFill/>
-        </p:spPr>
-        <p:txBody>
-          <a:bodyPr wrap="none">
-            <a:spAutoFit/>
-          </a:bodyPr>
-          <a:lstStyle/>
-          <a:p>
-            <a:r>
-              <a:rPr sz="1800" b="1">
-                <a:solidFill>
-                  <a:srgbClr val="C4964A"/>
-                </a:solidFill>
-                <a:latin typeface="Georgia"/>
-              </a:rPr>
-              <a:t>Role flexibility</a:t>
-            </a:r>
-          </a:p>
-        </p:txBody>
-      </p:sp>
-      <p:sp>
-        <p:nvSpPr>
-          <p:cNvPr id="12" name="TextBox 11"/>
-          <p:cNvSpPr txBox="1"/>
-          <p:nvPr/>
-        </p:nvSpPr>
-        <p:spPr>
-          <a:xfrm>
-            <a:off x="3749039" y="3611880"/>
-            <a:ext cx="7589520" cy="502920"/>
-          </a:xfrm>
-          <a:prstGeom prst="rect">
-            <a:avLst/>
-          </a:prstGeom>
-          <a:noFill/>
-        </p:spPr>
-        <p:txBody>
-          <a:bodyPr wrap="square">
-            <a:spAutoFit/>
-          </a:bodyPr>
-          <a:lstStyle/>
-          <a:p>
-            <a:r>
-              <a:rPr sz="1600" b="0">
+              <a:t>Can help the team in more than one way</a:t>
+            </a:r>
+          </a:p>
+          <a:p>
+            <a:pPr>
+              <a:spcAft>
+                <a:spcPts val="1400"/>
+              </a:spcAft>
+            </a:pPr>
+            <a:r>
+              <a:rPr sz="2000" b="0">
                 <a:solidFill>
                   <a:srgbClr val="F2EBDF"/>
                 </a:solidFill>
                 <a:latin typeface="Calibri"/>
               </a:rPr>
-              <a:t>Useful as scorer, cleaner, or endgame partner.</a:t>
-            </a:r>
-          </a:p>
-        </p:txBody>
-      </p:sp>
-      <p:sp>
-        <p:nvSpPr>
-          <p:cNvPr id="13" name="TextBox 12"/>
-          <p:cNvSpPr txBox="1"/>
-          <p:nvPr/>
-        </p:nvSpPr>
-        <p:spPr>
-          <a:xfrm>
-            <a:off x="731520" y="4297680"/>
-            <a:ext cx="2926080" cy="502920"/>
-          </a:xfrm>
-          <a:prstGeom prst="rect">
-            <a:avLst/>
-          </a:prstGeom>
-          <a:noFill/>
-        </p:spPr>
-        <p:txBody>
-          <a:bodyPr wrap="none">
-            <a:spAutoFit/>
-          </a:bodyPr>
-          <a:lstStyle/>
-          <a:p>
-            <a:r>
-              <a:rPr sz="1800" b="1">
-                <a:solidFill>
-                  <a:srgbClr val="C4964A"/>
-                </a:solidFill>
-                <a:latin typeface="Georgia"/>
-              </a:rPr>
-              <a:t>Iteration courage</a:t>
-            </a:r>
-          </a:p>
-        </p:txBody>
-      </p:sp>
-      <p:sp>
-        <p:nvSpPr>
-          <p:cNvPr id="14" name="TextBox 13"/>
-          <p:cNvSpPr txBox="1"/>
-          <p:nvPr/>
-        </p:nvSpPr>
-        <p:spPr>
-          <a:xfrm>
-            <a:off x="3749039" y="4297680"/>
-            <a:ext cx="7589520" cy="502920"/>
-          </a:xfrm>
-          <a:prstGeom prst="rect">
-            <a:avLst/>
-          </a:prstGeom>
-          <a:noFill/>
-        </p:spPr>
-        <p:txBody>
-          <a:bodyPr wrap="square">
-            <a:spAutoFit/>
-          </a:bodyPr>
-          <a:lstStyle/>
-          <a:p>
-            <a:r>
-              <a:rPr sz="1600" b="0">
+              <a:t>Gets better when the team finds problems</a:t>
+            </a:r>
+          </a:p>
+          <a:p>
+            <a:pPr>
+              <a:spcAft>
+                <a:spcPts val="1400"/>
+              </a:spcAft>
+            </a:pPr>
+            <a:r>
+              <a:rPr sz="2000" b="0">
                 <a:solidFill>
                   <a:srgbClr val="F2EBDF"/>
                 </a:solidFill>
                 <a:latin typeface="Calibri"/>
               </a:rPr>
-              <a:t>The team redesigns when the field teaches a better truth.</a:t>
-            </a:r>
-          </a:p>
-        </p:txBody>
-      </p:sp>
-      <p:sp>
-        <p:nvSpPr>
-          <p:cNvPr id="15" name="TextBox 14"/>
-          <p:cNvSpPr txBox="1"/>
-          <p:nvPr/>
-        </p:nvSpPr>
-        <p:spPr>
-          <a:xfrm>
-            <a:off x="731520" y="4983480"/>
-            <a:ext cx="2926080" cy="502920"/>
-          </a:xfrm>
-          <a:prstGeom prst="rect">
-            <a:avLst/>
-          </a:prstGeom>
-          <a:noFill/>
-        </p:spPr>
-        <p:txBody>
-          <a:bodyPr wrap="none">
-            <a:spAutoFit/>
-          </a:bodyPr>
-          <a:lstStyle/>
-          <a:p>
-            <a:r>
-              <a:rPr sz="1800" b="1">
-                <a:solidFill>
-                  <a:srgbClr val="C4964A"/>
-                </a:solidFill>
-                <a:latin typeface="Georgia"/>
-              </a:rPr>
-              <a:t>Driver trust</a:t>
-            </a:r>
-          </a:p>
-        </p:txBody>
-      </p:sp>
-      <p:sp>
-        <p:nvSpPr>
-          <p:cNvPr id="16" name="TextBox 15"/>
-          <p:cNvSpPr txBox="1"/>
-          <p:nvPr/>
-        </p:nvSpPr>
-        <p:spPr>
-          <a:xfrm>
-            <a:off x="3749039" y="4983480"/>
-            <a:ext cx="7589520" cy="502920"/>
-          </a:xfrm>
-          <a:prstGeom prst="rect">
-            <a:avLst/>
-          </a:prstGeom>
-          <a:noFill/>
-        </p:spPr>
-        <p:txBody>
-          <a:bodyPr wrap="square">
-            <a:spAutoFit/>
-          </a:bodyPr>
-          <a:lstStyle/>
-          <a:p>
-            <a:r>
-              <a:rPr sz="1600" b="0">
-                <a:solidFill>
-                  <a:srgbClr val="F2EBDF"/>
-                </a:solidFill>
-                <a:latin typeface="Calibri"/>
-              </a:rPr>
-              <a:t>The robot makes hard things feel ordinary at the controls.</a:t>
-            </a:r>
-          </a:p>
-        </p:txBody>
-      </p:sp>
-      <p:sp>
-        <p:nvSpPr>
-          <p:cNvPr id="17" name="TextBox 16"/>
+              <a:t>Is easy for the drivers to control</a:t>
+            </a:r>
+          </a:p>
+        </p:txBody>
+      </p:sp>
+      <p:sp>
+        <p:nvSpPr>
+          <p:cNvPr id="7" name="TextBox 6"/>
           <p:cNvSpPr txBox="1"/>
           <p:nvPr/>
         </p:nvSpPr>
@@ -7133,7 +6748,7 @@
                 </a:solidFill>
                 <a:latin typeface="Calibri"/>
               </a:rPr>
-              <a:t>DESIGN CULTURE</a:t>
+              <a:t>IMPROVING THE ROBOT</a:t>
             </a:r>
           </a:p>
         </p:txBody>
@@ -7147,7 +6762,7 @@
         <p:spPr>
           <a:xfrm>
             <a:off x="640080" y="777240"/>
-            <a:ext cx="10972800" cy="1005840"/>
+            <a:ext cx="10972800" cy="1097280"/>
           </a:xfrm>
           <a:prstGeom prst="rect">
             <a:avLst/>
@@ -7161,13 +6776,13 @@
           <a:lstStyle/>
           <a:p>
             <a:r>
-              <a:rPr sz="3600" b="1">
+              <a:rPr sz="3400" b="1">
                 <a:solidFill>
                   <a:srgbClr val="F2EBDF"/>
                 </a:solidFill>
                 <a:latin typeface="Georgia"/>
               </a:rPr>
-              <a:t>Enzo was rebuilt when it had to be</a:t>
+              <a:t>They weren’t afraid to change it</a:t>
             </a:r>
           </a:p>
         </p:txBody>
@@ -7180,8 +6795,8 @@
         </p:nvSpPr>
         <p:spPr>
           <a:xfrm>
-            <a:off x="640080" y="1737360"/>
-            <a:ext cx="10515600" cy="548640"/>
+            <a:off x="640080" y="1874519"/>
+            <a:ext cx="10515600" cy="502920"/>
           </a:xfrm>
           <a:prstGeom prst="rect">
             <a:avLst/>
@@ -7201,7 +6816,7 @@
                 </a:solidFill>
                 <a:latin typeface="Calibri"/>
               </a:rPr>
-              <a:t>After early district play, Steampunk chose substantial redesign before championship stretch — a hallmark of elite engineering culture.</a:t>
+              <a:t>Midway through the season, the team rebuilt big parts of Enzo.</a:t>
             </a:r>
           </a:p>
         </p:txBody>
@@ -7214,7 +6829,7 @@
         </p:nvSpPr>
         <p:spPr>
           <a:xfrm>
-            <a:off x="731520" y="2606040"/>
+            <a:off x="731520" y="2651760"/>
             <a:ext cx="10515600" cy="3474720"/>
           </a:xfrm>
           <a:prstGeom prst="rect">
@@ -7230,65 +6845,49 @@
           <a:p>
             <a:pPr>
               <a:spcAft>
-                <a:spcPts val="1200"/>
+                <a:spcPts val="1400"/>
               </a:spcAft>
             </a:pPr>
             <a:r>
-              <a:rPr sz="1800" b="0">
+              <a:rPr sz="2000" b="0">
                 <a:solidFill>
                   <a:srgbClr val="F2EBDF"/>
                 </a:solidFill>
                 <a:latin typeface="Calibri"/>
               </a:rPr>
-              <a:t>Best robots are not frozen at bag day — they are updated when reality disagrees with CAD</a:t>
+              <a:t>They listened to what wasn’t working and fixed it</a:t>
             </a:r>
           </a:p>
           <a:p>
             <a:pPr>
               <a:spcAft>
-                <a:spcPts val="1200"/>
+                <a:spcPts val="1400"/>
               </a:spcAft>
             </a:pPr>
             <a:r>
-              <a:rPr sz="1800" b="0">
+              <a:rPr sz="2000" b="0">
                 <a:solidFill>
                   <a:srgbClr val="F2EBDF"/>
                 </a:solidFill>
                 <a:latin typeface="Calibri"/>
               </a:rPr>
-              <a:t>A mid-season rebuild signals ruthless prioritization: keep what works, cut what fights the game</a:t>
+              <a:t>Great engineering means improving — not sticking with a bad first idea</a:t>
             </a:r>
           </a:p>
           <a:p>
             <a:pPr>
               <a:spcAft>
-                <a:spcPts val="1200"/>
+                <a:spcPts val="1400"/>
               </a:spcAft>
             </a:pPr>
             <a:r>
-              <a:rPr sz="1800" b="0">
+              <a:rPr sz="2000" b="0">
                 <a:solidFill>
                   <a:srgbClr val="F2EBDF"/>
                 </a:solidFill>
                 <a:latin typeface="Calibri"/>
               </a:rPr>
-              <a:t>Enzo’s identity is improvement under pressure — the machine evolves toward the field’s true meta</a:t>
-            </a:r>
-          </a:p>
-          <a:p>
-            <a:pPr>
-              <a:spcAft>
-                <a:spcPts val="1200"/>
-              </a:spcAft>
-            </a:pPr>
-            <a:r>
-              <a:rPr sz="1800" b="0">
-                <a:solidFill>
-                  <a:srgbClr val="F2EBDF"/>
-                </a:solidFill>
-                <a:latin typeface="Calibri"/>
-              </a:rPr>
-              <a:t>That discipline is rarer than clever mechanisms, and more decisive than either alone</a:t>
+              <a:t>Enzo got better because the team was willing to change</a:t>
             </a:r>
           </a:p>
         </p:txBody>
@@ -7460,7 +7059,7 @@
                 </a:solidFill>
                 <a:latin typeface="Calibri"/>
               </a:rPr>
-              <a:t>SUBSYSTEM THESIS</a:t>
+              <a:t>PICKING UP GAME PIECES</a:t>
             </a:r>
           </a:p>
         </p:txBody>
@@ -7474,7 +7073,7 @@
         <p:spPr>
           <a:xfrm>
             <a:off x="640080" y="777240"/>
-            <a:ext cx="10972800" cy="1005840"/>
+            <a:ext cx="10972800" cy="1097280"/>
           </a:xfrm>
           <a:prstGeom prst="rect">
             <a:avLst/>
@@ -7488,54 +7087,20 @@
           <a:lstStyle/>
           <a:p>
             <a:r>
-              <a:rPr sz="3600" b="1">
+              <a:rPr sz="3400" b="1">
                 <a:solidFill>
                   <a:srgbClr val="F2EBDF"/>
                 </a:solidFill>
                 <a:latin typeface="Georgia"/>
               </a:rPr>
-              <a:t>Notes first: possession is power</a:t>
-            </a:r>
-          </a:p>
-        </p:txBody>
-      </p:sp>
-      <p:sp>
-        <p:nvSpPr>
-          <p:cNvPr id="6" name="TextBox 5"/>
-          <p:cNvSpPr txBox="1"/>
-          <p:nvPr/>
-        </p:nvSpPr>
-        <p:spPr>
-          <a:xfrm>
-            <a:off x="640080" y="1737360"/>
-            <a:ext cx="10515600" cy="548640"/>
-          </a:xfrm>
-          <a:prstGeom prst="rect">
-            <a:avLst/>
-          </a:prstGeom>
-          <a:noFill/>
-        </p:spPr>
-        <p:txBody>
-          <a:bodyPr wrap="square">
-            <a:spAutoFit/>
-          </a:bodyPr>
-          <a:lstStyle/>
-          <a:p>
-            <a:r>
-              <a:rPr sz="1600" b="0">
-                <a:solidFill>
-                  <a:srgbClr val="A8A093"/>
-                </a:solidFill>
-                <a:latin typeface="Calibri"/>
-              </a:rPr>
-              <a:t>In Crescendo, the robot that owns Notes controls tempo.</a:t>
-            </a:r>
-          </a:p>
-        </p:txBody>
-      </p:sp>
-      <p:sp>
-        <p:nvSpPr>
-          <p:cNvPr id="7" name="Rounded Rectangle 6"/>
+              <a:t>If you can’t grab Notes, you can’t score</a:t>
+            </a:r>
+          </a:p>
+        </p:txBody>
+      </p:sp>
+      <p:sp>
+        <p:nvSpPr>
+          <p:cNvPr id="6" name="Rounded Rectangle 5"/>
           <p:cNvSpPr/>
           <p:nvPr/>
         </p:nvSpPr>
@@ -7582,14 +7147,14 @@
       </p:sp>
       <p:sp>
         <p:nvSpPr>
-          <p:cNvPr id="8" name="TextBox 7"/>
+          <p:cNvPr id="7" name="TextBox 6"/>
           <p:cNvSpPr txBox="1"/>
           <p:nvPr/>
         </p:nvSpPr>
         <p:spPr>
           <a:xfrm>
             <a:off x="868680" y="2697480"/>
-            <a:ext cx="4937760" cy="457200"/>
+            <a:ext cx="4937760" cy="411480"/>
           </a:xfrm>
           <a:prstGeom prst="rect">
             <a:avLst/>
@@ -7609,14 +7174,14 @@
                 </a:solidFill>
                 <a:latin typeface="Georgia"/>
               </a:rPr>
-              <a:t>Acquisition philosophy</a:t>
-            </a:r>
-          </a:p>
-        </p:txBody>
-      </p:sp>
-      <p:sp>
-        <p:nvSpPr>
-          <p:cNvPr id="9" name="TextBox 8"/>
+              <a:t>Simple idea</a:t>
+            </a:r>
+          </a:p>
+        </p:txBody>
+      </p:sp>
+      <p:sp>
+        <p:nvSpPr>
+          <p:cNvPr id="8" name="TextBox 7"/>
           <p:cNvSpPr txBox="1"/>
           <p:nvPr/>
         </p:nvSpPr>
@@ -7637,20 +7202,20 @@
           <a:lstStyle/>
           <a:p>
             <a:r>
-              <a:rPr sz="1400" b="0">
+              <a:rPr sz="1500" b="0">
                 <a:solidFill>
                   <a:srgbClr val="F2EBDF"/>
                 </a:solidFill>
                 <a:latin typeface="Calibri"/>
               </a:rPr>
-              <a:t>A best-in-class Crescendo bot treats intake as a reliability problem: wide capture, quick centering, and handoff that never asks the driver for perfect alignment.</a:t>
-            </a:r>
-          </a:p>
-        </p:txBody>
-      </p:sp>
-      <p:sp>
-        <p:nvSpPr>
-          <p:cNvPr id="10" name="Rounded Rectangle 9"/>
+              <a:t>Enzo is built around getting Notes fast and keeping them under control.</a:t>
+            </a:r>
+          </a:p>
+        </p:txBody>
+      </p:sp>
+      <p:sp>
+        <p:nvSpPr>
+          <p:cNvPr id="9" name="Rounded Rectangle 8"/>
           <p:cNvSpPr/>
           <p:nvPr/>
         </p:nvSpPr>
@@ -7697,14 +7262,14 @@
       </p:sp>
       <p:sp>
         <p:nvSpPr>
-          <p:cNvPr id="11" name="TextBox 10"/>
+          <p:cNvPr id="10" name="TextBox 9"/>
           <p:cNvSpPr txBox="1"/>
           <p:nvPr/>
         </p:nvSpPr>
         <p:spPr>
           <a:xfrm>
             <a:off x="6537960" y="2697480"/>
-            <a:ext cx="4754880" cy="457200"/>
+            <a:ext cx="4754880" cy="411480"/>
           </a:xfrm>
           <a:prstGeom prst="rect">
             <a:avLst/>
@@ -7724,14 +7289,14 @@
                 </a:solidFill>
                 <a:latin typeface="Georgia"/>
               </a:rPr>
-              <a:t>Why Enzo wins here</a:t>
-            </a:r>
-          </a:p>
-        </p:txBody>
-      </p:sp>
-      <p:sp>
-        <p:nvSpPr>
-          <p:cNvPr id="12" name="TextBox 11"/>
+              <a:t>Sports comparison</a:t>
+            </a:r>
+          </a:p>
+        </p:txBody>
+      </p:sp>
+      <p:sp>
+        <p:nvSpPr>
+          <p:cNvPr id="11" name="TextBox 10"/>
           <p:cNvSpPr txBox="1"/>
           <p:nvPr/>
         </p:nvSpPr>
@@ -7752,20 +7317,20 @@
           <a:lstStyle/>
           <a:p>
             <a:r>
-              <a:rPr sz="1400" b="0">
+              <a:rPr sz="1500" b="0">
                 <a:solidFill>
                   <a:srgbClr val="F2EBDF"/>
                 </a:solidFill>
                 <a:latin typeface="Calibri"/>
               </a:rPr>
-              <a:t>Enzo’s architecture is organized around uninterrupted Note flow — ground cleanup and Source cycles feed the same scoring path, so every possession becomes an alliance asset.</a:t>
-            </a:r>
-          </a:p>
-        </p:txBody>
-      </p:sp>
-      <p:sp>
-        <p:nvSpPr>
-          <p:cNvPr id="13" name="TextBox 12"/>
+              <a:t>Owning the Notes is like owning the basketball. Enzo was made to take that job seriously.</a:t>
+            </a:r>
+          </a:p>
+        </p:txBody>
+      </p:sp>
+      <p:sp>
+        <p:nvSpPr>
+          <p:cNvPr id="12" name="TextBox 11"/>
           <p:cNvSpPr txBox="1"/>
           <p:nvPr/>
         </p:nvSpPr>
@@ -7930,7 +7495,7 @@
                 </a:solidFill>
                 <a:latin typeface="Calibri"/>
               </a:rPr>
-              <a:t>SCORING ARCHITECTURE</a:t>
+              <a:t>SCORING</a:t>
             </a:r>
           </a:p>
         </p:txBody>
@@ -7944,7 +7509,7 @@
         <p:spPr>
           <a:xfrm>
             <a:off x="640080" y="777240"/>
-            <a:ext cx="10972800" cy="1005840"/>
+            <a:ext cx="10972800" cy="1097280"/>
           </a:xfrm>
           <a:prstGeom prst="rect">
             <a:avLst/>
@@ -7958,13 +7523,13 @@
           <a:lstStyle/>
           <a:p>
             <a:r>
-              <a:rPr sz="3600" b="1">
+              <a:rPr sz="3400" b="1">
                 <a:solidFill>
                   <a:srgbClr val="F2EBDF"/>
                 </a:solidFill>
                 <a:latin typeface="Georgia"/>
               </a:rPr>
-              <a:t>Speaker threat + Amp utility</a:t>
+              <a:t>Two ways to score, one robot</a:t>
             </a:r>
           </a:p>
         </p:txBody>
@@ -7977,8 +7542,8 @@
         </p:nvSpPr>
         <p:spPr>
           <a:xfrm>
-            <a:off x="640080" y="1737360"/>
-            <a:ext cx="10515600" cy="548640"/>
+            <a:off x="731520" y="2468880"/>
+            <a:ext cx="10515600" cy="3474720"/>
           </a:xfrm>
           <a:prstGeom prst="rect">
             <a:avLst/>
@@ -7991,108 +7556,74 @@
           </a:bodyPr>
           <a:lstStyle/>
           <a:p>
-            <a:r>
-              <a:rPr sz="1600" b="0">
-                <a:solidFill>
-                  <a:srgbClr val="A8A093"/>
+            <a:pPr>
+              <a:spcAft>
+                <a:spcPts val="1400"/>
+              </a:spcAft>
+            </a:pPr>
+            <a:r>
+              <a:rPr sz="2000" b="0">
+                <a:solidFill>
+                  <a:srgbClr val="F2EBDF"/>
                 </a:solidFill>
                 <a:latin typeface="Calibri"/>
               </a:rPr>
-              <a:t>Crescendo rewarded robots that could pressure both scoring modes without becoming two half-finished machines.</a:t>
-            </a:r>
-          </a:p>
-        </p:txBody>
-      </p:sp>
-      <p:sp>
-        <p:nvSpPr>
-          <p:cNvPr id="7" name="TextBox 6"/>
-          <p:cNvSpPr txBox="1"/>
-          <p:nvPr/>
-        </p:nvSpPr>
-        <p:spPr>
-          <a:xfrm>
-            <a:off x="731520" y="2468880"/>
-            <a:ext cx="10515600" cy="3474720"/>
-          </a:xfrm>
-          <a:prstGeom prst="rect">
-            <a:avLst/>
-          </a:prstGeom>
-          <a:noFill/>
-        </p:spPr>
-        <p:txBody>
-          <a:bodyPr wrap="square">
-            <a:spAutoFit/>
-          </a:bodyPr>
-          <a:lstStyle/>
+              <a:t>It can shoot into the Speaker for regular scoring</a:t>
+            </a:r>
+          </a:p>
           <a:p>
             <a:pPr>
               <a:spcAft>
-                <a:spcPts val="1200"/>
+                <a:spcPts val="1400"/>
               </a:spcAft>
             </a:pPr>
             <a:r>
-              <a:rPr sz="1800" b="0">
+              <a:rPr sz="2000" b="0">
                 <a:solidFill>
                   <a:srgbClr val="F2EBDF"/>
                 </a:solidFill>
                 <a:latin typeface="Calibri"/>
               </a:rPr>
-              <a:t>Speaker capability creates continuous cycle pressure across the field</a:t>
+              <a:t>It can also score in the Amp to help its alliance</a:t>
             </a:r>
           </a:p>
           <a:p>
             <a:pPr>
               <a:spcAft>
-                <a:spcPts val="1200"/>
+                <a:spcPts val="1400"/>
               </a:spcAft>
             </a:pPr>
             <a:r>
-              <a:rPr sz="1800" b="0">
+              <a:rPr sz="2000" b="0">
                 <a:solidFill>
                   <a:srgbClr val="F2EBDF"/>
                 </a:solidFill>
                 <a:latin typeface="Calibri"/>
               </a:rPr>
-              <a:t>Amp capability turns alliance coordination into leverage, not a side quest</a:t>
+              <a:t>Drivers can pick the better option when the field is crowded</a:t>
             </a:r>
           </a:p>
           <a:p>
             <a:pPr>
               <a:spcAft>
-                <a:spcPts val="1200"/>
+                <a:spcPts val="1400"/>
               </a:spcAft>
             </a:pPr>
             <a:r>
-              <a:rPr sz="1800" b="0">
+              <a:rPr sz="2000" b="0">
                 <a:solidFill>
                   <a:srgbClr val="F2EBDF"/>
                 </a:solidFill>
                 <a:latin typeface="Calibri"/>
               </a:rPr>
-              <a:t>A unified scoring package lets drivers choose the right action for congestion</a:t>
-            </a:r>
-          </a:p>
-          <a:p>
-            <a:pPr>
-              <a:spcAft>
-                <a:spcPts val="1200"/>
-              </a:spcAft>
-            </a:pPr>
-            <a:r>
-              <a:rPr sz="1800" b="0">
-                <a:solidFill>
-                  <a:srgbClr val="F2EBDF"/>
-                </a:solidFill>
-                <a:latin typeface="Calibri"/>
-              </a:rPr>
-              <a:t>Enzo’s “best” claim is versatility under chaos — not a single highlight reel shot</a:t>
-            </a:r>
-          </a:p>
-        </p:txBody>
-      </p:sp>
-      <p:sp>
-        <p:nvSpPr>
-          <p:cNvPr id="8" name="TextBox 7"/>
+              <a:t>Being flexible is better than only being good at one thing</a:t>
+            </a:r>
+          </a:p>
+        </p:txBody>
+      </p:sp>
+      <p:sp>
+        <p:nvSpPr>
+          <p:cNvPr id="7" name="TextBox 6"/>
           <p:cNvSpPr txBox="1"/>
           <p:nvPr/>
         </p:nvSpPr>
@@ -8257,7 +7788,7 @@
                 </a:solidFill>
                 <a:latin typeface="Calibri"/>
               </a:rPr>
-              <a:t>ENDGAME</a:t>
+              <a:t>THE END OF THE MATCH</a:t>
             </a:r>
           </a:p>
         </p:txBody>
@@ -8271,7 +7802,7 @@
         <p:spPr>
           <a:xfrm>
             <a:off x="640080" y="777240"/>
-            <a:ext cx="10972800" cy="1005840"/>
+            <a:ext cx="10972800" cy="1097280"/>
           </a:xfrm>
           <a:prstGeom prst="rect">
             <a:avLst/>
@@ -8285,54 +7816,20 @@
           <a:lstStyle/>
           <a:p>
             <a:r>
-              <a:rPr sz="3600" b="1">
+              <a:rPr sz="3400" b="1">
                 <a:solidFill>
                   <a:srgbClr val="F2EBDF"/>
                 </a:solidFill>
                 <a:latin typeface="Georgia"/>
               </a:rPr>
-              <a:t>Stage-ready without compromise</a:t>
-            </a:r>
-          </a:p>
-        </p:txBody>
-      </p:sp>
-      <p:sp>
-        <p:nvSpPr>
-          <p:cNvPr id="6" name="TextBox 5"/>
-          <p:cNvSpPr txBox="1"/>
-          <p:nvPr/>
-        </p:nvSpPr>
-        <p:spPr>
-          <a:xfrm>
-            <a:off x="640080" y="1737360"/>
-            <a:ext cx="10515600" cy="548640"/>
-          </a:xfrm>
-          <a:prstGeom prst="rect">
-            <a:avLst/>
-          </a:prstGeom>
-          <a:noFill/>
-        </p:spPr>
-        <p:txBody>
-          <a:bodyPr wrap="square">
-            <a:spAutoFit/>
-          </a:bodyPr>
-          <a:lstStyle/>
-          <a:p>
-            <a:r>
-              <a:rPr sz="1600" b="0">
-                <a:solidFill>
-                  <a:srgbClr val="A8A093"/>
-                </a:solidFill>
-                <a:latin typeface="Calibri"/>
-              </a:rPr>
-              <a:t>Climbing only matters if the robot can still score for 2:15 first.</a:t>
-            </a:r>
-          </a:p>
-        </p:txBody>
-      </p:sp>
-      <p:sp>
-        <p:nvSpPr>
-          <p:cNvPr id="7" name="Rounded Rectangle 6"/>
+              <a:t>Climbing without breaking the plan</a:t>
+            </a:r>
+          </a:p>
+        </p:txBody>
+      </p:sp>
+      <p:sp>
+        <p:nvSpPr>
+          <p:cNvPr id="6" name="Rounded Rectangle 5"/>
           <p:cNvSpPr/>
           <p:nvPr/>
         </p:nvSpPr>
@@ -8379,14 +7876,14 @@
       </p:sp>
       <p:sp>
         <p:nvSpPr>
-          <p:cNvPr id="8" name="TextBox 7"/>
+          <p:cNvPr id="7" name="TextBox 6"/>
           <p:cNvSpPr txBox="1"/>
           <p:nvPr/>
         </p:nvSpPr>
         <p:spPr>
           <a:xfrm>
             <a:off x="868680" y="2697480"/>
-            <a:ext cx="4937760" cy="457200"/>
+            <a:ext cx="4937760" cy="411480"/>
           </a:xfrm>
           <a:prstGeom prst="rect">
             <a:avLst/>
@@ -8406,14 +7903,14 @@
                 </a:solidFill>
                 <a:latin typeface="Georgia"/>
               </a:rPr>
-              <a:t>The trap many robots fall into</a:t>
-            </a:r>
-          </a:p>
-        </p:txBody>
-      </p:sp>
-      <p:sp>
-        <p:nvSpPr>
-          <p:cNvPr id="9" name="TextBox 8"/>
+              <a:t>Common mistake</a:t>
+            </a:r>
+          </a:p>
+        </p:txBody>
+      </p:sp>
+      <p:sp>
+        <p:nvSpPr>
+          <p:cNvPr id="8" name="TextBox 7"/>
           <p:cNvSpPr txBox="1"/>
           <p:nvPr/>
         </p:nvSpPr>
@@ -8434,20 +7931,20 @@
           <a:lstStyle/>
           <a:p>
             <a:r>
-              <a:rPr sz="1400" b="0">
+              <a:rPr sz="1500" b="0">
                 <a:solidFill>
                   <a:srgbClr val="F2EBDF"/>
                 </a:solidFill>
                 <a:latin typeface="Calibri"/>
               </a:rPr>
-              <a:t>Designs that chase every endgame flourish often weaken teleop throughput. Best Crescendo robots protect cycle identity first, then add Stage presence that does not sabotage it.</a:t>
-            </a:r>
-          </a:p>
-        </p:txBody>
-      </p:sp>
-      <p:sp>
-        <p:nvSpPr>
-          <p:cNvPr id="10" name="Rounded Rectangle 9"/>
+              <a:t>Some robots try so hard to climb that they get worse at scoring.</a:t>
+            </a:r>
+          </a:p>
+        </p:txBody>
+      </p:sp>
+      <p:sp>
+        <p:nvSpPr>
+          <p:cNvPr id="9" name="Rounded Rectangle 8"/>
           <p:cNvSpPr/>
           <p:nvPr/>
         </p:nvSpPr>
@@ -8494,14 +7991,14 @@
       </p:sp>
       <p:sp>
         <p:nvSpPr>
-          <p:cNvPr id="11" name="TextBox 10"/>
+          <p:cNvPr id="10" name="TextBox 9"/>
           <p:cNvSpPr txBox="1"/>
           <p:nvPr/>
         </p:nvSpPr>
         <p:spPr>
           <a:xfrm>
             <a:off x="6537960" y="2697480"/>
-            <a:ext cx="4754880" cy="457200"/>
+            <a:ext cx="4754880" cy="411480"/>
           </a:xfrm>
           <a:prstGeom prst="rect">
             <a:avLst/>
@@ -8528,7 +8025,7 @@
       </p:sp>
       <p:sp>
         <p:nvSpPr>
-          <p:cNvPr id="12" name="TextBox 11"/>
+          <p:cNvPr id="11" name="TextBox 10"/>
           <p:cNvSpPr txBox="1"/>
           <p:nvPr/>
         </p:nvSpPr>
@@ -8549,20 +8046,20 @@
           <a:lstStyle/>
           <a:p>
             <a:r>
-              <a:rPr sz="1400" b="0">
+              <a:rPr sz="1500" b="0">
                 <a:solidFill>
                   <a:srgbClr val="F2EBDF"/>
                 </a:solidFill>
                 <a:latin typeface="Calibri"/>
               </a:rPr>
-              <a:t>Enzo is built as a full-match robot: scoring integrity through teleop, then a credible Stage finish. That balance is why alliances trust the machine in high-stakes minutes.</a:t>
-            </a:r>
-          </a:p>
-        </p:txBody>
-      </p:sp>
-      <p:sp>
-        <p:nvSpPr>
-          <p:cNvPr id="13" name="TextBox 12"/>
+              <a:t>Enzo stays strong at scoring during the match — and still can climb when it matters at the end.</a:t>
+            </a:r>
+          </a:p>
+        </p:txBody>
+      </p:sp>
+      <p:sp>
+        <p:nvSpPr>
+          <p:cNvPr id="12" name="TextBox 11"/>
           <p:cNvSpPr txBox="1"/>
           <p:nvPr/>
         </p:nvSpPr>
@@ -8727,7 +8224,7 @@
                 </a:solidFill>
                 <a:latin typeface="Calibri"/>
               </a:rPr>
-              <a:t>HUMAN–MACHINE LOOP</a:t>
+              <a:t>DRIVING THE ROBOT</a:t>
             </a:r>
           </a:p>
         </p:txBody>
@@ -8741,7 +8238,7 @@
         <p:spPr>
           <a:xfrm>
             <a:off x="640080" y="777240"/>
-            <a:ext cx="10972800" cy="1005840"/>
+            <a:ext cx="10972800" cy="1097280"/>
           </a:xfrm>
           <a:prstGeom prst="rect">
             <a:avLst/>
@@ -8755,13 +8252,13 @@
           <a:lstStyle/>
           <a:p>
             <a:r>
-              <a:rPr sz="3600" b="1">
+              <a:rPr sz="3400" b="1">
                 <a:solidFill>
                   <a:srgbClr val="F2EBDF"/>
                 </a:solidFill>
                 <a:latin typeface="Georgia"/>
               </a:rPr>
-              <a:t>Software makes Enzo feel inevitable</a:t>
+              <a:t>Good code makes hard jobs feel easy</a:t>
             </a:r>
           </a:p>
         </p:txBody>
@@ -8774,8 +8271,8 @@
         </p:nvSpPr>
         <p:spPr>
           <a:xfrm>
-            <a:off x="640080" y="1737360"/>
-            <a:ext cx="10515600" cy="548640"/>
+            <a:off x="731520" y="2468880"/>
+            <a:ext cx="10515600" cy="3474720"/>
           </a:xfrm>
           <a:prstGeom prst="rect">
             <a:avLst/>
@@ -8788,108 +8285,74 @@
           </a:bodyPr>
           <a:lstStyle/>
           <a:p>
-            <a:r>
-              <a:rPr sz="1600" b="0">
-                <a:solidFill>
-                  <a:srgbClr val="A8A093"/>
+            <a:pPr>
+              <a:spcAft>
+                <a:spcPts val="1400"/>
+              </a:spcAft>
+            </a:pPr>
+            <a:r>
+              <a:rPr sz="2000" b="0">
+                <a:solidFill>
+                  <a:srgbClr val="F2EBDF"/>
                 </a:solidFill>
                 <a:latin typeface="Calibri"/>
               </a:rPr>
-              <a:t>Hardware sets the ceiling. Controls decide whether drivers actually reach it.</a:t>
-            </a:r>
-          </a:p>
-        </p:txBody>
-      </p:sp>
-      <p:sp>
-        <p:nvSpPr>
-          <p:cNvPr id="7" name="TextBox 6"/>
-          <p:cNvSpPr txBox="1"/>
-          <p:nvPr/>
-        </p:nvSpPr>
-        <p:spPr>
-          <a:xfrm>
-            <a:off x="731520" y="2468880"/>
-            <a:ext cx="10515600" cy="3474720"/>
-          </a:xfrm>
-          <a:prstGeom prst="rect">
-            <a:avLst/>
-          </a:prstGeom>
-          <a:noFill/>
-        </p:spPr>
-        <p:txBody>
-          <a:bodyPr wrap="square">
-            <a:spAutoFit/>
-          </a:bodyPr>
-          <a:lstStyle/>
+              <a:t>Helps the robot aim and score more consistently</a:t>
+            </a:r>
+          </a:p>
           <a:p>
             <a:pPr>
               <a:spcAft>
-                <a:spcPts val="1200"/>
+                <a:spcPts val="1400"/>
               </a:spcAft>
             </a:pPr>
             <a:r>
-              <a:rPr sz="1800" b="0">
+              <a:rPr sz="2000" b="0">
                 <a:solidFill>
                   <a:srgbClr val="F2EBDF"/>
                 </a:solidFill>
                 <a:latin typeface="Calibri"/>
               </a:rPr>
-              <a:t>State-aware scoring workflows reduce button chaos in the final 30 seconds</a:t>
+              <a:t>Gives drivers clear controls instead of button chaos</a:t>
             </a:r>
           </a:p>
           <a:p>
             <a:pPr>
               <a:spcAft>
-                <a:spcPts val="1200"/>
+                <a:spcPts val="1400"/>
               </a:spcAft>
             </a:pPr>
             <a:r>
-              <a:rPr sz="1800" b="0">
+              <a:rPr sz="2000" b="0">
                 <a:solidFill>
                   <a:srgbClr val="F2EBDF"/>
                 </a:solidFill>
                 <a:latin typeface="Calibri"/>
               </a:rPr>
-              <a:t>Vision and pose awareness turn “almost lined up” into “ready to release”</a:t>
+              <a:t>Uses cameras and sensors so the robot “sees” the field</a:t>
             </a:r>
           </a:p>
           <a:p>
             <a:pPr>
               <a:spcAft>
-                <a:spcPts val="1200"/>
+                <a:spcPts val="1400"/>
               </a:spcAft>
             </a:pPr>
             <a:r>
-              <a:rPr sz="1800" b="0">
+              <a:rPr sz="2000" b="0">
                 <a:solidFill>
                   <a:srgbClr val="F2EBDF"/>
                 </a:solidFill>
                 <a:latin typeface="Calibri"/>
               </a:rPr>
-              <a:t>Autonomous routines that respect real sensor feedback teach the teleop machine honesty</a:t>
-            </a:r>
-          </a:p>
-          <a:p>
-            <a:pPr>
-              <a:spcAft>
-                <a:spcPts val="1200"/>
-              </a:spcAft>
-            </a:pPr>
-            <a:r>
-              <a:rPr sz="1800" b="0">
-                <a:solidFill>
-                  <a:srgbClr val="F2EBDF"/>
-                </a:solidFill>
-                <a:latin typeface="Calibri"/>
-              </a:rPr>
-              <a:t>When drivers trust the robot, strategy expands — that is competitive excellence</a:t>
-            </a:r>
-          </a:p>
-        </p:txBody>
-      </p:sp>
-      <p:sp>
-        <p:nvSpPr>
-          <p:cNvPr id="8" name="TextBox 7"/>
+              <a:t>When drivers trust the robot, they can play smarter</a:t>
+            </a:r>
+          </a:p>
+        </p:txBody>
+      </p:sp>
+      <p:sp>
+        <p:nvSpPr>
+          <p:cNvPr id="7" name="TextBox 6"/>
           <p:cNvSpPr txBox="1"/>
           <p:nvPr/>
         </p:nvSpPr>

--- a/enzo-presentation/Enzo_Crescendo_Presentation.pptx
+++ b/enzo-presentation/Enzo_Crescendo_Presentation.pptx
@@ -512,7 +512,7 @@
           <a:lstStyle/>
           <a:p>
             <a:r>
-              <a:t>Say the robot name clearly. This talk is about design, not scores.</a:t>
+              <a:t>Say the robot name clearly. Talk about design, not scores.</a:t>
             </a:r>
           </a:p>
         </p:txBody>
@@ -582,7 +582,7 @@
           <a:lstStyle/>
           <a:p>
             <a:r>
-              <a:t>Slow down and hit each of the five points.</a:t>
+              <a:t>Slow down on each of the five points.</a:t>
             </a:r>
           </a:p>
         </p:txBody>
@@ -652,7 +652,7 @@
           <a:lstStyle/>
           <a:p>
             <a:r>
-              <a:t>End here. Invite simple questions about design or the game.</a:t>
+              <a:t>Stop here and take questions.</a:t>
             </a:r>
           </a:p>
         </p:txBody>
@@ -722,7 +722,7 @@
           <a:lstStyle/>
           <a:p>
             <a:r>
-              <a:t>Keep this short. Introduce the team and the game in plain words.</a:t>
+              <a:t>Keep this short and plain.</a:t>
             </a:r>
           </a:p>
         </p:txBody>
@@ -792,7 +792,7 @@
           <a:lstStyle/>
           <a:p>
             <a:r>
-              <a:t>Explain Crescendo like explaining a new sport.</a:t>
+              <a:t>Explain the game like a new sport.</a:t>
             </a:r>
           </a:p>
         </p:txBody>
@@ -862,7 +862,7 @@
           <a:lstStyle/>
           <a:p>
             <a:r>
-              <a:t>These five points are our checklist for the rest of the talk.</a:t>
+              <a:t>These five points guide the rest of the talk.</a:t>
             </a:r>
           </a:p>
         </p:txBody>
@@ -932,7 +932,7 @@
           <a:lstStyle/>
           <a:p>
             <a:r>
-              <a:t>Praise the rebuild as smart teamwork, without talking about results.</a:t>
+              <a:t>Praise fixing problems. No scores.</a:t>
             </a:r>
           </a:p>
         </p:txBody>
@@ -1002,7 +1002,7 @@
           <a:lstStyle/>
           <a:p>
             <a:r>
-              <a:t>Use the basketball comparison if it helps the class.</a:t>
+              <a:t>Basketball comparison helps.</a:t>
             </a:r>
           </a:p>
         </p:txBody>
@@ -1072,7 +1072,7 @@
           <a:lstStyle/>
           <a:p>
             <a:r>
-              <a:t>Stress flexibility in simple terms.</a:t>
+              <a:t>Keep it simple: two scoring options.</a:t>
             </a:r>
           </a:p>
         </p:txBody>
@@ -1142,7 +1142,7 @@
           <a:lstStyle/>
           <a:p>
             <a:r>
-              <a:t>Balance: score first, climb later — but both matter.</a:t>
+              <a:t>Score during the match, climb at the end.</a:t>
             </a:r>
           </a:p>
         </p:txBody>
@@ -1212,7 +1212,7 @@
           <a:lstStyle/>
           <a:p>
             <a:r>
-              <a:t>Software = helpful tools for the human drivers.</a:t>
+              <a:t>Code = the robot’s computer programs.</a:t>
             </a:r>
           </a:p>
         </p:txBody>
@@ -4211,6 +4211,14 @@
 <file path=ppt/slides/slide1.xml><?xml version="1.0" encoding="utf-8"?>
 <p:sld xmlns:a="http://schemas.openxmlformats.org/drawingml/2006/main" xmlns:p="http://schemas.openxmlformats.org/presentationml/2006/main" xmlns:r="http://schemas.openxmlformats.org/officeDocument/2006/relationships">
   <p:cSld>
+    <p:bg>
+      <p:bgPr>
+        <a:solidFill>
+          <a:srgbClr val="14161A"/>
+        </a:solidFill>
+        <a:effectLst/>
+      </p:bgPr>
+    </p:bg>
     <p:spTree>
       <p:nvGrpSpPr>
         <p:cNvPr id="1" name=""/>
@@ -4220,100 +4228,14 @@
       <p:grpSpPr/>
       <p:sp>
         <p:nvSpPr>
-          <p:cNvPr id="2" name="Rectangle 1"/>
-          <p:cNvSpPr/>
+          <p:cNvPr id="2" name="TextBox 1"/>
+          <p:cNvSpPr txBox="1"/>
           <p:nvPr/>
         </p:nvSpPr>
         <p:spPr>
           <a:xfrm>
-            <a:off x="0" y="0"/>
-            <a:ext cx="12191695" cy="6858000"/>
-          </a:xfrm>
-          <a:prstGeom prst="rect">
-            <a:avLst/>
-          </a:prstGeom>
-          <a:solidFill>
-            <a:srgbClr val="14161A"/>
-          </a:solidFill>
-          <a:ln>
-            <a:noFill/>
-          </a:ln>
-        </p:spPr>
-        <p:style>
-          <a:lnRef idx="1">
-            <a:schemeClr val="accent1"/>
-          </a:lnRef>
-          <a:fillRef idx="3">
-            <a:schemeClr val="accent1"/>
-          </a:fillRef>
-          <a:effectRef idx="2">
-            <a:schemeClr val="accent1"/>
-          </a:effectRef>
-          <a:fontRef idx="minor">
-            <a:schemeClr val="lt1"/>
-          </a:fontRef>
-        </p:style>
-        <p:txBody>
-          <a:bodyPr rtlCol="0" anchor="ctr"/>
-          <a:lstStyle/>
-          <a:p>
-            <a:pPr algn="ctr"/>
-          </a:p>
-        </p:txBody>
-      </p:sp>
-      <p:sp>
-        <p:nvSpPr>
-          <p:cNvPr id="3" name="Rectangle 2"/>
-          <p:cNvSpPr/>
-          <p:nvPr/>
-        </p:nvSpPr>
-        <p:spPr>
-          <a:xfrm>
-            <a:off x="0" y="0"/>
-            <a:ext cx="12191695" cy="73152"/>
-          </a:xfrm>
-          <a:prstGeom prst="rect">
-            <a:avLst/>
-          </a:prstGeom>
-          <a:solidFill>
-            <a:srgbClr val="C4964A"/>
-          </a:solidFill>
-          <a:ln>
-            <a:noFill/>
-          </a:ln>
-        </p:spPr>
-        <p:style>
-          <a:lnRef idx="1">
-            <a:schemeClr val="accent1"/>
-          </a:lnRef>
-          <a:fillRef idx="3">
-            <a:schemeClr val="accent1"/>
-          </a:fillRef>
-          <a:effectRef idx="2">
-            <a:schemeClr val="accent1"/>
-          </a:effectRef>
-          <a:fontRef idx="minor">
-            <a:schemeClr val="lt1"/>
-          </a:fontRef>
-        </p:style>
-        <p:txBody>
-          <a:bodyPr rtlCol="0" anchor="ctr"/>
-          <a:lstStyle/>
-          <a:p>
-            <a:pPr algn="ctr"/>
-          </a:p>
-        </p:txBody>
-      </p:sp>
-      <p:sp>
-        <p:nvSpPr>
-          <p:cNvPr id="4" name="TextBox 3"/>
-          <p:cNvSpPr txBox="1"/>
-          <p:nvPr/>
-        </p:nvSpPr>
-        <p:spPr>
-          <a:xfrm>
-            <a:off x="731520" y="1737360"/>
-            <a:ext cx="10515600" cy="1097280"/>
+            <a:off x="640080" y="411480"/>
+            <a:ext cx="10972800" cy="365760"/>
           </a:xfrm>
           <a:prstGeom prst="rect">
             <a:avLst/>
@@ -4321,33 +4243,38 @@
           <a:noFill/>
         </p:spPr>
         <p:txBody>
-          <a:bodyPr wrap="none">
+          <a:bodyPr wrap="square">
             <a:spAutoFit/>
           </a:bodyPr>
           <a:lstStyle/>
           <a:p>
-            <a:r>
-              <a:rPr sz="7200" b="1">
+            <a:pPr>
+              <a:spcAft>
+                <a:spcPts val="800"/>
+              </a:spcAft>
+            </a:pPr>
+            <a:r>
+              <a:rPr sz="1300" b="1">
                 <a:solidFill>
                   <a:srgbClr val="C4964A"/>
                 </a:solidFill>
-                <a:latin typeface="Georgia"/>
-              </a:rPr>
-              <a:t>ENZO</a:t>
-            </a:r>
-          </a:p>
-        </p:txBody>
-      </p:sp>
-      <p:sp>
-        <p:nvSpPr>
-          <p:cNvPr id="5" name="TextBox 4"/>
+                <a:latin typeface="Arial"/>
+              </a:rPr>
+              <a:t>TEAM 1577 STEAMPUNK  ·  ROBOT GAME: CRESCENDO</a:t>
+            </a:r>
+          </a:p>
+        </p:txBody>
+      </p:sp>
+      <p:sp>
+        <p:nvSpPr>
+          <p:cNvPr id="3" name="TextBox 2"/>
           <p:cNvSpPr txBox="1"/>
           <p:nvPr/>
         </p:nvSpPr>
         <p:spPr>
           <a:xfrm>
-            <a:off x="731520" y="2926080"/>
-            <a:ext cx="10515600" cy="914400"/>
+            <a:off x="640080" y="914400"/>
+            <a:ext cx="10972800" cy="1280160"/>
           </a:xfrm>
           <a:prstGeom prst="rect">
             <a:avLst/>
@@ -4360,28 +4287,33 @@
           </a:bodyPr>
           <a:lstStyle/>
           <a:p>
-            <a:r>
-              <a:rPr sz="2800" b="0">
+            <a:pPr>
+              <a:spcAft>
+                <a:spcPts val="800"/>
+              </a:spcAft>
+            </a:pPr>
+            <a:r>
+              <a:rPr sz="3200" b="1">
                 <a:solidFill>
                   <a:srgbClr val="F2EBDF"/>
                 </a:solidFill>
-                <a:latin typeface="Georgia"/>
-              </a:rPr>
-              <a:t>Why Enzo is the best robot in Crescendo</a:t>
-            </a:r>
-          </a:p>
-        </p:txBody>
-      </p:sp>
-      <p:sp>
-        <p:nvSpPr>
-          <p:cNvPr id="6" name="TextBox 5"/>
+                <a:latin typeface="Arial"/>
+              </a:rPr>
+              <a:t>ENZO</a:t>
+            </a:r>
+          </a:p>
+        </p:txBody>
+      </p:sp>
+      <p:sp>
+        <p:nvSpPr>
+          <p:cNvPr id="4" name="TextBox 3"/>
           <p:cNvSpPr txBox="1"/>
           <p:nvPr/>
         </p:nvSpPr>
         <p:spPr>
           <a:xfrm>
-            <a:off x="731520" y="4114800"/>
-            <a:ext cx="10515600" cy="548640"/>
+            <a:off x="640080" y="2377440"/>
+            <a:ext cx="10789920" cy="3474720"/>
           </a:xfrm>
           <a:prstGeom prst="rect">
             <a:avLst/>
@@ -4389,33 +4321,54 @@
           <a:noFill/>
         </p:spPr>
         <p:txBody>
-          <a:bodyPr wrap="none">
+          <a:bodyPr wrap="square">
             <a:spAutoFit/>
           </a:bodyPr>
           <a:lstStyle/>
           <a:p>
-            <a:r>
-              <a:rPr sz="1600" b="0">
-                <a:solidFill>
-                  <a:srgbClr val="A8A093"/>
-                </a:solidFill>
-                <a:latin typeface="Calibri"/>
-              </a:rPr>
-              <a:t>Team 1577 Steampunk  ·  About smart design  ·  5–7 minutes</a:t>
-            </a:r>
-          </a:p>
-        </p:txBody>
-      </p:sp>
-      <p:sp>
-        <p:nvSpPr>
-          <p:cNvPr id="7" name="TextBox 6"/>
+            <a:pPr>
+              <a:spcAft>
+                <a:spcPts val="800"/>
+              </a:spcAft>
+            </a:pPr>
+            <a:r>
+              <a:rPr sz="2000" b="0">
+                <a:solidFill>
+                  <a:srgbClr val="F2EBDF"/>
+                </a:solidFill>
+                <a:latin typeface="Arial"/>
+              </a:rPr>
+              <a:t>Why Enzo is the best robot in Crescendo</a:t>
+            </a:r>
+          </a:p>
+          <a:p>
+            <a:pPr>
+              <a:spcAft>
+                <a:spcPts val="800"/>
+              </a:spcAft>
+            </a:pPr>
+            <a:r>
+              <a:rPr sz="2000" b="0">
+                <a:solidFill>
+                  <a:srgbClr val="F2EBDF"/>
+                </a:solidFill>
+                <a:latin typeface="Arial"/>
+              </a:rPr>
+              <a:t>A short talk about how it was built  ·  about 5 to 7 minutes</a:t>
+            </a:r>
+          </a:p>
+        </p:txBody>
+      </p:sp>
+      <p:sp>
+        <p:nvSpPr>
+          <p:cNvPr id="5" name="TextBox 4"/>
           <p:cNvSpPr txBox="1"/>
           <p:nvPr/>
         </p:nvSpPr>
         <p:spPr>
           <a:xfrm>
-            <a:off x="548640" y="6446520"/>
-            <a:ext cx="9144000" cy="274320"/>
+            <a:off x="640080" y="6309360"/>
+            <a:ext cx="10972800" cy="320040"/>
           </a:xfrm>
           <a:prstGeom prst="rect">
             <a:avLst/>
@@ -4423,19 +4376,24 @@
           <a:noFill/>
         </p:spPr>
         <p:txBody>
-          <a:bodyPr wrap="none">
+          <a:bodyPr wrap="square">
             <a:spAutoFit/>
           </a:bodyPr>
           <a:lstStyle/>
           <a:p>
+            <a:pPr>
+              <a:spcAft>
+                <a:spcPts val="800"/>
+              </a:spcAft>
+            </a:pPr>
             <a:r>
               <a:rPr sz="1100" b="0">
                 <a:solidFill>
                   <a:srgbClr val="A8A093"/>
                 </a:solidFill>
-                <a:latin typeface="Calibri"/>
-              </a:rPr>
-              <a:t>ENZO  ·  FRC Crescendo  ·  Team 1577 Steampunk  ·  1/11</a:t>
+                <a:latin typeface="Arial"/>
+              </a:rPr>
+              <a:t>ENZO  ·  Crescendo  ·  Team 1577 Steampunk  ·  1/11</a:t>
             </a:r>
           </a:p>
         </p:txBody>
@@ -4451,6 +4409,14 @@
 <file path=ppt/slides/slide10.xml><?xml version="1.0" encoding="utf-8"?>
 <p:sld xmlns:a="http://schemas.openxmlformats.org/drawingml/2006/main" xmlns:p="http://schemas.openxmlformats.org/presentationml/2006/main" xmlns:r="http://schemas.openxmlformats.org/officeDocument/2006/relationships">
   <p:cSld>
+    <p:bg>
+      <p:bgPr>
+        <a:solidFill>
+          <a:srgbClr val="14161A"/>
+        </a:solidFill>
+        <a:effectLst/>
+      </p:bgPr>
+    </p:bg>
     <p:spTree>
       <p:nvGrpSpPr>
         <p:cNvPr id="1" name=""/>
@@ -4460,93 +4426,7 @@
       <p:grpSpPr/>
       <p:sp>
         <p:nvSpPr>
-          <p:cNvPr id="2" name="Rectangle 1"/>
-          <p:cNvSpPr/>
-          <p:nvPr/>
-        </p:nvSpPr>
-        <p:spPr>
-          <a:xfrm>
-            <a:off x="0" y="0"/>
-            <a:ext cx="12191695" cy="6858000"/>
-          </a:xfrm>
-          <a:prstGeom prst="rect">
-            <a:avLst/>
-          </a:prstGeom>
-          <a:solidFill>
-            <a:srgbClr val="14161A"/>
-          </a:solidFill>
-          <a:ln>
-            <a:noFill/>
-          </a:ln>
-        </p:spPr>
-        <p:style>
-          <a:lnRef idx="1">
-            <a:schemeClr val="accent1"/>
-          </a:lnRef>
-          <a:fillRef idx="3">
-            <a:schemeClr val="accent1"/>
-          </a:fillRef>
-          <a:effectRef idx="2">
-            <a:schemeClr val="accent1"/>
-          </a:effectRef>
-          <a:fontRef idx="minor">
-            <a:schemeClr val="lt1"/>
-          </a:fontRef>
-        </p:style>
-        <p:txBody>
-          <a:bodyPr rtlCol="0" anchor="ctr"/>
-          <a:lstStyle/>
-          <a:p>
-            <a:pPr algn="ctr"/>
-          </a:p>
-        </p:txBody>
-      </p:sp>
-      <p:sp>
-        <p:nvSpPr>
-          <p:cNvPr id="3" name="Rectangle 2"/>
-          <p:cNvSpPr/>
-          <p:nvPr/>
-        </p:nvSpPr>
-        <p:spPr>
-          <a:xfrm>
-            <a:off x="0" y="0"/>
-            <a:ext cx="12191695" cy="73152"/>
-          </a:xfrm>
-          <a:prstGeom prst="rect">
-            <a:avLst/>
-          </a:prstGeom>
-          <a:solidFill>
-            <a:srgbClr val="C4964A"/>
-          </a:solidFill>
-          <a:ln>
-            <a:noFill/>
-          </a:ln>
-        </p:spPr>
-        <p:style>
-          <a:lnRef idx="1">
-            <a:schemeClr val="accent1"/>
-          </a:lnRef>
-          <a:fillRef idx="3">
-            <a:schemeClr val="accent1"/>
-          </a:fillRef>
-          <a:effectRef idx="2">
-            <a:schemeClr val="accent1"/>
-          </a:effectRef>
-          <a:fontRef idx="minor">
-            <a:schemeClr val="lt1"/>
-          </a:fontRef>
-        </p:style>
-        <p:txBody>
-          <a:bodyPr rtlCol="0" anchor="ctr"/>
-          <a:lstStyle/>
-          <a:p>
-            <a:pPr algn="ctr"/>
-          </a:p>
-        </p:txBody>
-      </p:sp>
-      <p:sp>
-        <p:nvSpPr>
-          <p:cNvPr id="4" name="TextBox 3"/>
+          <p:cNvPr id="2" name="TextBox 1"/>
           <p:cNvSpPr txBox="1"/>
           <p:nvPr/>
         </p:nvSpPr>
@@ -4561,33 +4441,38 @@
           <a:noFill/>
         </p:spPr>
         <p:txBody>
-          <a:bodyPr wrap="none">
+          <a:bodyPr wrap="square">
             <a:spAutoFit/>
           </a:bodyPr>
           <a:lstStyle/>
           <a:p>
+            <a:pPr>
+              <a:spcAft>
+                <a:spcPts val="800"/>
+              </a:spcAft>
+            </a:pPr>
             <a:r>
               <a:rPr sz="1300" b="1">
                 <a:solidFill>
                   <a:srgbClr val="C4964A"/>
                 </a:solidFill>
-                <a:latin typeface="Calibri"/>
-              </a:rPr>
-              <a:t>THE BIG IDEA</a:t>
-            </a:r>
-          </a:p>
-        </p:txBody>
-      </p:sp>
-      <p:sp>
-        <p:nvSpPr>
-          <p:cNvPr id="5" name="TextBox 4"/>
+                <a:latin typeface="Arial"/>
+              </a:rPr>
+              <a:t>PUTTING IT TOGETHER</a:t>
+            </a:r>
+          </a:p>
+        </p:txBody>
+      </p:sp>
+      <p:sp>
+        <p:nvSpPr>
+          <p:cNvPr id="3" name="TextBox 2"/>
           <p:cNvSpPr txBox="1"/>
           <p:nvPr/>
         </p:nvSpPr>
         <p:spPr>
           <a:xfrm>
-            <a:off x="640080" y="777240"/>
-            <a:ext cx="10972800" cy="1097280"/>
+            <a:off x="640080" y="914400"/>
+            <a:ext cx="10972800" cy="1280160"/>
           </a:xfrm>
           <a:prstGeom prst="rect">
             <a:avLst/>
@@ -4600,12 +4485,17 @@
           </a:bodyPr>
           <a:lstStyle/>
           <a:p>
-            <a:r>
-              <a:rPr sz="3400" b="1">
+            <a:pPr>
+              <a:spcAft>
+                <a:spcPts val="800"/>
+              </a:spcAft>
+            </a:pPr>
+            <a:r>
+              <a:rPr sz="3200" b="1">
                 <a:solidFill>
                   <a:srgbClr val="F2EBDF"/>
                 </a:solidFill>
-                <a:latin typeface="Georgia"/>
+                <a:latin typeface="Arial"/>
               </a:rPr>
               <a:t>Why Enzo is the best</a:t>
             </a:r>
@@ -4614,57 +4504,14 @@
       </p:sp>
       <p:sp>
         <p:nvSpPr>
-          <p:cNvPr id="6" name="Oval 5"/>
-          <p:cNvSpPr/>
+          <p:cNvPr id="4" name="TextBox 3"/>
+          <p:cNvSpPr txBox="1"/>
           <p:nvPr/>
         </p:nvSpPr>
         <p:spPr>
           <a:xfrm>
-            <a:off x="685800" y="2240280"/>
-            <a:ext cx="438912" cy="438912"/>
-          </a:xfrm>
-          <a:prstGeom prst="ellipse">
-            <a:avLst/>
-          </a:prstGeom>
-          <a:solidFill>
-            <a:srgbClr val="C4964A"/>
-          </a:solidFill>
-          <a:ln>
-            <a:noFill/>
-          </a:ln>
-        </p:spPr>
-        <p:style>
-          <a:lnRef idx="1">
-            <a:schemeClr val="accent1"/>
-          </a:lnRef>
-          <a:fillRef idx="3">
-            <a:schemeClr val="accent1"/>
-          </a:fillRef>
-          <a:effectRef idx="2">
-            <a:schemeClr val="accent1"/>
-          </a:effectRef>
-          <a:fontRef idx="minor">
-            <a:schemeClr val="lt1"/>
-          </a:fontRef>
-        </p:style>
-        <p:txBody>
-          <a:bodyPr rtlCol="0" anchor="ctr"/>
-          <a:lstStyle/>
-          <a:p>
-            <a:pPr algn="ctr"/>
-          </a:p>
-        </p:txBody>
-      </p:sp>
-      <p:sp>
-        <p:nvSpPr>
-          <p:cNvPr id="7" name="TextBox 6"/>
-          <p:cNvSpPr txBox="1"/>
-          <p:nvPr/>
-        </p:nvSpPr>
-        <p:spPr>
-          <a:xfrm>
-            <a:off x="685800" y="2286000"/>
-            <a:ext cx="438912" cy="365760"/>
+            <a:off x="640080" y="2377440"/>
+            <a:ext cx="10789920" cy="3474720"/>
           </a:xfrm>
           <a:prstGeom prst="rect">
             <a:avLst/>
@@ -4672,34 +4519,102 @@
           <a:noFill/>
         </p:spPr>
         <p:txBody>
-          <a:bodyPr wrap="none">
+          <a:bodyPr wrap="square">
             <a:spAutoFit/>
           </a:bodyPr>
           <a:lstStyle/>
           <a:p>
-            <a:pPr algn="ctr"/>
-            <a:r>
-              <a:rPr sz="1400" b="1">
-                <a:solidFill>
-                  <a:srgbClr val="14161A"/>
-                </a:solidFill>
-                <a:latin typeface="Calibri"/>
-              </a:rPr>
-              <a:t>1</a:t>
-            </a:r>
-          </a:p>
-        </p:txBody>
-      </p:sp>
-      <p:sp>
-        <p:nvSpPr>
-          <p:cNvPr id="8" name="TextBox 7"/>
+            <a:pPr>
+              <a:spcAft>
+                <a:spcPts val="800"/>
+              </a:spcAft>
+            </a:pPr>
+            <a:r>
+              <a:rPr sz="2000" b="0">
+                <a:solidFill>
+                  <a:srgbClr val="F2EBDF"/>
+                </a:solidFill>
+                <a:latin typeface="Arial"/>
+              </a:rPr>
+              <a:t>1. Built for the whole game, not just one trick</a:t>
+            </a:r>
+          </a:p>
+          <a:p>
+            <a:pPr>
+              <a:spcAft>
+                <a:spcPts val="800"/>
+              </a:spcAft>
+            </a:pPr>
+            <a:r>
+              <a:rPr sz="2000" b="0">
+                <a:solidFill>
+                  <a:srgbClr val="F2EBDF"/>
+                </a:solidFill>
+                <a:latin typeface="Arial"/>
+              </a:rPr>
+              <a:t>2. The team changed it when it needed changes</a:t>
+            </a:r>
+          </a:p>
+          <a:p>
+            <a:pPr>
+              <a:spcAft>
+                <a:spcPts val="800"/>
+              </a:spcAft>
+            </a:pPr>
+            <a:r>
+              <a:rPr sz="2000" b="0">
+                <a:solidFill>
+                  <a:srgbClr val="F2EBDF"/>
+                </a:solidFill>
+                <a:latin typeface="Arial"/>
+              </a:rPr>
+              <a:t>3. Great at grabbing and holding Notes</a:t>
+            </a:r>
+          </a:p>
+          <a:p>
+            <a:pPr>
+              <a:spcAft>
+                <a:spcPts val="800"/>
+              </a:spcAft>
+            </a:pPr>
+            <a:r>
+              <a:rPr sz="2000" b="0">
+                <a:solidFill>
+                  <a:srgbClr val="F2EBDF"/>
+                </a:solidFill>
+                <a:latin typeface="Arial"/>
+              </a:rPr>
+              <a:t>4. Can score in more than one way</a:t>
+            </a:r>
+          </a:p>
+          <a:p>
+            <a:pPr>
+              <a:spcAft>
+                <a:spcPts val="800"/>
+              </a:spcAft>
+            </a:pPr>
+            <a:r>
+              <a:rPr sz="2000" b="0">
+                <a:solidFill>
+                  <a:srgbClr val="F2EBDF"/>
+                </a:solidFill>
+                <a:latin typeface="Arial"/>
+              </a:rPr>
+              <a:t>5. The code helps the drivers a lot</a:t>
+            </a:r>
+          </a:p>
+        </p:txBody>
+      </p:sp>
+      <p:sp>
+        <p:nvSpPr>
+          <p:cNvPr id="5" name="TextBox 4"/>
           <p:cNvSpPr txBox="1"/>
           <p:nvPr/>
         </p:nvSpPr>
         <p:spPr>
           <a:xfrm>
-            <a:off x="1371600" y="2286000"/>
-            <a:ext cx="9875520" cy="457200"/>
+            <a:off x="640080" y="6309360"/>
+            <a:ext cx="10972800" cy="320040"/>
           </a:xfrm>
           <a:prstGeom prst="rect">
             <a:avLst/>
@@ -4707,501 +4622,24 @@
           <a:noFill/>
         </p:spPr>
         <p:txBody>
-          <a:bodyPr wrap="none">
+          <a:bodyPr wrap="square">
             <a:spAutoFit/>
           </a:bodyPr>
           <a:lstStyle/>
           <a:p>
-            <a:r>
-              <a:rPr sz="1800" b="0">
-                <a:solidFill>
-                  <a:srgbClr val="F2EBDF"/>
-                </a:solidFill>
-                <a:latin typeface="Calibri"/>
-              </a:rPr>
-              <a:t>Built for the whole Crescendo game, not just one trick</a:t>
-            </a:r>
-          </a:p>
-        </p:txBody>
-      </p:sp>
-      <p:sp>
-        <p:nvSpPr>
-          <p:cNvPr id="9" name="Oval 8"/>
-          <p:cNvSpPr/>
-          <p:nvPr/>
-        </p:nvSpPr>
-        <p:spPr>
-          <a:xfrm>
-            <a:off x="685800" y="2898648"/>
-            <a:ext cx="438912" cy="438912"/>
-          </a:xfrm>
-          <a:prstGeom prst="ellipse">
-            <a:avLst/>
-          </a:prstGeom>
-          <a:solidFill>
-            <a:srgbClr val="C4964A"/>
-          </a:solidFill>
-          <a:ln>
-            <a:noFill/>
-          </a:ln>
-        </p:spPr>
-        <p:style>
-          <a:lnRef idx="1">
-            <a:schemeClr val="accent1"/>
-          </a:lnRef>
-          <a:fillRef idx="3">
-            <a:schemeClr val="accent1"/>
-          </a:fillRef>
-          <a:effectRef idx="2">
-            <a:schemeClr val="accent1"/>
-          </a:effectRef>
-          <a:fontRef idx="minor">
-            <a:schemeClr val="lt1"/>
-          </a:fontRef>
-        </p:style>
-        <p:txBody>
-          <a:bodyPr rtlCol="0" anchor="ctr"/>
-          <a:lstStyle/>
-          <a:p>
-            <a:pPr algn="ctr"/>
-          </a:p>
-        </p:txBody>
-      </p:sp>
-      <p:sp>
-        <p:nvSpPr>
-          <p:cNvPr id="10" name="TextBox 9"/>
-          <p:cNvSpPr txBox="1"/>
-          <p:nvPr/>
-        </p:nvSpPr>
-        <p:spPr>
-          <a:xfrm>
-            <a:off x="685800" y="2944368"/>
-            <a:ext cx="438912" cy="365760"/>
-          </a:xfrm>
-          <a:prstGeom prst="rect">
-            <a:avLst/>
-          </a:prstGeom>
-          <a:noFill/>
-        </p:spPr>
-        <p:txBody>
-          <a:bodyPr wrap="none">
-            <a:spAutoFit/>
-          </a:bodyPr>
-          <a:lstStyle/>
-          <a:p>
-            <a:pPr algn="ctr"/>
-            <a:r>
-              <a:rPr sz="1400" b="1">
-                <a:solidFill>
-                  <a:srgbClr val="14161A"/>
-                </a:solidFill>
-                <a:latin typeface="Calibri"/>
-              </a:rPr>
-              <a:t>2</a:t>
-            </a:r>
-          </a:p>
-        </p:txBody>
-      </p:sp>
-      <p:sp>
-        <p:nvSpPr>
-          <p:cNvPr id="11" name="TextBox 10"/>
-          <p:cNvSpPr txBox="1"/>
-          <p:nvPr/>
-        </p:nvSpPr>
-        <p:spPr>
-          <a:xfrm>
-            <a:off x="1371600" y="2944368"/>
-            <a:ext cx="9875520" cy="457200"/>
-          </a:xfrm>
-          <a:prstGeom prst="rect">
-            <a:avLst/>
-          </a:prstGeom>
-          <a:noFill/>
-        </p:spPr>
-        <p:txBody>
-          <a:bodyPr wrap="none">
-            <a:spAutoFit/>
-          </a:bodyPr>
-          <a:lstStyle/>
-          <a:p>
-            <a:r>
-              <a:rPr sz="1800" b="0">
-                <a:solidFill>
-                  <a:srgbClr val="F2EBDF"/>
-                </a:solidFill>
-                <a:latin typeface="Calibri"/>
-              </a:rPr>
-              <a:t>The team rebuilt it when they needed to</a:t>
-            </a:r>
-          </a:p>
-        </p:txBody>
-      </p:sp>
-      <p:sp>
-        <p:nvSpPr>
-          <p:cNvPr id="12" name="Oval 11"/>
-          <p:cNvSpPr/>
-          <p:nvPr/>
-        </p:nvSpPr>
-        <p:spPr>
-          <a:xfrm>
-            <a:off x="685800" y="3557016"/>
-            <a:ext cx="438912" cy="438912"/>
-          </a:xfrm>
-          <a:prstGeom prst="ellipse">
-            <a:avLst/>
-          </a:prstGeom>
-          <a:solidFill>
-            <a:srgbClr val="C4964A"/>
-          </a:solidFill>
-          <a:ln>
-            <a:noFill/>
-          </a:ln>
-        </p:spPr>
-        <p:style>
-          <a:lnRef idx="1">
-            <a:schemeClr val="accent1"/>
-          </a:lnRef>
-          <a:fillRef idx="3">
-            <a:schemeClr val="accent1"/>
-          </a:fillRef>
-          <a:effectRef idx="2">
-            <a:schemeClr val="accent1"/>
-          </a:effectRef>
-          <a:fontRef idx="minor">
-            <a:schemeClr val="lt1"/>
-          </a:fontRef>
-        </p:style>
-        <p:txBody>
-          <a:bodyPr rtlCol="0" anchor="ctr"/>
-          <a:lstStyle/>
-          <a:p>
-            <a:pPr algn="ctr"/>
-          </a:p>
-        </p:txBody>
-      </p:sp>
-      <p:sp>
-        <p:nvSpPr>
-          <p:cNvPr id="13" name="TextBox 12"/>
-          <p:cNvSpPr txBox="1"/>
-          <p:nvPr/>
-        </p:nvSpPr>
-        <p:spPr>
-          <a:xfrm>
-            <a:off x="685800" y="3602736"/>
-            <a:ext cx="438912" cy="365760"/>
-          </a:xfrm>
-          <a:prstGeom prst="rect">
-            <a:avLst/>
-          </a:prstGeom>
-          <a:noFill/>
-        </p:spPr>
-        <p:txBody>
-          <a:bodyPr wrap="none">
-            <a:spAutoFit/>
-          </a:bodyPr>
-          <a:lstStyle/>
-          <a:p>
-            <a:pPr algn="ctr"/>
-            <a:r>
-              <a:rPr sz="1400" b="1">
-                <a:solidFill>
-                  <a:srgbClr val="14161A"/>
-                </a:solidFill>
-                <a:latin typeface="Calibri"/>
-              </a:rPr>
-              <a:t>3</a:t>
-            </a:r>
-          </a:p>
-        </p:txBody>
-      </p:sp>
-      <p:sp>
-        <p:nvSpPr>
-          <p:cNvPr id="14" name="TextBox 13"/>
-          <p:cNvSpPr txBox="1"/>
-          <p:nvPr/>
-        </p:nvSpPr>
-        <p:spPr>
-          <a:xfrm>
-            <a:off x="1371600" y="3602736"/>
-            <a:ext cx="9875520" cy="457200"/>
-          </a:xfrm>
-          <a:prstGeom prst="rect">
-            <a:avLst/>
-          </a:prstGeom>
-          <a:noFill/>
-        </p:spPr>
-        <p:txBody>
-          <a:bodyPr wrap="none">
-            <a:spAutoFit/>
-          </a:bodyPr>
-          <a:lstStyle/>
-          <a:p>
-            <a:r>
-              <a:rPr sz="1800" b="0">
-                <a:solidFill>
-                  <a:srgbClr val="F2EBDF"/>
-                </a:solidFill>
-                <a:latin typeface="Calibri"/>
-              </a:rPr>
-              <a:t>Focuses on grabbing and controlling Notes</a:t>
-            </a:r>
-          </a:p>
-        </p:txBody>
-      </p:sp>
-      <p:sp>
-        <p:nvSpPr>
-          <p:cNvPr id="15" name="Oval 14"/>
-          <p:cNvSpPr/>
-          <p:nvPr/>
-        </p:nvSpPr>
-        <p:spPr>
-          <a:xfrm>
-            <a:off x="685800" y="4215384"/>
-            <a:ext cx="438912" cy="438912"/>
-          </a:xfrm>
-          <a:prstGeom prst="ellipse">
-            <a:avLst/>
-          </a:prstGeom>
-          <a:solidFill>
-            <a:srgbClr val="C4964A"/>
-          </a:solidFill>
-          <a:ln>
-            <a:noFill/>
-          </a:ln>
-        </p:spPr>
-        <p:style>
-          <a:lnRef idx="1">
-            <a:schemeClr val="accent1"/>
-          </a:lnRef>
-          <a:fillRef idx="3">
-            <a:schemeClr val="accent1"/>
-          </a:fillRef>
-          <a:effectRef idx="2">
-            <a:schemeClr val="accent1"/>
-          </a:effectRef>
-          <a:fontRef idx="minor">
-            <a:schemeClr val="lt1"/>
-          </a:fontRef>
-        </p:style>
-        <p:txBody>
-          <a:bodyPr rtlCol="0" anchor="ctr"/>
-          <a:lstStyle/>
-          <a:p>
-            <a:pPr algn="ctr"/>
-          </a:p>
-        </p:txBody>
-      </p:sp>
-      <p:sp>
-        <p:nvSpPr>
-          <p:cNvPr id="16" name="TextBox 15"/>
-          <p:cNvSpPr txBox="1"/>
-          <p:nvPr/>
-        </p:nvSpPr>
-        <p:spPr>
-          <a:xfrm>
-            <a:off x="685800" y="4261104"/>
-            <a:ext cx="438912" cy="365760"/>
-          </a:xfrm>
-          <a:prstGeom prst="rect">
-            <a:avLst/>
-          </a:prstGeom>
-          <a:noFill/>
-        </p:spPr>
-        <p:txBody>
-          <a:bodyPr wrap="none">
-            <a:spAutoFit/>
-          </a:bodyPr>
-          <a:lstStyle/>
-          <a:p>
-            <a:pPr algn="ctr"/>
-            <a:r>
-              <a:rPr sz="1400" b="1">
-                <a:solidFill>
-                  <a:srgbClr val="14161A"/>
-                </a:solidFill>
-                <a:latin typeface="Calibri"/>
-              </a:rPr>
-              <a:t>4</a:t>
-            </a:r>
-          </a:p>
-        </p:txBody>
-      </p:sp>
-      <p:sp>
-        <p:nvSpPr>
-          <p:cNvPr id="17" name="TextBox 16"/>
-          <p:cNvSpPr txBox="1"/>
-          <p:nvPr/>
-        </p:nvSpPr>
-        <p:spPr>
-          <a:xfrm>
-            <a:off x="1371600" y="4261104"/>
-            <a:ext cx="9875520" cy="457200"/>
-          </a:xfrm>
-          <a:prstGeom prst="rect">
-            <a:avLst/>
-          </a:prstGeom>
-          <a:noFill/>
-        </p:spPr>
-        <p:txBody>
-          <a:bodyPr wrap="none">
-            <a:spAutoFit/>
-          </a:bodyPr>
-          <a:lstStyle/>
-          <a:p>
-            <a:r>
-              <a:rPr sz="1800" b="0">
-                <a:solidFill>
-                  <a:srgbClr val="F2EBDF"/>
-                </a:solidFill>
-                <a:latin typeface="Calibri"/>
-              </a:rPr>
-              <a:t>Can score in more than one way</a:t>
-            </a:r>
-          </a:p>
-        </p:txBody>
-      </p:sp>
-      <p:sp>
-        <p:nvSpPr>
-          <p:cNvPr id="18" name="Oval 17"/>
-          <p:cNvSpPr/>
-          <p:nvPr/>
-        </p:nvSpPr>
-        <p:spPr>
-          <a:xfrm>
-            <a:off x="685800" y="4873752"/>
-            <a:ext cx="438912" cy="438912"/>
-          </a:xfrm>
-          <a:prstGeom prst="ellipse">
-            <a:avLst/>
-          </a:prstGeom>
-          <a:solidFill>
-            <a:srgbClr val="C4964A"/>
-          </a:solidFill>
-          <a:ln>
-            <a:noFill/>
-          </a:ln>
-        </p:spPr>
-        <p:style>
-          <a:lnRef idx="1">
-            <a:schemeClr val="accent1"/>
-          </a:lnRef>
-          <a:fillRef idx="3">
-            <a:schemeClr val="accent1"/>
-          </a:fillRef>
-          <a:effectRef idx="2">
-            <a:schemeClr val="accent1"/>
-          </a:effectRef>
-          <a:fontRef idx="minor">
-            <a:schemeClr val="lt1"/>
-          </a:fontRef>
-        </p:style>
-        <p:txBody>
-          <a:bodyPr rtlCol="0" anchor="ctr"/>
-          <a:lstStyle/>
-          <a:p>
-            <a:pPr algn="ctr"/>
-          </a:p>
-        </p:txBody>
-      </p:sp>
-      <p:sp>
-        <p:nvSpPr>
-          <p:cNvPr id="19" name="TextBox 18"/>
-          <p:cNvSpPr txBox="1"/>
-          <p:nvPr/>
-        </p:nvSpPr>
-        <p:spPr>
-          <a:xfrm>
-            <a:off x="685800" y="4919472"/>
-            <a:ext cx="438912" cy="365760"/>
-          </a:xfrm>
-          <a:prstGeom prst="rect">
-            <a:avLst/>
-          </a:prstGeom>
-          <a:noFill/>
-        </p:spPr>
-        <p:txBody>
-          <a:bodyPr wrap="none">
-            <a:spAutoFit/>
-          </a:bodyPr>
-          <a:lstStyle/>
-          <a:p>
-            <a:pPr algn="ctr"/>
-            <a:r>
-              <a:rPr sz="1400" b="1">
-                <a:solidFill>
-                  <a:srgbClr val="14161A"/>
-                </a:solidFill>
-                <a:latin typeface="Calibri"/>
-              </a:rPr>
-              <a:t>5</a:t>
-            </a:r>
-          </a:p>
-        </p:txBody>
-      </p:sp>
-      <p:sp>
-        <p:nvSpPr>
-          <p:cNvPr id="20" name="TextBox 19"/>
-          <p:cNvSpPr txBox="1"/>
-          <p:nvPr/>
-        </p:nvSpPr>
-        <p:spPr>
-          <a:xfrm>
-            <a:off x="1371600" y="4919472"/>
-            <a:ext cx="9875520" cy="457200"/>
-          </a:xfrm>
-          <a:prstGeom prst="rect">
-            <a:avLst/>
-          </a:prstGeom>
-          <a:noFill/>
-        </p:spPr>
-        <p:txBody>
-          <a:bodyPr wrap="none">
-            <a:spAutoFit/>
-          </a:bodyPr>
-          <a:lstStyle/>
-          <a:p>
-            <a:r>
-              <a:rPr sz="1800" b="0">
-                <a:solidFill>
-                  <a:srgbClr val="F2EBDF"/>
-                </a:solidFill>
-                <a:latin typeface="Calibri"/>
-              </a:rPr>
-              <a:t>Software helps drivers do the hard parts</a:t>
-            </a:r>
-          </a:p>
-        </p:txBody>
-      </p:sp>
-      <p:sp>
-        <p:nvSpPr>
-          <p:cNvPr id="21" name="TextBox 20"/>
-          <p:cNvSpPr txBox="1"/>
-          <p:nvPr/>
-        </p:nvSpPr>
-        <p:spPr>
-          <a:xfrm>
-            <a:off x="548640" y="6446520"/>
-            <a:ext cx="9144000" cy="274320"/>
-          </a:xfrm>
-          <a:prstGeom prst="rect">
-            <a:avLst/>
-          </a:prstGeom>
-          <a:noFill/>
-        </p:spPr>
-        <p:txBody>
-          <a:bodyPr wrap="none">
-            <a:spAutoFit/>
-          </a:bodyPr>
-          <a:lstStyle/>
-          <a:p>
+            <a:pPr>
+              <a:spcAft>
+                <a:spcPts val="800"/>
+              </a:spcAft>
+            </a:pPr>
             <a:r>
               <a:rPr sz="1100" b="0">
                 <a:solidFill>
                   <a:srgbClr val="A8A093"/>
                 </a:solidFill>
-                <a:latin typeface="Calibri"/>
-              </a:rPr>
-              <a:t>ENZO  ·  FRC Crescendo  ·  Team 1577 Steampunk  ·  10/11</a:t>
+                <a:latin typeface="Arial"/>
+              </a:rPr>
+              <a:t>ENZO  ·  Crescendo  ·  Team 1577 Steampunk  ·  10/11</a:t>
             </a:r>
           </a:p>
         </p:txBody>
@@ -5217,6 +4655,14 @@
 <file path=ppt/slides/slide11.xml><?xml version="1.0" encoding="utf-8"?>
 <p:sld xmlns:a="http://schemas.openxmlformats.org/drawingml/2006/main" xmlns:p="http://schemas.openxmlformats.org/presentationml/2006/main" xmlns:r="http://schemas.openxmlformats.org/officeDocument/2006/relationships">
   <p:cSld>
+    <p:bg>
+      <p:bgPr>
+        <a:solidFill>
+          <a:srgbClr val="14161A"/>
+        </a:solidFill>
+        <a:effectLst/>
+      </p:bgPr>
+    </p:bg>
     <p:spTree>
       <p:nvGrpSpPr>
         <p:cNvPr id="1" name=""/>
@@ -5226,100 +4672,14 @@
       <p:grpSpPr/>
       <p:sp>
         <p:nvSpPr>
-          <p:cNvPr id="2" name="Rectangle 1"/>
-          <p:cNvSpPr/>
+          <p:cNvPr id="2" name="TextBox 1"/>
+          <p:cNvSpPr txBox="1"/>
           <p:nvPr/>
         </p:nvSpPr>
         <p:spPr>
           <a:xfrm>
-            <a:off x="0" y="0"/>
-            <a:ext cx="12191695" cy="6858000"/>
-          </a:xfrm>
-          <a:prstGeom prst="rect">
-            <a:avLst/>
-          </a:prstGeom>
-          <a:solidFill>
-            <a:srgbClr val="14161A"/>
-          </a:solidFill>
-          <a:ln>
-            <a:noFill/>
-          </a:ln>
-        </p:spPr>
-        <p:style>
-          <a:lnRef idx="1">
-            <a:schemeClr val="accent1"/>
-          </a:lnRef>
-          <a:fillRef idx="3">
-            <a:schemeClr val="accent1"/>
-          </a:fillRef>
-          <a:effectRef idx="2">
-            <a:schemeClr val="accent1"/>
-          </a:effectRef>
-          <a:fontRef idx="minor">
-            <a:schemeClr val="lt1"/>
-          </a:fontRef>
-        </p:style>
-        <p:txBody>
-          <a:bodyPr rtlCol="0" anchor="ctr"/>
-          <a:lstStyle/>
-          <a:p>
-            <a:pPr algn="ctr"/>
-          </a:p>
-        </p:txBody>
-      </p:sp>
-      <p:sp>
-        <p:nvSpPr>
-          <p:cNvPr id="3" name="Rectangle 2"/>
-          <p:cNvSpPr/>
-          <p:nvPr/>
-        </p:nvSpPr>
-        <p:spPr>
-          <a:xfrm>
-            <a:off x="0" y="0"/>
-            <a:ext cx="12191695" cy="73152"/>
-          </a:xfrm>
-          <a:prstGeom prst="rect">
-            <a:avLst/>
-          </a:prstGeom>
-          <a:solidFill>
-            <a:srgbClr val="C4964A"/>
-          </a:solidFill>
-          <a:ln>
-            <a:noFill/>
-          </a:ln>
-        </p:spPr>
-        <p:style>
-          <a:lnRef idx="1">
-            <a:schemeClr val="accent1"/>
-          </a:lnRef>
-          <a:fillRef idx="3">
-            <a:schemeClr val="accent1"/>
-          </a:fillRef>
-          <a:effectRef idx="2">
-            <a:schemeClr val="accent1"/>
-          </a:effectRef>
-          <a:fontRef idx="minor">
-            <a:schemeClr val="lt1"/>
-          </a:fontRef>
-        </p:style>
-        <p:txBody>
-          <a:bodyPr rtlCol="0" anchor="ctr"/>
-          <a:lstStyle/>
-          <a:p>
-            <a:pPr algn="ctr"/>
-          </a:p>
-        </p:txBody>
-      </p:sp>
-      <p:sp>
-        <p:nvSpPr>
-          <p:cNvPr id="4" name="TextBox 3"/>
-          <p:cNvSpPr txBox="1"/>
-          <p:nvPr/>
-        </p:nvSpPr>
-        <p:spPr>
-          <a:xfrm>
-            <a:off x="731520" y="2103120"/>
-            <a:ext cx="10515600" cy="1188720"/>
+            <a:off x="640080" y="411480"/>
+            <a:ext cx="10972800" cy="365760"/>
           </a:xfrm>
           <a:prstGeom prst="rect">
             <a:avLst/>
@@ -5332,28 +4692,33 @@
           </a:bodyPr>
           <a:lstStyle/>
           <a:p>
-            <a:r>
-              <a:rPr sz="3200" b="1">
-                <a:solidFill>
-                  <a:srgbClr val="F2EBDF"/>
-                </a:solidFill>
-                <a:latin typeface="Georgia"/>
-              </a:rPr>
-              <a:t>Enzo is best because of how it was built.</a:t>
-            </a:r>
-          </a:p>
-        </p:txBody>
-      </p:sp>
-      <p:sp>
-        <p:nvSpPr>
-          <p:cNvPr id="5" name="TextBox 4"/>
+            <a:pPr>
+              <a:spcAft>
+                <a:spcPts val="800"/>
+              </a:spcAft>
+            </a:pPr>
+            <a:r>
+              <a:rPr sz="1300" b="1">
+                <a:solidFill>
+                  <a:srgbClr val="C4964A"/>
+                </a:solidFill>
+                <a:latin typeface="Arial"/>
+              </a:rPr>
+              <a:t>THE END</a:t>
+            </a:r>
+          </a:p>
+        </p:txBody>
+      </p:sp>
+      <p:sp>
+        <p:nvSpPr>
+          <p:cNvPr id="3" name="TextBox 2"/>
           <p:cNvSpPr txBox="1"/>
           <p:nvPr/>
         </p:nvSpPr>
         <p:spPr>
           <a:xfrm>
-            <a:off x="731520" y="3474720"/>
-            <a:ext cx="10515600" cy="914400"/>
+            <a:off x="640080" y="914400"/>
+            <a:ext cx="10972800" cy="1280160"/>
           </a:xfrm>
           <a:prstGeom prst="rect">
             <a:avLst/>
@@ -5366,28 +4731,33 @@
           </a:bodyPr>
           <a:lstStyle/>
           <a:p>
-            <a:r>
-              <a:rPr sz="1800" b="0">
-                <a:solidFill>
-                  <a:srgbClr val="A8A093"/>
-                </a:solidFill>
-                <a:latin typeface="Calibri"/>
-              </a:rPr>
-              <a:t>Clear plan. Willing to improve. Easy to drive. Ready for the whole game.</a:t>
-            </a:r>
-          </a:p>
-        </p:txBody>
-      </p:sp>
-      <p:sp>
-        <p:nvSpPr>
-          <p:cNvPr id="6" name="TextBox 5"/>
+            <a:pPr>
+              <a:spcAft>
+                <a:spcPts val="800"/>
+              </a:spcAft>
+            </a:pPr>
+            <a:r>
+              <a:rPr sz="3200" b="1">
+                <a:solidFill>
+                  <a:srgbClr val="F2EBDF"/>
+                </a:solidFill>
+                <a:latin typeface="Arial"/>
+              </a:rPr>
+              <a:t>Enzo is best because of how it was built.</a:t>
+            </a:r>
+          </a:p>
+        </p:txBody>
+      </p:sp>
+      <p:sp>
+        <p:nvSpPr>
+          <p:cNvPr id="4" name="TextBox 3"/>
           <p:cNvSpPr txBox="1"/>
           <p:nvPr/>
         </p:nvSpPr>
         <p:spPr>
           <a:xfrm>
-            <a:off x="731520" y="4846320"/>
-            <a:ext cx="10515600" cy="457200"/>
+            <a:off x="640080" y="2377440"/>
+            <a:ext cx="10789920" cy="3474720"/>
           </a:xfrm>
           <a:prstGeom prst="rect">
             <a:avLst/>
@@ -5395,17 +4765,54 @@
           <a:noFill/>
         </p:spPr>
         <p:txBody>
-          <a:bodyPr wrap="none">
+          <a:bodyPr wrap="square">
             <a:spAutoFit/>
           </a:bodyPr>
           <a:lstStyle/>
           <a:p>
-            <a:r>
-              <a:rPr sz="2200" b="1">
-                <a:solidFill>
-                  <a:srgbClr val="C4964A"/>
-                </a:solidFill>
-                <a:latin typeface="Georgia"/>
+            <a:pPr>
+              <a:spcAft>
+                <a:spcPts val="800"/>
+              </a:spcAft>
+            </a:pPr>
+            <a:r>
+              <a:rPr sz="2000" b="0">
+                <a:solidFill>
+                  <a:srgbClr val="F2EBDF"/>
+                </a:solidFill>
+                <a:latin typeface="Arial"/>
+              </a:rPr>
+              <a:t>Simple plan. Willing to change. Easy to drive. Ready for the whole game.</a:t>
+            </a:r>
+          </a:p>
+          <a:p>
+            <a:pPr>
+              <a:spcAft>
+                <a:spcPts val="800"/>
+              </a:spcAft>
+            </a:pPr>
+            <a:r>
+              <a:rPr sz="2000" b="0">
+                <a:solidFill>
+                  <a:srgbClr val="F2EBDF"/>
+                </a:solidFill>
+                <a:latin typeface="Arial"/>
+              </a:rPr>
+              <a:t/>
+            </a:r>
+          </a:p>
+          <a:p>
+            <a:pPr>
+              <a:spcAft>
+                <a:spcPts val="800"/>
+              </a:spcAft>
+            </a:pPr>
+            <a:r>
+              <a:rPr sz="2000" b="0">
+                <a:solidFill>
+                  <a:srgbClr val="F2EBDF"/>
+                </a:solidFill>
+                <a:latin typeface="Arial"/>
               </a:rPr>
               <a:t>Questions?</a:t>
             </a:r>
@@ -5414,14 +4821,14 @@
       </p:sp>
       <p:sp>
         <p:nvSpPr>
-          <p:cNvPr id="7" name="TextBox 6"/>
+          <p:cNvPr id="5" name="TextBox 4"/>
           <p:cNvSpPr txBox="1"/>
           <p:nvPr/>
         </p:nvSpPr>
         <p:spPr>
           <a:xfrm>
-            <a:off x="548640" y="6446520"/>
-            <a:ext cx="9144000" cy="274320"/>
+            <a:off x="640080" y="6309360"/>
+            <a:ext cx="10972800" cy="320040"/>
           </a:xfrm>
           <a:prstGeom prst="rect">
             <a:avLst/>
@@ -5429,19 +4836,24 @@
           <a:noFill/>
         </p:spPr>
         <p:txBody>
-          <a:bodyPr wrap="none">
+          <a:bodyPr wrap="square">
             <a:spAutoFit/>
           </a:bodyPr>
           <a:lstStyle/>
           <a:p>
+            <a:pPr>
+              <a:spcAft>
+                <a:spcPts val="800"/>
+              </a:spcAft>
+            </a:pPr>
             <a:r>
               <a:rPr sz="1100" b="0">
                 <a:solidFill>
                   <a:srgbClr val="A8A093"/>
                 </a:solidFill>
-                <a:latin typeface="Calibri"/>
-              </a:rPr>
-              <a:t>ENZO  ·  FRC Crescendo  ·  Team 1577 Steampunk  ·  11/11</a:t>
+                <a:latin typeface="Arial"/>
+              </a:rPr>
+              <a:t>ENZO  ·  Crescendo  ·  Team 1577 Steampunk  ·  11/11</a:t>
             </a:r>
           </a:p>
         </p:txBody>
@@ -5457,6 +4869,14 @@
 <file path=ppt/slides/slide2.xml><?xml version="1.0" encoding="utf-8"?>
 <p:sld xmlns:a="http://schemas.openxmlformats.org/drawingml/2006/main" xmlns:p="http://schemas.openxmlformats.org/presentationml/2006/main" xmlns:r="http://schemas.openxmlformats.org/officeDocument/2006/relationships">
   <p:cSld>
+    <p:bg>
+      <p:bgPr>
+        <a:solidFill>
+          <a:srgbClr val="14161A"/>
+        </a:solidFill>
+        <a:effectLst/>
+      </p:bgPr>
+    </p:bg>
     <p:spTree>
       <p:nvGrpSpPr>
         <p:cNvPr id="1" name=""/>
@@ -5466,93 +4886,7 @@
       <p:grpSpPr/>
       <p:sp>
         <p:nvSpPr>
-          <p:cNvPr id="2" name="Rectangle 1"/>
-          <p:cNvSpPr/>
-          <p:nvPr/>
-        </p:nvSpPr>
-        <p:spPr>
-          <a:xfrm>
-            <a:off x="0" y="0"/>
-            <a:ext cx="12191695" cy="6858000"/>
-          </a:xfrm>
-          <a:prstGeom prst="rect">
-            <a:avLst/>
-          </a:prstGeom>
-          <a:solidFill>
-            <a:srgbClr val="14161A"/>
-          </a:solidFill>
-          <a:ln>
-            <a:noFill/>
-          </a:ln>
-        </p:spPr>
-        <p:style>
-          <a:lnRef idx="1">
-            <a:schemeClr val="accent1"/>
-          </a:lnRef>
-          <a:fillRef idx="3">
-            <a:schemeClr val="accent1"/>
-          </a:fillRef>
-          <a:effectRef idx="2">
-            <a:schemeClr val="accent1"/>
-          </a:effectRef>
-          <a:fontRef idx="minor">
-            <a:schemeClr val="lt1"/>
-          </a:fontRef>
-        </p:style>
-        <p:txBody>
-          <a:bodyPr rtlCol="0" anchor="ctr"/>
-          <a:lstStyle/>
-          <a:p>
-            <a:pPr algn="ctr"/>
-          </a:p>
-        </p:txBody>
-      </p:sp>
-      <p:sp>
-        <p:nvSpPr>
-          <p:cNvPr id="3" name="Rectangle 2"/>
-          <p:cNvSpPr/>
-          <p:nvPr/>
-        </p:nvSpPr>
-        <p:spPr>
-          <a:xfrm>
-            <a:off x="0" y="0"/>
-            <a:ext cx="12191695" cy="73152"/>
-          </a:xfrm>
-          <a:prstGeom prst="rect">
-            <a:avLst/>
-          </a:prstGeom>
-          <a:solidFill>
-            <a:srgbClr val="C4964A"/>
-          </a:solidFill>
-          <a:ln>
-            <a:noFill/>
-          </a:ln>
-        </p:spPr>
-        <p:style>
-          <a:lnRef idx="1">
-            <a:schemeClr val="accent1"/>
-          </a:lnRef>
-          <a:fillRef idx="3">
-            <a:schemeClr val="accent1"/>
-          </a:fillRef>
-          <a:effectRef idx="2">
-            <a:schemeClr val="accent1"/>
-          </a:effectRef>
-          <a:fontRef idx="minor">
-            <a:schemeClr val="lt1"/>
-          </a:fontRef>
-        </p:style>
-        <p:txBody>
-          <a:bodyPr rtlCol="0" anchor="ctr"/>
-          <a:lstStyle/>
-          <a:p>
-            <a:pPr algn="ctr"/>
-          </a:p>
-        </p:txBody>
-      </p:sp>
-      <p:sp>
-        <p:nvSpPr>
-          <p:cNvPr id="4" name="TextBox 3"/>
+          <p:cNvPr id="2" name="TextBox 1"/>
           <p:cNvSpPr txBox="1"/>
           <p:nvPr/>
         </p:nvSpPr>
@@ -5567,17 +4901,22 @@
           <a:noFill/>
         </p:spPr>
         <p:txBody>
-          <a:bodyPr wrap="none">
+          <a:bodyPr wrap="square">
             <a:spAutoFit/>
           </a:bodyPr>
           <a:lstStyle/>
           <a:p>
+            <a:pPr>
+              <a:spcAft>
+                <a:spcPts val="800"/>
+              </a:spcAft>
+            </a:pPr>
             <a:r>
               <a:rPr sz="1300" b="1">
                 <a:solidFill>
                   <a:srgbClr val="C4964A"/>
                 </a:solidFill>
-                <a:latin typeface="Calibri"/>
+                <a:latin typeface="Arial"/>
               </a:rPr>
               <a:t>WHO IS ENZO?</a:t>
             </a:r>
@@ -5586,14 +4925,14 @@
       </p:sp>
       <p:sp>
         <p:nvSpPr>
-          <p:cNvPr id="5" name="TextBox 4"/>
+          <p:cNvPr id="3" name="TextBox 2"/>
           <p:cNvSpPr txBox="1"/>
           <p:nvPr/>
         </p:nvSpPr>
         <p:spPr>
           <a:xfrm>
-            <a:off x="640080" y="777240"/>
-            <a:ext cx="10972800" cy="1097280"/>
+            <a:off x="640080" y="914400"/>
+            <a:ext cx="10972800" cy="1280160"/>
           </a:xfrm>
           <a:prstGeom prst="rect">
             <a:avLst/>
@@ -5606,12 +4945,17 @@
           </a:bodyPr>
           <a:lstStyle/>
           <a:p>
-            <a:r>
-              <a:rPr sz="3400" b="1">
+            <a:pPr>
+              <a:spcAft>
+                <a:spcPts val="800"/>
+              </a:spcAft>
+            </a:pPr>
+            <a:r>
+              <a:rPr sz="3200" b="1">
                 <a:solidFill>
                   <a:srgbClr val="F2EBDF"/>
                 </a:solidFill>
-                <a:latin typeface="Georgia"/>
+                <a:latin typeface="Arial"/>
               </a:rPr>
               <a:t>Meet the robot</a:t>
             </a:r>
@@ -5620,61 +4964,14 @@
       </p:sp>
       <p:sp>
         <p:nvSpPr>
-          <p:cNvPr id="6" name="Rounded Rectangle 5"/>
-          <p:cNvSpPr/>
+          <p:cNvPr id="4" name="TextBox 3"/>
+          <p:cNvSpPr txBox="1"/>
           <p:nvPr/>
         </p:nvSpPr>
         <p:spPr>
           <a:xfrm>
-            <a:off x="640080" y="2468880"/>
-            <a:ext cx="3474720" cy="3108960"/>
-          </a:xfrm>
-          <a:prstGeom prst="roundRect">
-            <a:avLst>
-              <a:gd name="adj" fmla="val 8000"/>
-            </a:avLst>
-          </a:prstGeom>
-          <a:solidFill>
-            <a:srgbClr val="1E2228"/>
-          </a:solidFill>
-          <a:ln w="12700">
-            <a:solidFill>
-              <a:srgbClr val="3A342C"/>
-            </a:solidFill>
-          </a:ln>
-        </p:spPr>
-        <p:style>
-          <a:lnRef idx="1">
-            <a:schemeClr val="accent1"/>
-          </a:lnRef>
-          <a:fillRef idx="3">
-            <a:schemeClr val="accent1"/>
-          </a:fillRef>
-          <a:effectRef idx="2">
-            <a:schemeClr val="accent1"/>
-          </a:effectRef>
-          <a:fontRef idx="minor">
-            <a:schemeClr val="lt1"/>
-          </a:fontRef>
-        </p:style>
-        <p:txBody>
-          <a:bodyPr rtlCol="0" anchor="ctr"/>
-          <a:lstStyle/>
-          <a:p>
-            <a:pPr algn="ctr"/>
-          </a:p>
-        </p:txBody>
-      </p:sp>
-      <p:sp>
-        <p:nvSpPr>
-          <p:cNvPr id="7" name="TextBox 6"/>
-          <p:cNvSpPr txBox="1"/>
-          <p:nvPr/>
-        </p:nvSpPr>
-        <p:spPr>
-          <a:xfrm>
-            <a:off x="868680" y="2697480"/>
-            <a:ext cx="3017520" cy="411480"/>
+            <a:off x="640080" y="2377440"/>
+            <a:ext cx="10789920" cy="3474720"/>
           </a:xfrm>
           <a:prstGeom prst="rect">
             <a:avLst/>
@@ -5682,33 +4979,102 @@
           <a:noFill/>
         </p:spPr>
         <p:txBody>
-          <a:bodyPr wrap="none">
+          <a:bodyPr wrap="square">
             <a:spAutoFit/>
           </a:bodyPr>
           <a:lstStyle/>
           <a:p>
-            <a:r>
-              <a:rPr sz="1800" b="1">
-                <a:solidFill>
-                  <a:srgbClr val="C4964A"/>
-                </a:solidFill>
-                <a:latin typeface="Georgia"/>
-              </a:rPr>
-              <a:t>The team</a:t>
-            </a:r>
-          </a:p>
-        </p:txBody>
-      </p:sp>
-      <p:sp>
-        <p:nvSpPr>
-          <p:cNvPr id="8" name="TextBox 7"/>
+            <a:pPr>
+              <a:spcAft>
+                <a:spcPts val="800"/>
+              </a:spcAft>
+            </a:pPr>
+            <a:r>
+              <a:rPr sz="2000" b="0">
+                <a:solidFill>
+                  <a:srgbClr val="F2EBDF"/>
+                </a:solidFill>
+                <a:latin typeface="Arial"/>
+              </a:rPr>
+              <a:t>High school students on Team 1577 (Steampunk) built Enzo in Raanana, Israel.</a:t>
+            </a:r>
+          </a:p>
+          <a:p>
+            <a:pPr>
+              <a:spcAft>
+                <a:spcPts val="800"/>
+              </a:spcAft>
+            </a:pPr>
+            <a:r>
+              <a:rPr sz="2000" b="0">
+                <a:solidFill>
+                  <a:srgbClr val="F2EBDF"/>
+                </a:solidFill>
+                <a:latin typeface="Arial"/>
+              </a:rPr>
+              <a:t/>
+            </a:r>
+          </a:p>
+          <a:p>
+            <a:pPr>
+              <a:spcAft>
+                <a:spcPts val="800"/>
+              </a:spcAft>
+            </a:pPr>
+            <a:r>
+              <a:rPr sz="2000" b="0">
+                <a:solidFill>
+                  <a:srgbClr val="F2EBDF"/>
+                </a:solidFill>
+                <a:latin typeface="Arial"/>
+              </a:rPr>
+              <a:t>Crescendo is a robot sports game. Robots pick up foam rings called Notes, score points, and climb at the end.</a:t>
+            </a:r>
+          </a:p>
+          <a:p>
+            <a:pPr>
+              <a:spcAft>
+                <a:spcPts val="800"/>
+              </a:spcAft>
+            </a:pPr>
+            <a:r>
+              <a:rPr sz="2000" b="0">
+                <a:solidFill>
+                  <a:srgbClr val="F2EBDF"/>
+                </a:solidFill>
+                <a:latin typeface="Arial"/>
+              </a:rPr>
+              <a:t/>
+            </a:r>
+          </a:p>
+          <a:p>
+            <a:pPr>
+              <a:spcAft>
+                <a:spcPts val="800"/>
+              </a:spcAft>
+            </a:pPr>
+            <a:r>
+              <a:rPr sz="2000" b="0">
+                <a:solidFill>
+                  <a:srgbClr val="F2EBDF"/>
+                </a:solidFill>
+                <a:latin typeface="Arial"/>
+              </a:rPr>
+              <a:t>We’ll talk about how Enzo was built — not about game scores.</a:t>
+            </a:r>
+          </a:p>
+        </p:txBody>
+      </p:sp>
+      <p:sp>
+        <p:nvSpPr>
+          <p:cNvPr id="5" name="TextBox 4"/>
           <p:cNvSpPr txBox="1"/>
           <p:nvPr/>
         </p:nvSpPr>
         <p:spPr>
           <a:xfrm>
-            <a:off x="868680" y="3246120"/>
-            <a:ext cx="3017520" cy="2057400"/>
+            <a:off x="640080" y="6309360"/>
+            <a:ext cx="10972800" cy="320040"/>
           </a:xfrm>
           <a:prstGeom prst="rect">
             <a:avLst/>
@@ -5721,278 +5087,19 @@
           </a:bodyPr>
           <a:lstStyle/>
           <a:p>
-            <a:r>
-              <a:rPr sz="1500" b="0">
-                <a:solidFill>
-                  <a:srgbClr val="F2EBDF"/>
-                </a:solidFill>
-                <a:latin typeface="Calibri"/>
-              </a:rPr>
-              <a:t>Built by FRC Team 1577, Steampunk, from Raanana, Israel.</a:t>
-            </a:r>
-          </a:p>
-        </p:txBody>
-      </p:sp>
-      <p:sp>
-        <p:nvSpPr>
-          <p:cNvPr id="9" name="Rounded Rectangle 8"/>
-          <p:cNvSpPr/>
-          <p:nvPr/>
-        </p:nvSpPr>
-        <p:spPr>
-          <a:xfrm>
-            <a:off x="4343400" y="2468880"/>
-            <a:ext cx="3474720" cy="3108960"/>
-          </a:xfrm>
-          <a:prstGeom prst="roundRect">
-            <a:avLst>
-              <a:gd name="adj" fmla="val 8000"/>
-            </a:avLst>
-          </a:prstGeom>
-          <a:solidFill>
-            <a:srgbClr val="1E2228"/>
-          </a:solidFill>
-          <a:ln w="12700">
-            <a:solidFill>
-              <a:srgbClr val="3A342C"/>
-            </a:solidFill>
-          </a:ln>
-        </p:spPr>
-        <p:style>
-          <a:lnRef idx="1">
-            <a:schemeClr val="accent1"/>
-          </a:lnRef>
-          <a:fillRef idx="3">
-            <a:schemeClr val="accent1"/>
-          </a:fillRef>
-          <a:effectRef idx="2">
-            <a:schemeClr val="accent1"/>
-          </a:effectRef>
-          <a:fontRef idx="minor">
-            <a:schemeClr val="lt1"/>
-          </a:fontRef>
-        </p:style>
-        <p:txBody>
-          <a:bodyPr rtlCol="0" anchor="ctr"/>
-          <a:lstStyle/>
-          <a:p>
-            <a:pPr algn="ctr"/>
-          </a:p>
-        </p:txBody>
-      </p:sp>
-      <p:sp>
-        <p:nvSpPr>
-          <p:cNvPr id="10" name="TextBox 9"/>
-          <p:cNvSpPr txBox="1"/>
-          <p:nvPr/>
-        </p:nvSpPr>
-        <p:spPr>
-          <a:xfrm>
-            <a:off x="4572000" y="2697480"/>
-            <a:ext cx="3017520" cy="411480"/>
-          </a:xfrm>
-          <a:prstGeom prst="rect">
-            <a:avLst/>
-          </a:prstGeom>
-          <a:noFill/>
-        </p:spPr>
-        <p:txBody>
-          <a:bodyPr wrap="none">
-            <a:spAutoFit/>
-          </a:bodyPr>
-          <a:lstStyle/>
-          <a:p>
-            <a:r>
-              <a:rPr sz="1800" b="1">
-                <a:solidFill>
-                  <a:srgbClr val="C4964A"/>
-                </a:solidFill>
-                <a:latin typeface="Georgia"/>
-              </a:rPr>
-              <a:t>The game</a:t>
-            </a:r>
-          </a:p>
-        </p:txBody>
-      </p:sp>
-      <p:sp>
-        <p:nvSpPr>
-          <p:cNvPr id="11" name="TextBox 10"/>
-          <p:cNvSpPr txBox="1"/>
-          <p:nvPr/>
-        </p:nvSpPr>
-        <p:spPr>
-          <a:xfrm>
-            <a:off x="4572000" y="3246120"/>
-            <a:ext cx="3017520" cy="2057400"/>
-          </a:xfrm>
-          <a:prstGeom prst="rect">
-            <a:avLst/>
-          </a:prstGeom>
-          <a:noFill/>
-        </p:spPr>
-        <p:txBody>
-          <a:bodyPr wrap="square">
-            <a:spAutoFit/>
-          </a:bodyPr>
-          <a:lstStyle/>
-          <a:p>
-            <a:r>
-              <a:rPr sz="1500" b="0">
-                <a:solidFill>
-                  <a:srgbClr val="F2EBDF"/>
-                </a:solidFill>
-                <a:latin typeface="Calibri"/>
-              </a:rPr>
-              <a:t>Crescendo is like a sports match for robots: pick up foam rings called Notes, score them, and climb at the end.</a:t>
-            </a:r>
-          </a:p>
-        </p:txBody>
-      </p:sp>
-      <p:sp>
-        <p:nvSpPr>
-          <p:cNvPr id="12" name="Rounded Rectangle 11"/>
-          <p:cNvSpPr/>
-          <p:nvPr/>
-        </p:nvSpPr>
-        <p:spPr>
-          <a:xfrm>
-            <a:off x="8046720" y="2468880"/>
-            <a:ext cx="3474720" cy="3108960"/>
-          </a:xfrm>
-          <a:prstGeom prst="roundRect">
-            <a:avLst>
-              <a:gd name="adj" fmla="val 8000"/>
-            </a:avLst>
-          </a:prstGeom>
-          <a:solidFill>
-            <a:srgbClr val="1E2228"/>
-          </a:solidFill>
-          <a:ln w="12700">
-            <a:solidFill>
-              <a:srgbClr val="3A342C"/>
-            </a:solidFill>
-          </a:ln>
-        </p:spPr>
-        <p:style>
-          <a:lnRef idx="1">
-            <a:schemeClr val="accent1"/>
-          </a:lnRef>
-          <a:fillRef idx="3">
-            <a:schemeClr val="accent1"/>
-          </a:fillRef>
-          <a:effectRef idx="2">
-            <a:schemeClr val="accent1"/>
-          </a:effectRef>
-          <a:fontRef idx="minor">
-            <a:schemeClr val="lt1"/>
-          </a:fontRef>
-        </p:style>
-        <p:txBody>
-          <a:bodyPr rtlCol="0" anchor="ctr"/>
-          <a:lstStyle/>
-          <a:p>
-            <a:pPr algn="ctr"/>
-          </a:p>
-        </p:txBody>
-      </p:sp>
-      <p:sp>
-        <p:nvSpPr>
-          <p:cNvPr id="13" name="TextBox 12"/>
-          <p:cNvSpPr txBox="1"/>
-          <p:nvPr/>
-        </p:nvSpPr>
-        <p:spPr>
-          <a:xfrm>
-            <a:off x="8275320" y="2697480"/>
-            <a:ext cx="3017520" cy="411480"/>
-          </a:xfrm>
-          <a:prstGeom prst="rect">
-            <a:avLst/>
-          </a:prstGeom>
-          <a:noFill/>
-        </p:spPr>
-        <p:txBody>
-          <a:bodyPr wrap="none">
-            <a:spAutoFit/>
-          </a:bodyPr>
-          <a:lstStyle/>
-          <a:p>
-            <a:r>
-              <a:rPr sz="1800" b="1">
-                <a:solidFill>
-                  <a:srgbClr val="C4964A"/>
-                </a:solidFill>
-                <a:latin typeface="Georgia"/>
-              </a:rPr>
-              <a:t>Our focus</a:t>
-            </a:r>
-          </a:p>
-        </p:txBody>
-      </p:sp>
-      <p:sp>
-        <p:nvSpPr>
-          <p:cNvPr id="14" name="TextBox 13"/>
-          <p:cNvSpPr txBox="1"/>
-          <p:nvPr/>
-        </p:nvSpPr>
-        <p:spPr>
-          <a:xfrm>
-            <a:off x="8275320" y="3246120"/>
-            <a:ext cx="3017520" cy="2057400"/>
-          </a:xfrm>
-          <a:prstGeom prst="rect">
-            <a:avLst/>
-          </a:prstGeom>
-          <a:noFill/>
-        </p:spPr>
-        <p:txBody>
-          <a:bodyPr wrap="square">
-            <a:spAutoFit/>
-          </a:bodyPr>
-          <a:lstStyle/>
-          <a:p>
-            <a:r>
-              <a:rPr sz="1500" b="0">
-                <a:solidFill>
-                  <a:srgbClr val="F2EBDF"/>
-                </a:solidFill>
-                <a:latin typeface="Calibri"/>
-              </a:rPr>
-              <a:t>We’ll talk about how Enzo was designed — not about game scores.</a:t>
-            </a:r>
-          </a:p>
-        </p:txBody>
-      </p:sp>
-      <p:sp>
-        <p:nvSpPr>
-          <p:cNvPr id="15" name="TextBox 14"/>
-          <p:cNvSpPr txBox="1"/>
-          <p:nvPr/>
-        </p:nvSpPr>
-        <p:spPr>
-          <a:xfrm>
-            <a:off x="548640" y="6446520"/>
-            <a:ext cx="9144000" cy="274320"/>
-          </a:xfrm>
-          <a:prstGeom prst="rect">
-            <a:avLst/>
-          </a:prstGeom>
-          <a:noFill/>
-        </p:spPr>
-        <p:txBody>
-          <a:bodyPr wrap="none">
-            <a:spAutoFit/>
-          </a:bodyPr>
-          <a:lstStyle/>
-          <a:p>
+            <a:pPr>
+              <a:spcAft>
+                <a:spcPts val="800"/>
+              </a:spcAft>
+            </a:pPr>
             <a:r>
               <a:rPr sz="1100" b="0">
                 <a:solidFill>
                   <a:srgbClr val="A8A093"/>
                 </a:solidFill>
-                <a:latin typeface="Calibri"/>
-              </a:rPr>
-              <a:t>ENZO  ·  FRC Crescendo  ·  Team 1577 Steampunk  ·  2/11</a:t>
+                <a:latin typeface="Arial"/>
+              </a:rPr>
+              <a:t>ENZO  ·  Crescendo  ·  Team 1577 Steampunk  ·  2/11</a:t>
             </a:r>
           </a:p>
         </p:txBody>
@@ -6008,6 +5115,14 @@
 <file path=ppt/slides/slide3.xml><?xml version="1.0" encoding="utf-8"?>
 <p:sld xmlns:a="http://schemas.openxmlformats.org/drawingml/2006/main" xmlns:p="http://schemas.openxmlformats.org/presentationml/2006/main" xmlns:r="http://schemas.openxmlformats.org/officeDocument/2006/relationships">
   <p:cSld>
+    <p:bg>
+      <p:bgPr>
+        <a:solidFill>
+          <a:srgbClr val="14161A"/>
+        </a:solidFill>
+        <a:effectLst/>
+      </p:bgPr>
+    </p:bg>
     <p:spTree>
       <p:nvGrpSpPr>
         <p:cNvPr id="1" name=""/>
@@ -6017,93 +5132,7 @@
       <p:grpSpPr/>
       <p:sp>
         <p:nvSpPr>
-          <p:cNvPr id="2" name="Rectangle 1"/>
-          <p:cNvSpPr/>
-          <p:nvPr/>
-        </p:nvSpPr>
-        <p:spPr>
-          <a:xfrm>
-            <a:off x="0" y="0"/>
-            <a:ext cx="12191695" cy="6858000"/>
-          </a:xfrm>
-          <a:prstGeom prst="rect">
-            <a:avLst/>
-          </a:prstGeom>
-          <a:solidFill>
-            <a:srgbClr val="14161A"/>
-          </a:solidFill>
-          <a:ln>
-            <a:noFill/>
-          </a:ln>
-        </p:spPr>
-        <p:style>
-          <a:lnRef idx="1">
-            <a:schemeClr val="accent1"/>
-          </a:lnRef>
-          <a:fillRef idx="3">
-            <a:schemeClr val="accent1"/>
-          </a:fillRef>
-          <a:effectRef idx="2">
-            <a:schemeClr val="accent1"/>
-          </a:effectRef>
-          <a:fontRef idx="minor">
-            <a:schemeClr val="lt1"/>
-          </a:fontRef>
-        </p:style>
-        <p:txBody>
-          <a:bodyPr rtlCol="0" anchor="ctr"/>
-          <a:lstStyle/>
-          <a:p>
-            <a:pPr algn="ctr"/>
-          </a:p>
-        </p:txBody>
-      </p:sp>
-      <p:sp>
-        <p:nvSpPr>
-          <p:cNvPr id="3" name="Rectangle 2"/>
-          <p:cNvSpPr/>
-          <p:nvPr/>
-        </p:nvSpPr>
-        <p:spPr>
-          <a:xfrm>
-            <a:off x="0" y="0"/>
-            <a:ext cx="12191695" cy="73152"/>
-          </a:xfrm>
-          <a:prstGeom prst="rect">
-            <a:avLst/>
-          </a:prstGeom>
-          <a:solidFill>
-            <a:srgbClr val="C4964A"/>
-          </a:solidFill>
-          <a:ln>
-            <a:noFill/>
-          </a:ln>
-        </p:spPr>
-        <p:style>
-          <a:lnRef idx="1">
-            <a:schemeClr val="accent1"/>
-          </a:lnRef>
-          <a:fillRef idx="3">
-            <a:schemeClr val="accent1"/>
-          </a:fillRef>
-          <a:effectRef idx="2">
-            <a:schemeClr val="accent1"/>
-          </a:effectRef>
-          <a:fontRef idx="minor">
-            <a:schemeClr val="lt1"/>
-          </a:fontRef>
-        </p:style>
-        <p:txBody>
-          <a:bodyPr rtlCol="0" anchor="ctr"/>
-          <a:lstStyle/>
-          <a:p>
-            <a:pPr algn="ctr"/>
-          </a:p>
-        </p:txBody>
-      </p:sp>
-      <p:sp>
-        <p:nvSpPr>
-          <p:cNvPr id="4" name="TextBox 3"/>
+          <p:cNvPr id="2" name="TextBox 1"/>
           <p:cNvSpPr txBox="1"/>
           <p:nvPr/>
         </p:nvSpPr>
@@ -6118,33 +5147,38 @@
           <a:noFill/>
         </p:spPr>
         <p:txBody>
-          <a:bodyPr wrap="none">
+          <a:bodyPr wrap="square">
             <a:spAutoFit/>
           </a:bodyPr>
           <a:lstStyle/>
           <a:p>
+            <a:pPr>
+              <a:spcAft>
+                <a:spcPts val="800"/>
+              </a:spcAft>
+            </a:pPr>
             <a:r>
               <a:rPr sz="1300" b="1">
                 <a:solidFill>
                   <a:srgbClr val="C4964A"/>
                 </a:solidFill>
-                <a:latin typeface="Calibri"/>
-              </a:rPr>
-              <a:t>THE CHALLENGE</a:t>
-            </a:r>
-          </a:p>
-        </p:txBody>
-      </p:sp>
-      <p:sp>
-        <p:nvSpPr>
-          <p:cNvPr id="5" name="TextBox 4"/>
+                <a:latin typeface="Arial"/>
+              </a:rPr>
+              <a:t>THE GAME</a:t>
+            </a:r>
+          </a:p>
+        </p:txBody>
+      </p:sp>
+      <p:sp>
+        <p:nvSpPr>
+          <p:cNvPr id="3" name="TextBox 2"/>
           <p:cNvSpPr txBox="1"/>
           <p:nvPr/>
         </p:nvSpPr>
         <p:spPr>
           <a:xfrm>
-            <a:off x="640080" y="777240"/>
-            <a:ext cx="10972800" cy="1097280"/>
+            <a:off x="640080" y="914400"/>
+            <a:ext cx="10972800" cy="1280160"/>
           </a:xfrm>
           <a:prstGeom prst="rect">
             <a:avLst/>
@@ -6157,12 +5191,17 @@
           </a:bodyPr>
           <a:lstStyle/>
           <a:p>
-            <a:r>
-              <a:rPr sz="3400" b="1">
+            <a:pPr>
+              <a:spcAft>
+                <a:spcPts val="800"/>
+              </a:spcAft>
+            </a:pPr>
+            <a:r>
+              <a:rPr sz="3200" b="1">
                 <a:solidFill>
                   <a:srgbClr val="F2EBDF"/>
                 </a:solidFill>
-                <a:latin typeface="Georgia"/>
+                <a:latin typeface="Arial"/>
               </a:rPr>
               <a:t>What robots had to do</a:t>
             </a:r>
@@ -6171,14 +5210,14 @@
       </p:sp>
       <p:sp>
         <p:nvSpPr>
-          <p:cNvPr id="6" name="TextBox 5"/>
+          <p:cNvPr id="4" name="TextBox 3"/>
           <p:cNvSpPr txBox="1"/>
           <p:nvPr/>
         </p:nvSpPr>
         <p:spPr>
           <a:xfrm>
-            <a:off x="731520" y="2468880"/>
-            <a:ext cx="10515600" cy="3474720"/>
+            <a:off x="640080" y="2377440"/>
+            <a:ext cx="10789920" cy="3474720"/>
           </a:xfrm>
           <a:prstGeom prst="rect">
             <a:avLst/>
@@ -6193,7 +5232,7 @@
           <a:p>
             <a:pPr>
               <a:spcAft>
-                <a:spcPts val="1400"/>
+                <a:spcPts val="800"/>
               </a:spcAft>
             </a:pPr>
             <a:r>
@@ -6201,15 +5240,15 @@
                 <a:solidFill>
                   <a:srgbClr val="F2EBDF"/>
                 </a:solidFill>
-                <a:latin typeface="Calibri"/>
-              </a:rPr>
-              <a:t>Pick up Notes from the floor quickly</a:t>
-            </a:r>
-          </a:p>
-          <a:p>
-            <a:pPr>
-              <a:spcAft>
-                <a:spcPts val="1400"/>
+                <a:latin typeface="Arial"/>
+              </a:rPr>
+              <a:t>• Pick up Notes from the floor fast</a:t>
+            </a:r>
+          </a:p>
+          <a:p>
+            <a:pPr>
+              <a:spcAft>
+                <a:spcPts val="800"/>
               </a:spcAft>
             </a:pPr>
             <a:r>
@@ -6217,15 +5256,15 @@
                 <a:solidFill>
                   <a:srgbClr val="F2EBDF"/>
                 </a:solidFill>
-                <a:latin typeface="Calibri"/>
-              </a:rPr>
-              <a:t>Shoot them into a big goal (the Speaker)</a:t>
-            </a:r>
-          </a:p>
-          <a:p>
-            <a:pPr>
-              <a:spcAft>
-                <a:spcPts val="1400"/>
+                <a:latin typeface="Arial"/>
+              </a:rPr>
+              <a:t>• Shoot Notes into a big goal called the Speaker</a:t>
+            </a:r>
+          </a:p>
+          <a:p>
+            <a:pPr>
+              <a:spcAft>
+                <a:spcPts val="800"/>
               </a:spcAft>
             </a:pPr>
             <a:r>
@@ -6233,15 +5272,15 @@
                 <a:solidFill>
                   <a:srgbClr val="F2EBDF"/>
                 </a:solidFill>
-                <a:latin typeface="Calibri"/>
-              </a:rPr>
-              <a:t>Also put Notes in a side goal (the Amp)</a:t>
-            </a:r>
-          </a:p>
-          <a:p>
-            <a:pPr>
-              <a:spcAft>
-                <a:spcPts val="1400"/>
+                <a:latin typeface="Arial"/>
+              </a:rPr>
+              <a:t>• Also put Notes in a side goal called the Amp</a:t>
+            </a:r>
+          </a:p>
+          <a:p>
+            <a:pPr>
+              <a:spcAft>
+                <a:spcPts val="800"/>
               </a:spcAft>
             </a:pPr>
             <a:r>
@@ -6249,15 +5288,15 @@
                 <a:solidFill>
                   <a:srgbClr val="F2EBDF"/>
                 </a:solidFill>
-                <a:latin typeface="Calibri"/>
-              </a:rPr>
-              <a:t>Climb onto a chain at the end of the match</a:t>
-            </a:r>
-          </a:p>
-          <a:p>
-            <a:pPr>
-              <a:spcAft>
-                <a:spcPts val="1400"/>
+                <a:latin typeface="Arial"/>
+              </a:rPr>
+              <a:t>• Climb a chain near the end of the match</a:t>
+            </a:r>
+          </a:p>
+          <a:p>
+            <a:pPr>
+              <a:spcAft>
+                <a:spcPts val="800"/>
               </a:spcAft>
             </a:pPr>
             <a:r>
@@ -6265,23 +5304,23 @@
                 <a:solidFill>
                   <a:srgbClr val="F2EBDF"/>
                 </a:solidFill>
-                <a:latin typeface="Calibri"/>
-              </a:rPr>
-              <a:t>Keep moving even when other robots get in the way</a:t>
-            </a:r>
-          </a:p>
-        </p:txBody>
-      </p:sp>
-      <p:sp>
-        <p:nvSpPr>
-          <p:cNvPr id="7" name="TextBox 6"/>
+                <a:latin typeface="Arial"/>
+              </a:rPr>
+              <a:t>• Keep driving even when other robots block them</a:t>
+            </a:r>
+          </a:p>
+        </p:txBody>
+      </p:sp>
+      <p:sp>
+        <p:nvSpPr>
+          <p:cNvPr id="5" name="TextBox 4"/>
           <p:cNvSpPr txBox="1"/>
           <p:nvPr/>
         </p:nvSpPr>
         <p:spPr>
           <a:xfrm>
-            <a:off x="548640" y="6446520"/>
-            <a:ext cx="9144000" cy="274320"/>
+            <a:off x="640080" y="6309360"/>
+            <a:ext cx="10972800" cy="320040"/>
           </a:xfrm>
           <a:prstGeom prst="rect">
             <a:avLst/>
@@ -6289,19 +5328,24 @@
           <a:noFill/>
         </p:spPr>
         <p:txBody>
-          <a:bodyPr wrap="none">
+          <a:bodyPr wrap="square">
             <a:spAutoFit/>
           </a:bodyPr>
           <a:lstStyle/>
           <a:p>
+            <a:pPr>
+              <a:spcAft>
+                <a:spcPts val="800"/>
+              </a:spcAft>
+            </a:pPr>
             <a:r>
               <a:rPr sz="1100" b="0">
                 <a:solidFill>
                   <a:srgbClr val="A8A093"/>
                 </a:solidFill>
-                <a:latin typeface="Calibri"/>
-              </a:rPr>
-              <a:t>ENZO  ·  FRC Crescendo  ·  Team 1577 Steampunk  ·  3/11</a:t>
+                <a:latin typeface="Arial"/>
+              </a:rPr>
+              <a:t>ENZO  ·  Crescendo  ·  Team 1577 Steampunk  ·  3/11</a:t>
             </a:r>
           </a:p>
         </p:txBody>
@@ -6317,6 +5361,14 @@
 <file path=ppt/slides/slide4.xml><?xml version="1.0" encoding="utf-8"?>
 <p:sld xmlns:a="http://schemas.openxmlformats.org/drawingml/2006/main" xmlns:p="http://schemas.openxmlformats.org/presentationml/2006/main" xmlns:r="http://schemas.openxmlformats.org/officeDocument/2006/relationships">
   <p:cSld>
+    <p:bg>
+      <p:bgPr>
+        <a:solidFill>
+          <a:srgbClr val="14161A"/>
+        </a:solidFill>
+        <a:effectLst/>
+      </p:bgPr>
+    </p:bg>
     <p:spTree>
       <p:nvGrpSpPr>
         <p:cNvPr id="1" name=""/>
@@ -6326,93 +5378,7 @@
       <p:grpSpPr/>
       <p:sp>
         <p:nvSpPr>
-          <p:cNvPr id="2" name="Rectangle 1"/>
-          <p:cNvSpPr/>
-          <p:nvPr/>
-        </p:nvSpPr>
-        <p:spPr>
-          <a:xfrm>
-            <a:off x="0" y="0"/>
-            <a:ext cx="12191695" cy="6858000"/>
-          </a:xfrm>
-          <a:prstGeom prst="rect">
-            <a:avLst/>
-          </a:prstGeom>
-          <a:solidFill>
-            <a:srgbClr val="14161A"/>
-          </a:solidFill>
-          <a:ln>
-            <a:noFill/>
-          </a:ln>
-        </p:spPr>
-        <p:style>
-          <a:lnRef idx="1">
-            <a:schemeClr val="accent1"/>
-          </a:lnRef>
-          <a:fillRef idx="3">
-            <a:schemeClr val="accent1"/>
-          </a:fillRef>
-          <a:effectRef idx="2">
-            <a:schemeClr val="accent1"/>
-          </a:effectRef>
-          <a:fontRef idx="minor">
-            <a:schemeClr val="lt1"/>
-          </a:fontRef>
-        </p:style>
-        <p:txBody>
-          <a:bodyPr rtlCol="0" anchor="ctr"/>
-          <a:lstStyle/>
-          <a:p>
-            <a:pPr algn="ctr"/>
-          </a:p>
-        </p:txBody>
-      </p:sp>
-      <p:sp>
-        <p:nvSpPr>
-          <p:cNvPr id="3" name="Rectangle 2"/>
-          <p:cNvSpPr/>
-          <p:nvPr/>
-        </p:nvSpPr>
-        <p:spPr>
-          <a:xfrm>
-            <a:off x="0" y="0"/>
-            <a:ext cx="12191695" cy="73152"/>
-          </a:xfrm>
-          <a:prstGeom prst="rect">
-            <a:avLst/>
-          </a:prstGeom>
-          <a:solidFill>
-            <a:srgbClr val="C4964A"/>
-          </a:solidFill>
-          <a:ln>
-            <a:noFill/>
-          </a:ln>
-        </p:spPr>
-        <p:style>
-          <a:lnRef idx="1">
-            <a:schemeClr val="accent1"/>
-          </a:lnRef>
-          <a:fillRef idx="3">
-            <a:schemeClr val="accent1"/>
-          </a:fillRef>
-          <a:effectRef idx="2">
-            <a:schemeClr val="accent1"/>
-          </a:effectRef>
-          <a:fontRef idx="minor">
-            <a:schemeClr val="lt1"/>
-          </a:fontRef>
-        </p:style>
-        <p:txBody>
-          <a:bodyPr rtlCol="0" anchor="ctr"/>
-          <a:lstStyle/>
-          <a:p>
-            <a:pPr algn="ctr"/>
-          </a:p>
-        </p:txBody>
-      </p:sp>
-      <p:sp>
-        <p:nvSpPr>
-          <p:cNvPr id="4" name="TextBox 3"/>
+          <p:cNvPr id="2" name="TextBox 1"/>
           <p:cNvSpPr txBox="1"/>
           <p:nvPr/>
         </p:nvSpPr>
@@ -6427,17 +5393,22 @@
           <a:noFill/>
         </p:spPr>
         <p:txBody>
-          <a:bodyPr wrap="none">
+          <a:bodyPr wrap="square">
             <a:spAutoFit/>
           </a:bodyPr>
           <a:lstStyle/>
           <a:p>
+            <a:pPr>
+              <a:spcAft>
+                <a:spcPts val="800"/>
+              </a:spcAft>
+            </a:pPr>
             <a:r>
               <a:rPr sz="1300" b="1">
                 <a:solidFill>
                   <a:srgbClr val="C4964A"/>
                 </a:solidFill>
-                <a:latin typeface="Calibri"/>
+                <a:latin typeface="Arial"/>
               </a:rPr>
               <a:t>WHAT “BEST” MEANS</a:t>
             </a:r>
@@ -6446,14 +5417,14 @@
       </p:sp>
       <p:sp>
         <p:nvSpPr>
-          <p:cNvPr id="5" name="TextBox 4"/>
+          <p:cNvPr id="3" name="TextBox 2"/>
           <p:cNvSpPr txBox="1"/>
           <p:nvPr/>
         </p:nvSpPr>
         <p:spPr>
           <a:xfrm>
-            <a:off x="640080" y="777240"/>
-            <a:ext cx="10972800" cy="1097280"/>
+            <a:off x="640080" y="914400"/>
+            <a:ext cx="10972800" cy="1280160"/>
           </a:xfrm>
           <a:prstGeom prst="rect">
             <a:avLst/>
@@ -6466,28 +5437,33 @@
           </a:bodyPr>
           <a:lstStyle/>
           <a:p>
-            <a:r>
-              <a:rPr sz="3400" b="1">
+            <a:pPr>
+              <a:spcAft>
+                <a:spcPts val="800"/>
+              </a:spcAft>
+            </a:pPr>
+            <a:r>
+              <a:rPr sz="3200" b="1">
                 <a:solidFill>
                   <a:srgbClr val="F2EBDF"/>
                 </a:solidFill>
-                <a:latin typeface="Georgia"/>
-              </a:rPr>
-              <a:t>Not flashiest — smartest</a:t>
-            </a:r>
-          </a:p>
-        </p:txBody>
-      </p:sp>
-      <p:sp>
-        <p:nvSpPr>
-          <p:cNvPr id="6" name="TextBox 5"/>
+                <a:latin typeface="Arial"/>
+              </a:rPr>
+              <a:t>Not the flashiest — the smartest</a:t>
+            </a:r>
+          </a:p>
+        </p:txBody>
+      </p:sp>
+      <p:sp>
+        <p:nvSpPr>
+          <p:cNvPr id="4" name="TextBox 3"/>
           <p:cNvSpPr txBox="1"/>
           <p:nvPr/>
         </p:nvSpPr>
         <p:spPr>
           <a:xfrm>
-            <a:off x="731520" y="2468880"/>
-            <a:ext cx="10515600" cy="3474720"/>
+            <a:off x="640080" y="2377440"/>
+            <a:ext cx="10789920" cy="3474720"/>
           </a:xfrm>
           <a:prstGeom prst="rect">
             <a:avLst/>
@@ -6502,7 +5478,7 @@
           <a:p>
             <a:pPr>
               <a:spcAft>
-                <a:spcPts val="1400"/>
+                <a:spcPts val="800"/>
               </a:spcAft>
             </a:pPr>
             <a:r>
@@ -6510,15 +5486,15 @@
                 <a:solidFill>
                   <a:srgbClr val="F2EBDF"/>
                 </a:solidFill>
-                <a:latin typeface="Calibri"/>
-              </a:rPr>
-              <a:t>Has a clear plan for the whole game</a:t>
-            </a:r>
-          </a:p>
-          <a:p>
-            <a:pPr>
-              <a:spcAft>
-                <a:spcPts val="1400"/>
+                <a:latin typeface="Arial"/>
+              </a:rPr>
+              <a:t>• Has a simple plan for the whole game</a:t>
+            </a:r>
+          </a:p>
+          <a:p>
+            <a:pPr>
+              <a:spcAft>
+                <a:spcPts val="800"/>
               </a:spcAft>
             </a:pPr>
             <a:r>
@@ -6526,15 +5502,15 @@
                 <a:solidFill>
                   <a:srgbClr val="F2EBDF"/>
                 </a:solidFill>
-                <a:latin typeface="Calibri"/>
-              </a:rPr>
-              <a:t>Picks up and scores Notes smoothly</a:t>
-            </a:r>
-          </a:p>
-          <a:p>
-            <a:pPr>
-              <a:spcAft>
-                <a:spcPts val="1400"/>
+                <a:latin typeface="Arial"/>
+              </a:rPr>
+              <a:t>• Picks up and scores Notes without drama</a:t>
+            </a:r>
+          </a:p>
+          <a:p>
+            <a:pPr>
+              <a:spcAft>
+                <a:spcPts val="800"/>
               </a:spcAft>
             </a:pPr>
             <a:r>
@@ -6542,15 +5518,15 @@
                 <a:solidFill>
                   <a:srgbClr val="F2EBDF"/>
                 </a:solidFill>
-                <a:latin typeface="Calibri"/>
-              </a:rPr>
-              <a:t>Can help the team in more than one way</a:t>
-            </a:r>
-          </a:p>
-          <a:p>
-            <a:pPr>
-              <a:spcAft>
-                <a:spcPts val="1400"/>
+                <a:latin typeface="Arial"/>
+              </a:rPr>
+              <a:t>• Can help its partners in more than one way</a:t>
+            </a:r>
+          </a:p>
+          <a:p>
+            <a:pPr>
+              <a:spcAft>
+                <a:spcPts val="800"/>
               </a:spcAft>
             </a:pPr>
             <a:r>
@@ -6558,15 +5534,15 @@
                 <a:solidFill>
                   <a:srgbClr val="F2EBDF"/>
                 </a:solidFill>
-                <a:latin typeface="Calibri"/>
-              </a:rPr>
-              <a:t>Gets better when the team finds problems</a:t>
-            </a:r>
-          </a:p>
-          <a:p>
-            <a:pPr>
-              <a:spcAft>
-                <a:spcPts val="1400"/>
+                <a:latin typeface="Arial"/>
+              </a:rPr>
+              <a:t>• Gets fixed when something is wrong</a:t>
+            </a:r>
+          </a:p>
+          <a:p>
+            <a:pPr>
+              <a:spcAft>
+                <a:spcPts val="800"/>
               </a:spcAft>
             </a:pPr>
             <a:r>
@@ -6574,23 +5550,23 @@
                 <a:solidFill>
                   <a:srgbClr val="F2EBDF"/>
                 </a:solidFill>
-                <a:latin typeface="Calibri"/>
-              </a:rPr>
-              <a:t>Is easy for the drivers to control</a:t>
-            </a:r>
-          </a:p>
-        </p:txBody>
-      </p:sp>
-      <p:sp>
-        <p:nvSpPr>
-          <p:cNvPr id="7" name="TextBox 6"/>
+                <a:latin typeface="Arial"/>
+              </a:rPr>
+              <a:t>• Is easy for the drivers to use</a:t>
+            </a:r>
+          </a:p>
+        </p:txBody>
+      </p:sp>
+      <p:sp>
+        <p:nvSpPr>
+          <p:cNvPr id="5" name="TextBox 4"/>
           <p:cNvSpPr txBox="1"/>
           <p:nvPr/>
         </p:nvSpPr>
         <p:spPr>
           <a:xfrm>
-            <a:off x="548640" y="6446520"/>
-            <a:ext cx="9144000" cy="274320"/>
+            <a:off x="640080" y="6309360"/>
+            <a:ext cx="10972800" cy="320040"/>
           </a:xfrm>
           <a:prstGeom prst="rect">
             <a:avLst/>
@@ -6598,19 +5574,24 @@
           <a:noFill/>
         </p:spPr>
         <p:txBody>
-          <a:bodyPr wrap="none">
+          <a:bodyPr wrap="square">
             <a:spAutoFit/>
           </a:bodyPr>
           <a:lstStyle/>
           <a:p>
+            <a:pPr>
+              <a:spcAft>
+                <a:spcPts val="800"/>
+              </a:spcAft>
+            </a:pPr>
             <a:r>
               <a:rPr sz="1100" b="0">
                 <a:solidFill>
                   <a:srgbClr val="A8A093"/>
                 </a:solidFill>
-                <a:latin typeface="Calibri"/>
-              </a:rPr>
-              <a:t>ENZO  ·  FRC Crescendo  ·  Team 1577 Steampunk  ·  4/11</a:t>
+                <a:latin typeface="Arial"/>
+              </a:rPr>
+              <a:t>ENZO  ·  Crescendo  ·  Team 1577 Steampunk  ·  4/11</a:t>
             </a:r>
           </a:p>
         </p:txBody>
@@ -6626,6 +5607,14 @@
 <file path=ppt/slides/slide5.xml><?xml version="1.0" encoding="utf-8"?>
 <p:sld xmlns:a="http://schemas.openxmlformats.org/drawingml/2006/main" xmlns:p="http://schemas.openxmlformats.org/presentationml/2006/main" xmlns:r="http://schemas.openxmlformats.org/officeDocument/2006/relationships">
   <p:cSld>
+    <p:bg>
+      <p:bgPr>
+        <a:solidFill>
+          <a:srgbClr val="14161A"/>
+        </a:solidFill>
+        <a:effectLst/>
+      </p:bgPr>
+    </p:bg>
     <p:spTree>
       <p:nvGrpSpPr>
         <p:cNvPr id="1" name=""/>
@@ -6635,93 +5624,7 @@
       <p:grpSpPr/>
       <p:sp>
         <p:nvSpPr>
-          <p:cNvPr id="2" name="Rectangle 1"/>
-          <p:cNvSpPr/>
-          <p:nvPr/>
-        </p:nvSpPr>
-        <p:spPr>
-          <a:xfrm>
-            <a:off x="0" y="0"/>
-            <a:ext cx="12191695" cy="6858000"/>
-          </a:xfrm>
-          <a:prstGeom prst="rect">
-            <a:avLst/>
-          </a:prstGeom>
-          <a:solidFill>
-            <a:srgbClr val="14161A"/>
-          </a:solidFill>
-          <a:ln>
-            <a:noFill/>
-          </a:ln>
-        </p:spPr>
-        <p:style>
-          <a:lnRef idx="1">
-            <a:schemeClr val="accent1"/>
-          </a:lnRef>
-          <a:fillRef idx="3">
-            <a:schemeClr val="accent1"/>
-          </a:fillRef>
-          <a:effectRef idx="2">
-            <a:schemeClr val="accent1"/>
-          </a:effectRef>
-          <a:fontRef idx="minor">
-            <a:schemeClr val="lt1"/>
-          </a:fontRef>
-        </p:style>
-        <p:txBody>
-          <a:bodyPr rtlCol="0" anchor="ctr"/>
-          <a:lstStyle/>
-          <a:p>
-            <a:pPr algn="ctr"/>
-          </a:p>
-        </p:txBody>
-      </p:sp>
-      <p:sp>
-        <p:nvSpPr>
-          <p:cNvPr id="3" name="Rectangle 2"/>
-          <p:cNvSpPr/>
-          <p:nvPr/>
-        </p:nvSpPr>
-        <p:spPr>
-          <a:xfrm>
-            <a:off x="0" y="0"/>
-            <a:ext cx="12191695" cy="73152"/>
-          </a:xfrm>
-          <a:prstGeom prst="rect">
-            <a:avLst/>
-          </a:prstGeom>
-          <a:solidFill>
-            <a:srgbClr val="C4964A"/>
-          </a:solidFill>
-          <a:ln>
-            <a:noFill/>
-          </a:ln>
-        </p:spPr>
-        <p:style>
-          <a:lnRef idx="1">
-            <a:schemeClr val="accent1"/>
-          </a:lnRef>
-          <a:fillRef idx="3">
-            <a:schemeClr val="accent1"/>
-          </a:fillRef>
-          <a:effectRef idx="2">
-            <a:schemeClr val="accent1"/>
-          </a:effectRef>
-          <a:fontRef idx="minor">
-            <a:schemeClr val="lt1"/>
-          </a:fontRef>
-        </p:style>
-        <p:txBody>
-          <a:bodyPr rtlCol="0" anchor="ctr"/>
-          <a:lstStyle/>
-          <a:p>
-            <a:pPr algn="ctr"/>
-          </a:p>
-        </p:txBody>
-      </p:sp>
-      <p:sp>
-        <p:nvSpPr>
-          <p:cNvPr id="4" name="TextBox 3"/>
+          <p:cNvPr id="2" name="TextBox 1"/>
           <p:cNvSpPr txBox="1"/>
           <p:nvPr/>
         </p:nvSpPr>
@@ -6736,33 +5639,38 @@
           <a:noFill/>
         </p:spPr>
         <p:txBody>
-          <a:bodyPr wrap="none">
+          <a:bodyPr wrap="square">
             <a:spAutoFit/>
           </a:bodyPr>
           <a:lstStyle/>
           <a:p>
+            <a:pPr>
+              <a:spcAft>
+                <a:spcPts val="800"/>
+              </a:spcAft>
+            </a:pPr>
             <a:r>
               <a:rPr sz="1300" b="1">
                 <a:solidFill>
                   <a:srgbClr val="C4964A"/>
                 </a:solidFill>
-                <a:latin typeface="Calibri"/>
-              </a:rPr>
-              <a:t>IMPROVING THE ROBOT</a:t>
-            </a:r>
-          </a:p>
-        </p:txBody>
-      </p:sp>
-      <p:sp>
-        <p:nvSpPr>
-          <p:cNvPr id="5" name="TextBox 4"/>
+                <a:latin typeface="Arial"/>
+              </a:rPr>
+              <a:t>MAKING IT BETTER</a:t>
+            </a:r>
+          </a:p>
+        </p:txBody>
+      </p:sp>
+      <p:sp>
+        <p:nvSpPr>
+          <p:cNvPr id="3" name="TextBox 2"/>
           <p:cNvSpPr txBox="1"/>
           <p:nvPr/>
         </p:nvSpPr>
         <p:spPr>
           <a:xfrm>
-            <a:off x="640080" y="777240"/>
-            <a:ext cx="10972800" cy="1097280"/>
+            <a:off x="640080" y="914400"/>
+            <a:ext cx="10972800" cy="1280160"/>
           </a:xfrm>
           <a:prstGeom prst="rect">
             <a:avLst/>
@@ -6775,28 +5683,33 @@
           </a:bodyPr>
           <a:lstStyle/>
           <a:p>
-            <a:r>
-              <a:rPr sz="3400" b="1">
+            <a:pPr>
+              <a:spcAft>
+                <a:spcPts val="800"/>
+              </a:spcAft>
+            </a:pPr>
+            <a:r>
+              <a:rPr sz="3200" b="1">
                 <a:solidFill>
                   <a:srgbClr val="F2EBDF"/>
                 </a:solidFill>
-                <a:latin typeface="Georgia"/>
-              </a:rPr>
-              <a:t>They weren’t afraid to change it</a:t>
-            </a:r>
-          </a:p>
-        </p:txBody>
-      </p:sp>
-      <p:sp>
-        <p:nvSpPr>
-          <p:cNvPr id="6" name="TextBox 5"/>
+                <a:latin typeface="Arial"/>
+              </a:rPr>
+              <a:t>They changed Enzo when they had to</a:t>
+            </a:r>
+          </a:p>
+        </p:txBody>
+      </p:sp>
+      <p:sp>
+        <p:nvSpPr>
+          <p:cNvPr id="4" name="TextBox 3"/>
           <p:cNvSpPr txBox="1"/>
           <p:nvPr/>
         </p:nvSpPr>
         <p:spPr>
           <a:xfrm>
-            <a:off x="640080" y="1874519"/>
-            <a:ext cx="10515600" cy="502920"/>
+            <a:off x="640080" y="2377440"/>
+            <a:ext cx="10789920" cy="3474720"/>
           </a:xfrm>
           <a:prstGeom prst="rect">
             <a:avLst/>
@@ -6809,28 +5722,65 @@
           </a:bodyPr>
           <a:lstStyle/>
           <a:p>
-            <a:r>
-              <a:rPr sz="1600" b="0">
-                <a:solidFill>
-                  <a:srgbClr val="A8A093"/>
-                </a:solidFill>
-                <a:latin typeface="Calibri"/>
-              </a:rPr>
-              <a:t>Midway through the season, the team rebuilt big parts of Enzo.</a:t>
-            </a:r>
-          </a:p>
-        </p:txBody>
-      </p:sp>
-      <p:sp>
-        <p:nvSpPr>
-          <p:cNvPr id="7" name="TextBox 6"/>
+            <a:pPr>
+              <a:spcAft>
+                <a:spcPts val="800"/>
+              </a:spcAft>
+            </a:pPr>
+            <a:r>
+              <a:rPr sz="2000" b="0">
+                <a:solidFill>
+                  <a:srgbClr val="F2EBDF"/>
+                </a:solidFill>
+                <a:latin typeface="Arial"/>
+              </a:rPr>
+              <a:t>In the middle of the season, the team took Enzo apart and built big parts again.</a:t>
+            </a:r>
+          </a:p>
+          <a:p>
+            <a:pPr>
+              <a:spcAft>
+                <a:spcPts val="800"/>
+              </a:spcAft>
+            </a:pPr>
+            <a:r>
+              <a:rPr sz="2000" b="0">
+                <a:solidFill>
+                  <a:srgbClr val="F2EBDF"/>
+                </a:solidFill>
+                <a:latin typeface="Arial"/>
+              </a:rPr>
+              <a:t/>
+            </a:r>
+          </a:p>
+          <a:p>
+            <a:pPr>
+              <a:spcAft>
+                <a:spcPts val="800"/>
+              </a:spcAft>
+            </a:pPr>
+            <a:r>
+              <a:rPr sz="2000" b="0">
+                <a:solidFill>
+                  <a:srgbClr val="F2EBDF"/>
+                </a:solidFill>
+                <a:latin typeface="Arial"/>
+              </a:rPr>
+              <a:t>That’s smart. Good teams don’t stick with a bad first idea. They fix the robot.</a:t>
+            </a:r>
+          </a:p>
+        </p:txBody>
+      </p:sp>
+      <p:sp>
+        <p:nvSpPr>
+          <p:cNvPr id="5" name="TextBox 4"/>
           <p:cNvSpPr txBox="1"/>
           <p:nvPr/>
         </p:nvSpPr>
         <p:spPr>
           <a:xfrm>
-            <a:off x="731520" y="2651760"/>
-            <a:ext cx="10515600" cy="3474720"/>
+            <a:off x="640080" y="6309360"/>
+            <a:ext cx="10972800" cy="320040"/>
           </a:xfrm>
           <a:prstGeom prst="rect">
             <a:avLst/>
@@ -6845,83 +5795,17 @@
           <a:p>
             <a:pPr>
               <a:spcAft>
-                <a:spcPts val="1400"/>
-              </a:spcAft>
-            </a:pPr>
-            <a:r>
-              <a:rPr sz="2000" b="0">
-                <a:solidFill>
-                  <a:srgbClr val="F2EBDF"/>
-                </a:solidFill>
-                <a:latin typeface="Calibri"/>
-              </a:rPr>
-              <a:t>They listened to what wasn’t working and fixed it</a:t>
-            </a:r>
-          </a:p>
-          <a:p>
-            <a:pPr>
-              <a:spcAft>
-                <a:spcPts val="1400"/>
-              </a:spcAft>
-            </a:pPr>
-            <a:r>
-              <a:rPr sz="2000" b="0">
-                <a:solidFill>
-                  <a:srgbClr val="F2EBDF"/>
-                </a:solidFill>
-                <a:latin typeface="Calibri"/>
-              </a:rPr>
-              <a:t>Great engineering means improving — not sticking with a bad first idea</a:t>
-            </a:r>
-          </a:p>
-          <a:p>
-            <a:pPr>
-              <a:spcAft>
-                <a:spcPts val="1400"/>
-              </a:spcAft>
-            </a:pPr>
-            <a:r>
-              <a:rPr sz="2000" b="0">
-                <a:solidFill>
-                  <a:srgbClr val="F2EBDF"/>
-                </a:solidFill>
-                <a:latin typeface="Calibri"/>
-              </a:rPr>
-              <a:t>Enzo got better because the team was willing to change</a:t>
-            </a:r>
-          </a:p>
-        </p:txBody>
-      </p:sp>
-      <p:sp>
-        <p:nvSpPr>
-          <p:cNvPr id="8" name="TextBox 7"/>
-          <p:cNvSpPr txBox="1"/>
-          <p:nvPr/>
-        </p:nvSpPr>
-        <p:spPr>
-          <a:xfrm>
-            <a:off x="548640" y="6446520"/>
-            <a:ext cx="9144000" cy="274320"/>
-          </a:xfrm>
-          <a:prstGeom prst="rect">
-            <a:avLst/>
-          </a:prstGeom>
-          <a:noFill/>
-        </p:spPr>
-        <p:txBody>
-          <a:bodyPr wrap="none">
-            <a:spAutoFit/>
-          </a:bodyPr>
-          <a:lstStyle/>
-          <a:p>
+                <a:spcPts val="800"/>
+              </a:spcAft>
+            </a:pPr>
             <a:r>
               <a:rPr sz="1100" b="0">
                 <a:solidFill>
                   <a:srgbClr val="A8A093"/>
                 </a:solidFill>
-                <a:latin typeface="Calibri"/>
-              </a:rPr>
-              <a:t>ENZO  ·  FRC Crescendo  ·  Team 1577 Steampunk  ·  5/11</a:t>
+                <a:latin typeface="Arial"/>
+              </a:rPr>
+              <a:t>ENZO  ·  Crescendo  ·  Team 1577 Steampunk  ·  5/11</a:t>
             </a:r>
           </a:p>
         </p:txBody>
@@ -6937,6 +5821,14 @@
 <file path=ppt/slides/slide6.xml><?xml version="1.0" encoding="utf-8"?>
 <p:sld xmlns:a="http://schemas.openxmlformats.org/drawingml/2006/main" xmlns:p="http://schemas.openxmlformats.org/presentationml/2006/main" xmlns:r="http://schemas.openxmlformats.org/officeDocument/2006/relationships">
   <p:cSld>
+    <p:bg>
+      <p:bgPr>
+        <a:solidFill>
+          <a:srgbClr val="14161A"/>
+        </a:solidFill>
+        <a:effectLst/>
+      </p:bgPr>
+    </p:bg>
     <p:spTree>
       <p:nvGrpSpPr>
         <p:cNvPr id="1" name=""/>
@@ -6946,93 +5838,7 @@
       <p:grpSpPr/>
       <p:sp>
         <p:nvSpPr>
-          <p:cNvPr id="2" name="Rectangle 1"/>
-          <p:cNvSpPr/>
-          <p:nvPr/>
-        </p:nvSpPr>
-        <p:spPr>
-          <a:xfrm>
-            <a:off x="0" y="0"/>
-            <a:ext cx="12191695" cy="6858000"/>
-          </a:xfrm>
-          <a:prstGeom prst="rect">
-            <a:avLst/>
-          </a:prstGeom>
-          <a:solidFill>
-            <a:srgbClr val="14161A"/>
-          </a:solidFill>
-          <a:ln>
-            <a:noFill/>
-          </a:ln>
-        </p:spPr>
-        <p:style>
-          <a:lnRef idx="1">
-            <a:schemeClr val="accent1"/>
-          </a:lnRef>
-          <a:fillRef idx="3">
-            <a:schemeClr val="accent1"/>
-          </a:fillRef>
-          <a:effectRef idx="2">
-            <a:schemeClr val="accent1"/>
-          </a:effectRef>
-          <a:fontRef idx="minor">
-            <a:schemeClr val="lt1"/>
-          </a:fontRef>
-        </p:style>
-        <p:txBody>
-          <a:bodyPr rtlCol="0" anchor="ctr"/>
-          <a:lstStyle/>
-          <a:p>
-            <a:pPr algn="ctr"/>
-          </a:p>
-        </p:txBody>
-      </p:sp>
-      <p:sp>
-        <p:nvSpPr>
-          <p:cNvPr id="3" name="Rectangle 2"/>
-          <p:cNvSpPr/>
-          <p:nvPr/>
-        </p:nvSpPr>
-        <p:spPr>
-          <a:xfrm>
-            <a:off x="0" y="0"/>
-            <a:ext cx="12191695" cy="73152"/>
-          </a:xfrm>
-          <a:prstGeom prst="rect">
-            <a:avLst/>
-          </a:prstGeom>
-          <a:solidFill>
-            <a:srgbClr val="C4964A"/>
-          </a:solidFill>
-          <a:ln>
-            <a:noFill/>
-          </a:ln>
-        </p:spPr>
-        <p:style>
-          <a:lnRef idx="1">
-            <a:schemeClr val="accent1"/>
-          </a:lnRef>
-          <a:fillRef idx="3">
-            <a:schemeClr val="accent1"/>
-          </a:fillRef>
-          <a:effectRef idx="2">
-            <a:schemeClr val="accent1"/>
-          </a:effectRef>
-          <a:fontRef idx="minor">
-            <a:schemeClr val="lt1"/>
-          </a:fontRef>
-        </p:style>
-        <p:txBody>
-          <a:bodyPr rtlCol="0" anchor="ctr"/>
-          <a:lstStyle/>
-          <a:p>
-            <a:pPr algn="ctr"/>
-          </a:p>
-        </p:txBody>
-      </p:sp>
-      <p:sp>
-        <p:nvSpPr>
-          <p:cNvPr id="4" name="TextBox 3"/>
+          <p:cNvPr id="2" name="TextBox 1"/>
           <p:cNvSpPr txBox="1"/>
           <p:nvPr/>
         </p:nvSpPr>
@@ -7047,33 +5853,38 @@
           <a:noFill/>
         </p:spPr>
         <p:txBody>
-          <a:bodyPr wrap="none">
+          <a:bodyPr wrap="square">
             <a:spAutoFit/>
           </a:bodyPr>
           <a:lstStyle/>
           <a:p>
+            <a:pPr>
+              <a:spcAft>
+                <a:spcPts val="800"/>
+              </a:spcAft>
+            </a:pPr>
             <a:r>
               <a:rPr sz="1300" b="1">
                 <a:solidFill>
                   <a:srgbClr val="C4964A"/>
                 </a:solidFill>
-                <a:latin typeface="Calibri"/>
-              </a:rPr>
-              <a:t>PICKING UP GAME PIECES</a:t>
-            </a:r>
-          </a:p>
-        </p:txBody>
-      </p:sp>
-      <p:sp>
-        <p:nvSpPr>
-          <p:cNvPr id="5" name="TextBox 4"/>
+                <a:latin typeface="Arial"/>
+              </a:rPr>
+              <a:t>PICKING UP NOTES</a:t>
+            </a:r>
+          </a:p>
+        </p:txBody>
+      </p:sp>
+      <p:sp>
+        <p:nvSpPr>
+          <p:cNvPr id="3" name="TextBox 2"/>
           <p:cNvSpPr txBox="1"/>
           <p:nvPr/>
         </p:nvSpPr>
         <p:spPr>
           <a:xfrm>
-            <a:off x="640080" y="777240"/>
-            <a:ext cx="10972800" cy="1097280"/>
+            <a:off x="640080" y="914400"/>
+            <a:ext cx="10972800" cy="1280160"/>
           </a:xfrm>
           <a:prstGeom prst="rect">
             <a:avLst/>
@@ -7086,75 +5897,33 @@
           </a:bodyPr>
           <a:lstStyle/>
           <a:p>
-            <a:r>
-              <a:rPr sz="3400" b="1">
+            <a:pPr>
+              <a:spcAft>
+                <a:spcPts val="800"/>
+              </a:spcAft>
+            </a:pPr>
+            <a:r>
+              <a:rPr sz="3200" b="1">
                 <a:solidFill>
                   <a:srgbClr val="F2EBDF"/>
                 </a:solidFill>
-                <a:latin typeface="Georgia"/>
-              </a:rPr>
-              <a:t>If you can’t grab Notes, you can’t score</a:t>
-            </a:r>
-          </a:p>
-        </p:txBody>
-      </p:sp>
-      <p:sp>
-        <p:nvSpPr>
-          <p:cNvPr id="6" name="Rounded Rectangle 5"/>
-          <p:cNvSpPr/>
+                <a:latin typeface="Arial"/>
+              </a:rPr>
+              <a:t>No Notes = no points</a:t>
+            </a:r>
+          </a:p>
+        </p:txBody>
+      </p:sp>
+      <p:sp>
+        <p:nvSpPr>
+          <p:cNvPr id="4" name="TextBox 3"/>
+          <p:cNvSpPr txBox="1"/>
           <p:nvPr/>
         </p:nvSpPr>
         <p:spPr>
           <a:xfrm>
-            <a:off x="640080" y="2468880"/>
-            <a:ext cx="5394960" cy="3200400"/>
-          </a:xfrm>
-          <a:prstGeom prst="roundRect">
-            <a:avLst>
-              <a:gd name="adj" fmla="val 8000"/>
-            </a:avLst>
-          </a:prstGeom>
-          <a:solidFill>
-            <a:srgbClr val="1E2228"/>
-          </a:solidFill>
-          <a:ln w="12700">
-            <a:solidFill>
-              <a:srgbClr val="3A342C"/>
-            </a:solidFill>
-          </a:ln>
-        </p:spPr>
-        <p:style>
-          <a:lnRef idx="1">
-            <a:schemeClr val="accent1"/>
-          </a:lnRef>
-          <a:fillRef idx="3">
-            <a:schemeClr val="accent1"/>
-          </a:fillRef>
-          <a:effectRef idx="2">
-            <a:schemeClr val="accent1"/>
-          </a:effectRef>
-          <a:fontRef idx="minor">
-            <a:schemeClr val="lt1"/>
-          </a:fontRef>
-        </p:style>
-        <p:txBody>
-          <a:bodyPr rtlCol="0" anchor="ctr"/>
-          <a:lstStyle/>
-          <a:p>
-            <a:pPr algn="ctr"/>
-          </a:p>
-        </p:txBody>
-      </p:sp>
-      <p:sp>
-        <p:nvSpPr>
-          <p:cNvPr id="7" name="TextBox 6"/>
-          <p:cNvSpPr txBox="1"/>
-          <p:nvPr/>
-        </p:nvSpPr>
-        <p:spPr>
-          <a:xfrm>
-            <a:off x="868680" y="2697480"/>
-            <a:ext cx="4937760" cy="411480"/>
+            <a:off x="640080" y="2377440"/>
+            <a:ext cx="10789920" cy="3474720"/>
           </a:xfrm>
           <a:prstGeom prst="rect">
             <a:avLst/>
@@ -7162,33 +5931,102 @@
           <a:noFill/>
         </p:spPr>
         <p:txBody>
-          <a:bodyPr wrap="none">
+          <a:bodyPr wrap="square">
             <a:spAutoFit/>
           </a:bodyPr>
           <a:lstStyle/>
           <a:p>
-            <a:r>
-              <a:rPr sz="1800" b="1">
-                <a:solidFill>
-                  <a:srgbClr val="C4964A"/>
-                </a:solidFill>
-                <a:latin typeface="Georgia"/>
-              </a:rPr>
-              <a:t>Simple idea</a:t>
-            </a:r>
-          </a:p>
-        </p:txBody>
-      </p:sp>
-      <p:sp>
-        <p:nvSpPr>
-          <p:cNvPr id="8" name="TextBox 7"/>
+            <a:pPr>
+              <a:spcAft>
+                <a:spcPts val="800"/>
+              </a:spcAft>
+            </a:pPr>
+            <a:r>
+              <a:rPr sz="2000" b="0">
+                <a:solidFill>
+                  <a:srgbClr val="F2EBDF"/>
+                </a:solidFill>
+                <a:latin typeface="Arial"/>
+              </a:rPr>
+              <a:t>Enzo is built to grab Notes quickly and hold onto them.</a:t>
+            </a:r>
+          </a:p>
+          <a:p>
+            <a:pPr>
+              <a:spcAft>
+                <a:spcPts val="800"/>
+              </a:spcAft>
+            </a:pPr>
+            <a:r>
+              <a:rPr sz="2000" b="0">
+                <a:solidFill>
+                  <a:srgbClr val="F2EBDF"/>
+                </a:solidFill>
+                <a:latin typeface="Arial"/>
+              </a:rPr>
+              <a:t/>
+            </a:r>
+          </a:p>
+          <a:p>
+            <a:pPr>
+              <a:spcAft>
+                <a:spcPts val="800"/>
+              </a:spcAft>
+            </a:pPr>
+            <a:r>
+              <a:rPr sz="2000" b="0">
+                <a:solidFill>
+                  <a:srgbClr val="F2EBDF"/>
+                </a:solidFill>
+                <a:latin typeface="Arial"/>
+              </a:rPr>
+              <a:t>In this game, having the Notes is like having the basketball.</a:t>
+            </a:r>
+          </a:p>
+          <a:p>
+            <a:pPr>
+              <a:spcAft>
+                <a:spcPts val="800"/>
+              </a:spcAft>
+            </a:pPr>
+            <a:r>
+              <a:rPr sz="2000" b="0">
+                <a:solidFill>
+                  <a:srgbClr val="F2EBDF"/>
+                </a:solidFill>
+                <a:latin typeface="Arial"/>
+              </a:rPr>
+              <a:t/>
+            </a:r>
+          </a:p>
+          <a:p>
+            <a:pPr>
+              <a:spcAft>
+                <a:spcPts val="800"/>
+              </a:spcAft>
+            </a:pPr>
+            <a:r>
+              <a:rPr sz="2000" b="0">
+                <a:solidFill>
+                  <a:srgbClr val="F2EBDF"/>
+                </a:solidFill>
+                <a:latin typeface="Arial"/>
+              </a:rPr>
+              <a:t>Enzo was made to win that fight.</a:t>
+            </a:r>
+          </a:p>
+        </p:txBody>
+      </p:sp>
+      <p:sp>
+        <p:nvSpPr>
+          <p:cNvPr id="5" name="TextBox 4"/>
           <p:cNvSpPr txBox="1"/>
           <p:nvPr/>
         </p:nvSpPr>
         <p:spPr>
           <a:xfrm>
-            <a:off x="868680" y="3246120"/>
-            <a:ext cx="4937760" cy="2148840"/>
+            <a:off x="640080" y="6309360"/>
+            <a:ext cx="10972800" cy="320040"/>
           </a:xfrm>
           <a:prstGeom prst="rect">
             <a:avLst/>
@@ -7201,163 +6039,19 @@
           </a:bodyPr>
           <a:lstStyle/>
           <a:p>
-            <a:r>
-              <a:rPr sz="1500" b="0">
-                <a:solidFill>
-                  <a:srgbClr val="F2EBDF"/>
-                </a:solidFill>
-                <a:latin typeface="Calibri"/>
-              </a:rPr>
-              <a:t>Enzo is built around getting Notes fast and keeping them under control.</a:t>
-            </a:r>
-          </a:p>
-        </p:txBody>
-      </p:sp>
-      <p:sp>
-        <p:nvSpPr>
-          <p:cNvPr id="9" name="Rounded Rectangle 8"/>
-          <p:cNvSpPr/>
-          <p:nvPr/>
-        </p:nvSpPr>
-        <p:spPr>
-          <a:xfrm>
-            <a:off x="6309360" y="2468880"/>
-            <a:ext cx="5212080" cy="3200400"/>
-          </a:xfrm>
-          <a:prstGeom prst="roundRect">
-            <a:avLst>
-              <a:gd name="adj" fmla="val 8000"/>
-            </a:avLst>
-          </a:prstGeom>
-          <a:solidFill>
-            <a:srgbClr val="1E2228"/>
-          </a:solidFill>
-          <a:ln w="12700">
-            <a:solidFill>
-              <a:srgbClr val="3A342C"/>
-            </a:solidFill>
-          </a:ln>
-        </p:spPr>
-        <p:style>
-          <a:lnRef idx="1">
-            <a:schemeClr val="accent1"/>
-          </a:lnRef>
-          <a:fillRef idx="3">
-            <a:schemeClr val="accent1"/>
-          </a:fillRef>
-          <a:effectRef idx="2">
-            <a:schemeClr val="accent1"/>
-          </a:effectRef>
-          <a:fontRef idx="minor">
-            <a:schemeClr val="lt1"/>
-          </a:fontRef>
-        </p:style>
-        <p:txBody>
-          <a:bodyPr rtlCol="0" anchor="ctr"/>
-          <a:lstStyle/>
-          <a:p>
-            <a:pPr algn="ctr"/>
-          </a:p>
-        </p:txBody>
-      </p:sp>
-      <p:sp>
-        <p:nvSpPr>
-          <p:cNvPr id="10" name="TextBox 9"/>
-          <p:cNvSpPr txBox="1"/>
-          <p:nvPr/>
-        </p:nvSpPr>
-        <p:spPr>
-          <a:xfrm>
-            <a:off x="6537960" y="2697480"/>
-            <a:ext cx="4754880" cy="411480"/>
-          </a:xfrm>
-          <a:prstGeom prst="rect">
-            <a:avLst/>
-          </a:prstGeom>
-          <a:noFill/>
-        </p:spPr>
-        <p:txBody>
-          <a:bodyPr wrap="none">
-            <a:spAutoFit/>
-          </a:bodyPr>
-          <a:lstStyle/>
-          <a:p>
-            <a:r>
-              <a:rPr sz="1800" b="1">
-                <a:solidFill>
-                  <a:srgbClr val="C4964A"/>
-                </a:solidFill>
-                <a:latin typeface="Georgia"/>
-              </a:rPr>
-              <a:t>Sports comparison</a:t>
-            </a:r>
-          </a:p>
-        </p:txBody>
-      </p:sp>
-      <p:sp>
-        <p:nvSpPr>
-          <p:cNvPr id="11" name="TextBox 10"/>
-          <p:cNvSpPr txBox="1"/>
-          <p:nvPr/>
-        </p:nvSpPr>
-        <p:spPr>
-          <a:xfrm>
-            <a:off x="6537960" y="3246120"/>
-            <a:ext cx="4754880" cy="2148840"/>
-          </a:xfrm>
-          <a:prstGeom prst="rect">
-            <a:avLst/>
-          </a:prstGeom>
-          <a:noFill/>
-        </p:spPr>
-        <p:txBody>
-          <a:bodyPr wrap="square">
-            <a:spAutoFit/>
-          </a:bodyPr>
-          <a:lstStyle/>
-          <a:p>
-            <a:r>
-              <a:rPr sz="1500" b="0">
-                <a:solidFill>
-                  <a:srgbClr val="F2EBDF"/>
-                </a:solidFill>
-                <a:latin typeface="Calibri"/>
-              </a:rPr>
-              <a:t>Owning the Notes is like owning the basketball. Enzo was made to take that job seriously.</a:t>
-            </a:r>
-          </a:p>
-        </p:txBody>
-      </p:sp>
-      <p:sp>
-        <p:nvSpPr>
-          <p:cNvPr id="12" name="TextBox 11"/>
-          <p:cNvSpPr txBox="1"/>
-          <p:nvPr/>
-        </p:nvSpPr>
-        <p:spPr>
-          <a:xfrm>
-            <a:off x="548640" y="6446520"/>
-            <a:ext cx="9144000" cy="274320"/>
-          </a:xfrm>
-          <a:prstGeom prst="rect">
-            <a:avLst/>
-          </a:prstGeom>
-          <a:noFill/>
-        </p:spPr>
-        <p:txBody>
-          <a:bodyPr wrap="none">
-            <a:spAutoFit/>
-          </a:bodyPr>
-          <a:lstStyle/>
-          <a:p>
+            <a:pPr>
+              <a:spcAft>
+                <a:spcPts val="800"/>
+              </a:spcAft>
+            </a:pPr>
             <a:r>
               <a:rPr sz="1100" b="0">
                 <a:solidFill>
                   <a:srgbClr val="A8A093"/>
                 </a:solidFill>
-                <a:latin typeface="Calibri"/>
-              </a:rPr>
-              <a:t>ENZO  ·  FRC Crescendo  ·  Team 1577 Steampunk  ·  6/11</a:t>
+                <a:latin typeface="Arial"/>
+              </a:rPr>
+              <a:t>ENZO  ·  Crescendo  ·  Team 1577 Steampunk  ·  6/11</a:t>
             </a:r>
           </a:p>
         </p:txBody>
@@ -7373,6 +6067,14 @@
 <file path=ppt/slides/slide7.xml><?xml version="1.0" encoding="utf-8"?>
 <p:sld xmlns:a="http://schemas.openxmlformats.org/drawingml/2006/main" xmlns:p="http://schemas.openxmlformats.org/presentationml/2006/main" xmlns:r="http://schemas.openxmlformats.org/officeDocument/2006/relationships">
   <p:cSld>
+    <p:bg>
+      <p:bgPr>
+        <a:solidFill>
+          <a:srgbClr val="14161A"/>
+        </a:solidFill>
+        <a:effectLst/>
+      </p:bgPr>
+    </p:bg>
     <p:spTree>
       <p:nvGrpSpPr>
         <p:cNvPr id="1" name=""/>
@@ -7382,93 +6084,7 @@
       <p:grpSpPr/>
       <p:sp>
         <p:nvSpPr>
-          <p:cNvPr id="2" name="Rectangle 1"/>
-          <p:cNvSpPr/>
-          <p:nvPr/>
-        </p:nvSpPr>
-        <p:spPr>
-          <a:xfrm>
-            <a:off x="0" y="0"/>
-            <a:ext cx="12191695" cy="6858000"/>
-          </a:xfrm>
-          <a:prstGeom prst="rect">
-            <a:avLst/>
-          </a:prstGeom>
-          <a:solidFill>
-            <a:srgbClr val="14161A"/>
-          </a:solidFill>
-          <a:ln>
-            <a:noFill/>
-          </a:ln>
-        </p:spPr>
-        <p:style>
-          <a:lnRef idx="1">
-            <a:schemeClr val="accent1"/>
-          </a:lnRef>
-          <a:fillRef idx="3">
-            <a:schemeClr val="accent1"/>
-          </a:fillRef>
-          <a:effectRef idx="2">
-            <a:schemeClr val="accent1"/>
-          </a:effectRef>
-          <a:fontRef idx="minor">
-            <a:schemeClr val="lt1"/>
-          </a:fontRef>
-        </p:style>
-        <p:txBody>
-          <a:bodyPr rtlCol="0" anchor="ctr"/>
-          <a:lstStyle/>
-          <a:p>
-            <a:pPr algn="ctr"/>
-          </a:p>
-        </p:txBody>
-      </p:sp>
-      <p:sp>
-        <p:nvSpPr>
-          <p:cNvPr id="3" name="Rectangle 2"/>
-          <p:cNvSpPr/>
-          <p:nvPr/>
-        </p:nvSpPr>
-        <p:spPr>
-          <a:xfrm>
-            <a:off x="0" y="0"/>
-            <a:ext cx="12191695" cy="73152"/>
-          </a:xfrm>
-          <a:prstGeom prst="rect">
-            <a:avLst/>
-          </a:prstGeom>
-          <a:solidFill>
-            <a:srgbClr val="C4964A"/>
-          </a:solidFill>
-          <a:ln>
-            <a:noFill/>
-          </a:ln>
-        </p:spPr>
-        <p:style>
-          <a:lnRef idx="1">
-            <a:schemeClr val="accent1"/>
-          </a:lnRef>
-          <a:fillRef idx="3">
-            <a:schemeClr val="accent1"/>
-          </a:fillRef>
-          <a:effectRef idx="2">
-            <a:schemeClr val="accent1"/>
-          </a:effectRef>
-          <a:fontRef idx="minor">
-            <a:schemeClr val="lt1"/>
-          </a:fontRef>
-        </p:style>
-        <p:txBody>
-          <a:bodyPr rtlCol="0" anchor="ctr"/>
-          <a:lstStyle/>
-          <a:p>
-            <a:pPr algn="ctr"/>
-          </a:p>
-        </p:txBody>
-      </p:sp>
-      <p:sp>
-        <p:nvSpPr>
-          <p:cNvPr id="4" name="TextBox 3"/>
+          <p:cNvPr id="2" name="TextBox 1"/>
           <p:cNvSpPr txBox="1"/>
           <p:nvPr/>
         </p:nvSpPr>
@@ -7483,33 +6099,38 @@
           <a:noFill/>
         </p:spPr>
         <p:txBody>
-          <a:bodyPr wrap="none">
+          <a:bodyPr wrap="square">
             <a:spAutoFit/>
           </a:bodyPr>
           <a:lstStyle/>
           <a:p>
+            <a:pPr>
+              <a:spcAft>
+                <a:spcPts val="800"/>
+              </a:spcAft>
+            </a:pPr>
             <a:r>
               <a:rPr sz="1300" b="1">
                 <a:solidFill>
                   <a:srgbClr val="C4964A"/>
                 </a:solidFill>
-                <a:latin typeface="Calibri"/>
-              </a:rPr>
-              <a:t>SCORING</a:t>
-            </a:r>
-          </a:p>
-        </p:txBody>
-      </p:sp>
-      <p:sp>
-        <p:nvSpPr>
-          <p:cNvPr id="5" name="TextBox 4"/>
+                <a:latin typeface="Arial"/>
+              </a:rPr>
+              <a:t>SCORING POINTS</a:t>
+            </a:r>
+          </a:p>
+        </p:txBody>
+      </p:sp>
+      <p:sp>
+        <p:nvSpPr>
+          <p:cNvPr id="3" name="TextBox 2"/>
           <p:cNvSpPr txBox="1"/>
           <p:nvPr/>
         </p:nvSpPr>
         <p:spPr>
           <a:xfrm>
-            <a:off x="640080" y="777240"/>
-            <a:ext cx="10972800" cy="1097280"/>
+            <a:off x="640080" y="914400"/>
+            <a:ext cx="10972800" cy="1280160"/>
           </a:xfrm>
           <a:prstGeom prst="rect">
             <a:avLst/>
@@ -7522,28 +6143,33 @@
           </a:bodyPr>
           <a:lstStyle/>
           <a:p>
-            <a:r>
-              <a:rPr sz="3400" b="1">
+            <a:pPr>
+              <a:spcAft>
+                <a:spcPts val="800"/>
+              </a:spcAft>
+            </a:pPr>
+            <a:r>
+              <a:rPr sz="3200" b="1">
                 <a:solidFill>
                   <a:srgbClr val="F2EBDF"/>
                 </a:solidFill>
-                <a:latin typeface="Georgia"/>
-              </a:rPr>
-              <a:t>Two ways to score, one robot</a:t>
-            </a:r>
-          </a:p>
-        </p:txBody>
-      </p:sp>
-      <p:sp>
-        <p:nvSpPr>
-          <p:cNvPr id="6" name="TextBox 5"/>
+                <a:latin typeface="Arial"/>
+              </a:rPr>
+              <a:t>Two ways to score</a:t>
+            </a:r>
+          </a:p>
+        </p:txBody>
+      </p:sp>
+      <p:sp>
+        <p:nvSpPr>
+          <p:cNvPr id="4" name="TextBox 3"/>
           <p:cNvSpPr txBox="1"/>
           <p:nvPr/>
         </p:nvSpPr>
         <p:spPr>
           <a:xfrm>
-            <a:off x="731520" y="2468880"/>
-            <a:ext cx="10515600" cy="3474720"/>
+            <a:off x="640080" y="2377440"/>
+            <a:ext cx="10789920" cy="3474720"/>
           </a:xfrm>
           <a:prstGeom prst="rect">
             <a:avLst/>
@@ -7558,7 +6184,7 @@
           <a:p>
             <a:pPr>
               <a:spcAft>
-                <a:spcPts val="1400"/>
+                <a:spcPts val="800"/>
               </a:spcAft>
             </a:pPr>
             <a:r>
@@ -7566,15 +6192,15 @@
                 <a:solidFill>
                   <a:srgbClr val="F2EBDF"/>
                 </a:solidFill>
-                <a:latin typeface="Calibri"/>
-              </a:rPr>
-              <a:t>It can shoot into the Speaker for regular scoring</a:t>
-            </a:r>
-          </a:p>
-          <a:p>
-            <a:pPr>
-              <a:spcAft>
-                <a:spcPts val="1400"/>
+                <a:latin typeface="Arial"/>
+              </a:rPr>
+              <a:t>• Shoot into the Speaker</a:t>
+            </a:r>
+          </a:p>
+          <a:p>
+            <a:pPr>
+              <a:spcAft>
+                <a:spcPts val="800"/>
               </a:spcAft>
             </a:pPr>
             <a:r>
@@ -7582,15 +6208,15 @@
                 <a:solidFill>
                   <a:srgbClr val="F2EBDF"/>
                 </a:solidFill>
-                <a:latin typeface="Calibri"/>
-              </a:rPr>
-              <a:t>It can also score in the Amp to help its alliance</a:t>
-            </a:r>
-          </a:p>
-          <a:p>
-            <a:pPr>
-              <a:spcAft>
-                <a:spcPts val="1400"/>
+                <a:latin typeface="Arial"/>
+              </a:rPr>
+              <a:t>• Score in the Amp to help its partners</a:t>
+            </a:r>
+          </a:p>
+          <a:p>
+            <a:pPr>
+              <a:spcAft>
+                <a:spcPts val="800"/>
               </a:spcAft>
             </a:pPr>
             <a:r>
@@ -7598,15 +6224,15 @@
                 <a:solidFill>
                   <a:srgbClr val="F2EBDF"/>
                 </a:solidFill>
-                <a:latin typeface="Calibri"/>
-              </a:rPr>
-              <a:t>Drivers can pick the better option when the field is crowded</a:t>
-            </a:r>
-          </a:p>
-          <a:p>
-            <a:pPr>
-              <a:spcAft>
-                <a:spcPts val="1400"/>
+                <a:latin typeface="Arial"/>
+              </a:rPr>
+              <a:t>• Drivers can choose the better option when it’s crowded</a:t>
+            </a:r>
+          </a:p>
+          <a:p>
+            <a:pPr>
+              <a:spcAft>
+                <a:spcPts val="800"/>
               </a:spcAft>
             </a:pPr>
             <a:r>
@@ -7614,23 +6240,23 @@
                 <a:solidFill>
                   <a:srgbClr val="F2EBDF"/>
                 </a:solidFill>
-                <a:latin typeface="Calibri"/>
-              </a:rPr>
-              <a:t>Being flexible is better than only being good at one thing</a:t>
-            </a:r>
-          </a:p>
-        </p:txBody>
-      </p:sp>
-      <p:sp>
-        <p:nvSpPr>
-          <p:cNvPr id="7" name="TextBox 6"/>
+                <a:latin typeface="Arial"/>
+              </a:rPr>
+              <a:t>• Doing both jobs is better than only doing one</a:t>
+            </a:r>
+          </a:p>
+        </p:txBody>
+      </p:sp>
+      <p:sp>
+        <p:nvSpPr>
+          <p:cNvPr id="5" name="TextBox 4"/>
           <p:cNvSpPr txBox="1"/>
           <p:nvPr/>
         </p:nvSpPr>
         <p:spPr>
           <a:xfrm>
-            <a:off x="548640" y="6446520"/>
-            <a:ext cx="9144000" cy="274320"/>
+            <a:off x="640080" y="6309360"/>
+            <a:ext cx="10972800" cy="320040"/>
           </a:xfrm>
           <a:prstGeom prst="rect">
             <a:avLst/>
@@ -7638,19 +6264,24 @@
           <a:noFill/>
         </p:spPr>
         <p:txBody>
-          <a:bodyPr wrap="none">
+          <a:bodyPr wrap="square">
             <a:spAutoFit/>
           </a:bodyPr>
           <a:lstStyle/>
           <a:p>
+            <a:pPr>
+              <a:spcAft>
+                <a:spcPts val="800"/>
+              </a:spcAft>
+            </a:pPr>
             <a:r>
               <a:rPr sz="1100" b="0">
                 <a:solidFill>
                   <a:srgbClr val="A8A093"/>
                 </a:solidFill>
-                <a:latin typeface="Calibri"/>
-              </a:rPr>
-              <a:t>ENZO  ·  FRC Crescendo  ·  Team 1577 Steampunk  ·  7/11</a:t>
+                <a:latin typeface="Arial"/>
+              </a:rPr>
+              <a:t>ENZO  ·  Crescendo  ·  Team 1577 Steampunk  ·  7/11</a:t>
             </a:r>
           </a:p>
         </p:txBody>
@@ -7666,6 +6297,14 @@
 <file path=ppt/slides/slide8.xml><?xml version="1.0" encoding="utf-8"?>
 <p:sld xmlns:a="http://schemas.openxmlformats.org/drawingml/2006/main" xmlns:p="http://schemas.openxmlformats.org/presentationml/2006/main" xmlns:r="http://schemas.openxmlformats.org/officeDocument/2006/relationships">
   <p:cSld>
+    <p:bg>
+      <p:bgPr>
+        <a:solidFill>
+          <a:srgbClr val="14161A"/>
+        </a:solidFill>
+        <a:effectLst/>
+      </p:bgPr>
+    </p:bg>
     <p:spTree>
       <p:nvGrpSpPr>
         <p:cNvPr id="1" name=""/>
@@ -7675,93 +6314,7 @@
       <p:grpSpPr/>
       <p:sp>
         <p:nvSpPr>
-          <p:cNvPr id="2" name="Rectangle 1"/>
-          <p:cNvSpPr/>
-          <p:nvPr/>
-        </p:nvSpPr>
-        <p:spPr>
-          <a:xfrm>
-            <a:off x="0" y="0"/>
-            <a:ext cx="12191695" cy="6858000"/>
-          </a:xfrm>
-          <a:prstGeom prst="rect">
-            <a:avLst/>
-          </a:prstGeom>
-          <a:solidFill>
-            <a:srgbClr val="14161A"/>
-          </a:solidFill>
-          <a:ln>
-            <a:noFill/>
-          </a:ln>
-        </p:spPr>
-        <p:style>
-          <a:lnRef idx="1">
-            <a:schemeClr val="accent1"/>
-          </a:lnRef>
-          <a:fillRef idx="3">
-            <a:schemeClr val="accent1"/>
-          </a:fillRef>
-          <a:effectRef idx="2">
-            <a:schemeClr val="accent1"/>
-          </a:effectRef>
-          <a:fontRef idx="minor">
-            <a:schemeClr val="lt1"/>
-          </a:fontRef>
-        </p:style>
-        <p:txBody>
-          <a:bodyPr rtlCol="0" anchor="ctr"/>
-          <a:lstStyle/>
-          <a:p>
-            <a:pPr algn="ctr"/>
-          </a:p>
-        </p:txBody>
-      </p:sp>
-      <p:sp>
-        <p:nvSpPr>
-          <p:cNvPr id="3" name="Rectangle 2"/>
-          <p:cNvSpPr/>
-          <p:nvPr/>
-        </p:nvSpPr>
-        <p:spPr>
-          <a:xfrm>
-            <a:off x="0" y="0"/>
-            <a:ext cx="12191695" cy="73152"/>
-          </a:xfrm>
-          <a:prstGeom prst="rect">
-            <a:avLst/>
-          </a:prstGeom>
-          <a:solidFill>
-            <a:srgbClr val="C4964A"/>
-          </a:solidFill>
-          <a:ln>
-            <a:noFill/>
-          </a:ln>
-        </p:spPr>
-        <p:style>
-          <a:lnRef idx="1">
-            <a:schemeClr val="accent1"/>
-          </a:lnRef>
-          <a:fillRef idx="3">
-            <a:schemeClr val="accent1"/>
-          </a:fillRef>
-          <a:effectRef idx="2">
-            <a:schemeClr val="accent1"/>
-          </a:effectRef>
-          <a:fontRef idx="minor">
-            <a:schemeClr val="lt1"/>
-          </a:fontRef>
-        </p:style>
-        <p:txBody>
-          <a:bodyPr rtlCol="0" anchor="ctr"/>
-          <a:lstStyle/>
-          <a:p>
-            <a:pPr algn="ctr"/>
-          </a:p>
-        </p:txBody>
-      </p:sp>
-      <p:sp>
-        <p:nvSpPr>
-          <p:cNvPr id="4" name="TextBox 3"/>
+          <p:cNvPr id="2" name="TextBox 1"/>
           <p:cNvSpPr txBox="1"/>
           <p:nvPr/>
         </p:nvSpPr>
@@ -7776,33 +6329,38 @@
           <a:noFill/>
         </p:spPr>
         <p:txBody>
-          <a:bodyPr wrap="none">
+          <a:bodyPr wrap="square">
             <a:spAutoFit/>
           </a:bodyPr>
           <a:lstStyle/>
           <a:p>
+            <a:pPr>
+              <a:spcAft>
+                <a:spcPts val="800"/>
+              </a:spcAft>
+            </a:pPr>
             <a:r>
               <a:rPr sz="1300" b="1">
                 <a:solidFill>
                   <a:srgbClr val="C4964A"/>
                 </a:solidFill>
-                <a:latin typeface="Calibri"/>
-              </a:rPr>
-              <a:t>THE END OF THE MATCH</a:t>
-            </a:r>
-          </a:p>
-        </p:txBody>
-      </p:sp>
-      <p:sp>
-        <p:nvSpPr>
-          <p:cNvPr id="5" name="TextBox 4"/>
+                <a:latin typeface="Arial"/>
+              </a:rPr>
+              <a:t>END OF THE MATCH</a:t>
+            </a:r>
+          </a:p>
+        </p:txBody>
+      </p:sp>
+      <p:sp>
+        <p:nvSpPr>
+          <p:cNvPr id="3" name="TextBox 2"/>
           <p:cNvSpPr txBox="1"/>
           <p:nvPr/>
         </p:nvSpPr>
         <p:spPr>
           <a:xfrm>
-            <a:off x="640080" y="777240"/>
-            <a:ext cx="10972800" cy="1097280"/>
+            <a:off x="640080" y="914400"/>
+            <a:ext cx="10972800" cy="1280160"/>
           </a:xfrm>
           <a:prstGeom prst="rect">
             <a:avLst/>
@@ -7815,75 +6373,33 @@
           </a:bodyPr>
           <a:lstStyle/>
           <a:p>
-            <a:r>
-              <a:rPr sz="3400" b="1">
+            <a:pPr>
+              <a:spcAft>
+                <a:spcPts val="800"/>
+              </a:spcAft>
+            </a:pPr>
+            <a:r>
+              <a:rPr sz="3200" b="1">
                 <a:solidFill>
                   <a:srgbClr val="F2EBDF"/>
                 </a:solidFill>
-                <a:latin typeface="Georgia"/>
-              </a:rPr>
-              <a:t>Climbing without breaking the plan</a:t>
-            </a:r>
-          </a:p>
-        </p:txBody>
-      </p:sp>
-      <p:sp>
-        <p:nvSpPr>
-          <p:cNvPr id="6" name="Rounded Rectangle 5"/>
-          <p:cNvSpPr/>
+                <a:latin typeface="Arial"/>
+              </a:rPr>
+              <a:t>Climbing without messing up scoring</a:t>
+            </a:r>
+          </a:p>
+        </p:txBody>
+      </p:sp>
+      <p:sp>
+        <p:nvSpPr>
+          <p:cNvPr id="4" name="TextBox 3"/>
+          <p:cNvSpPr txBox="1"/>
           <p:nvPr/>
         </p:nvSpPr>
         <p:spPr>
           <a:xfrm>
-            <a:off x="640080" y="2468880"/>
-            <a:ext cx="5394960" cy="3200400"/>
-          </a:xfrm>
-          <a:prstGeom prst="roundRect">
-            <a:avLst>
-              <a:gd name="adj" fmla="val 8000"/>
-            </a:avLst>
-          </a:prstGeom>
-          <a:solidFill>
-            <a:srgbClr val="1E2228"/>
-          </a:solidFill>
-          <a:ln w="12700">
-            <a:solidFill>
-              <a:srgbClr val="3A342C"/>
-            </a:solidFill>
-          </a:ln>
-        </p:spPr>
-        <p:style>
-          <a:lnRef idx="1">
-            <a:schemeClr val="accent1"/>
-          </a:lnRef>
-          <a:fillRef idx="3">
-            <a:schemeClr val="accent1"/>
-          </a:fillRef>
-          <a:effectRef idx="2">
-            <a:schemeClr val="accent1"/>
-          </a:effectRef>
-          <a:fontRef idx="minor">
-            <a:schemeClr val="lt1"/>
-          </a:fontRef>
-        </p:style>
-        <p:txBody>
-          <a:bodyPr rtlCol="0" anchor="ctr"/>
-          <a:lstStyle/>
-          <a:p>
-            <a:pPr algn="ctr"/>
-          </a:p>
-        </p:txBody>
-      </p:sp>
-      <p:sp>
-        <p:nvSpPr>
-          <p:cNvPr id="7" name="TextBox 6"/>
-          <p:cNvSpPr txBox="1"/>
-          <p:nvPr/>
-        </p:nvSpPr>
-        <p:spPr>
-          <a:xfrm>
-            <a:off x="868680" y="2697480"/>
-            <a:ext cx="4937760" cy="411480"/>
+            <a:off x="640080" y="2377440"/>
+            <a:ext cx="10789920" cy="3474720"/>
           </a:xfrm>
           <a:prstGeom prst="rect">
             <a:avLst/>
@@ -7891,33 +6407,70 @@
           <a:noFill/>
         </p:spPr>
         <p:txBody>
-          <a:bodyPr wrap="none">
+          <a:bodyPr wrap="square">
             <a:spAutoFit/>
           </a:bodyPr>
           <a:lstStyle/>
           <a:p>
-            <a:r>
-              <a:rPr sz="1800" b="1">
-                <a:solidFill>
-                  <a:srgbClr val="C4964A"/>
-                </a:solidFill>
-                <a:latin typeface="Georgia"/>
-              </a:rPr>
-              <a:t>Common mistake</a:t>
-            </a:r>
-          </a:p>
-        </p:txBody>
-      </p:sp>
-      <p:sp>
-        <p:nvSpPr>
-          <p:cNvPr id="8" name="TextBox 7"/>
+            <a:pPr>
+              <a:spcAft>
+                <a:spcPts val="800"/>
+              </a:spcAft>
+            </a:pPr>
+            <a:r>
+              <a:rPr sz="2000" b="0">
+                <a:solidFill>
+                  <a:srgbClr val="F2EBDF"/>
+                </a:solidFill>
+                <a:latin typeface="Arial"/>
+              </a:rPr>
+              <a:t>Some robots focus so much on climbing that they get worse at scoring.</a:t>
+            </a:r>
+          </a:p>
+          <a:p>
+            <a:pPr>
+              <a:spcAft>
+                <a:spcPts val="800"/>
+              </a:spcAft>
+            </a:pPr>
+            <a:r>
+              <a:rPr sz="2000" b="0">
+                <a:solidFill>
+                  <a:srgbClr val="F2EBDF"/>
+                </a:solidFill>
+                <a:latin typeface="Arial"/>
+              </a:rPr>
+              <a:t/>
+            </a:r>
+          </a:p>
+          <a:p>
+            <a:pPr>
+              <a:spcAft>
+                <a:spcPts val="800"/>
+              </a:spcAft>
+            </a:pPr>
+            <a:r>
+              <a:rPr sz="2000" b="0">
+                <a:solidFill>
+                  <a:srgbClr val="F2EBDF"/>
+                </a:solidFill>
+                <a:latin typeface="Arial"/>
+              </a:rPr>
+              <a:t>Enzo stays good at scoring during the match, and it can still climb at the end.</a:t>
+            </a:r>
+          </a:p>
+        </p:txBody>
+      </p:sp>
+      <p:sp>
+        <p:nvSpPr>
+          <p:cNvPr id="5" name="TextBox 4"/>
           <p:cNvSpPr txBox="1"/>
           <p:nvPr/>
         </p:nvSpPr>
         <p:spPr>
           <a:xfrm>
-            <a:off x="868680" y="3246120"/>
-            <a:ext cx="4937760" cy="2148840"/>
+            <a:off x="640080" y="6309360"/>
+            <a:ext cx="10972800" cy="320040"/>
           </a:xfrm>
           <a:prstGeom prst="rect">
             <a:avLst/>
@@ -7930,163 +6483,19 @@
           </a:bodyPr>
           <a:lstStyle/>
           <a:p>
-            <a:r>
-              <a:rPr sz="1500" b="0">
-                <a:solidFill>
-                  <a:srgbClr val="F2EBDF"/>
-                </a:solidFill>
-                <a:latin typeface="Calibri"/>
-              </a:rPr>
-              <a:t>Some robots try so hard to climb that they get worse at scoring.</a:t>
-            </a:r>
-          </a:p>
-        </p:txBody>
-      </p:sp>
-      <p:sp>
-        <p:nvSpPr>
-          <p:cNvPr id="9" name="Rounded Rectangle 8"/>
-          <p:cNvSpPr/>
-          <p:nvPr/>
-        </p:nvSpPr>
-        <p:spPr>
-          <a:xfrm>
-            <a:off x="6309360" y="2468880"/>
-            <a:ext cx="5212080" cy="3200400"/>
-          </a:xfrm>
-          <a:prstGeom prst="roundRect">
-            <a:avLst>
-              <a:gd name="adj" fmla="val 8000"/>
-            </a:avLst>
-          </a:prstGeom>
-          <a:solidFill>
-            <a:srgbClr val="1E2228"/>
-          </a:solidFill>
-          <a:ln w="12700">
-            <a:solidFill>
-              <a:srgbClr val="3A342C"/>
-            </a:solidFill>
-          </a:ln>
-        </p:spPr>
-        <p:style>
-          <a:lnRef idx="1">
-            <a:schemeClr val="accent1"/>
-          </a:lnRef>
-          <a:fillRef idx="3">
-            <a:schemeClr val="accent1"/>
-          </a:fillRef>
-          <a:effectRef idx="2">
-            <a:schemeClr val="accent1"/>
-          </a:effectRef>
-          <a:fontRef idx="minor">
-            <a:schemeClr val="lt1"/>
-          </a:fontRef>
-        </p:style>
-        <p:txBody>
-          <a:bodyPr rtlCol="0" anchor="ctr"/>
-          <a:lstStyle/>
-          <a:p>
-            <a:pPr algn="ctr"/>
-          </a:p>
-        </p:txBody>
-      </p:sp>
-      <p:sp>
-        <p:nvSpPr>
-          <p:cNvPr id="10" name="TextBox 9"/>
-          <p:cNvSpPr txBox="1"/>
-          <p:nvPr/>
-        </p:nvSpPr>
-        <p:spPr>
-          <a:xfrm>
-            <a:off x="6537960" y="2697480"/>
-            <a:ext cx="4754880" cy="411480"/>
-          </a:xfrm>
-          <a:prstGeom prst="rect">
-            <a:avLst/>
-          </a:prstGeom>
-          <a:noFill/>
-        </p:spPr>
-        <p:txBody>
-          <a:bodyPr wrap="none">
-            <a:spAutoFit/>
-          </a:bodyPr>
-          <a:lstStyle/>
-          <a:p>
-            <a:r>
-              <a:rPr sz="1800" b="1">
-                <a:solidFill>
-                  <a:srgbClr val="C4964A"/>
-                </a:solidFill>
-                <a:latin typeface="Georgia"/>
-              </a:rPr>
-              <a:t>Enzo’s balance</a:t>
-            </a:r>
-          </a:p>
-        </p:txBody>
-      </p:sp>
-      <p:sp>
-        <p:nvSpPr>
-          <p:cNvPr id="11" name="TextBox 10"/>
-          <p:cNvSpPr txBox="1"/>
-          <p:nvPr/>
-        </p:nvSpPr>
-        <p:spPr>
-          <a:xfrm>
-            <a:off x="6537960" y="3246120"/>
-            <a:ext cx="4754880" cy="2148840"/>
-          </a:xfrm>
-          <a:prstGeom prst="rect">
-            <a:avLst/>
-          </a:prstGeom>
-          <a:noFill/>
-        </p:spPr>
-        <p:txBody>
-          <a:bodyPr wrap="square">
-            <a:spAutoFit/>
-          </a:bodyPr>
-          <a:lstStyle/>
-          <a:p>
-            <a:r>
-              <a:rPr sz="1500" b="0">
-                <a:solidFill>
-                  <a:srgbClr val="F2EBDF"/>
-                </a:solidFill>
-                <a:latin typeface="Calibri"/>
-              </a:rPr>
-              <a:t>Enzo stays strong at scoring during the match — and still can climb when it matters at the end.</a:t>
-            </a:r>
-          </a:p>
-        </p:txBody>
-      </p:sp>
-      <p:sp>
-        <p:nvSpPr>
-          <p:cNvPr id="12" name="TextBox 11"/>
-          <p:cNvSpPr txBox="1"/>
-          <p:nvPr/>
-        </p:nvSpPr>
-        <p:spPr>
-          <a:xfrm>
-            <a:off x="548640" y="6446520"/>
-            <a:ext cx="9144000" cy="274320"/>
-          </a:xfrm>
-          <a:prstGeom prst="rect">
-            <a:avLst/>
-          </a:prstGeom>
-          <a:noFill/>
-        </p:spPr>
-        <p:txBody>
-          <a:bodyPr wrap="none">
-            <a:spAutoFit/>
-          </a:bodyPr>
-          <a:lstStyle/>
-          <a:p>
+            <a:pPr>
+              <a:spcAft>
+                <a:spcPts val="800"/>
+              </a:spcAft>
+            </a:pPr>
             <a:r>
               <a:rPr sz="1100" b="0">
                 <a:solidFill>
                   <a:srgbClr val="A8A093"/>
                 </a:solidFill>
-                <a:latin typeface="Calibri"/>
-              </a:rPr>
-              <a:t>ENZO  ·  FRC Crescendo  ·  Team 1577 Steampunk  ·  8/11</a:t>
+                <a:latin typeface="Arial"/>
+              </a:rPr>
+              <a:t>ENZO  ·  Crescendo  ·  Team 1577 Steampunk  ·  8/11</a:t>
             </a:r>
           </a:p>
         </p:txBody>
@@ -8102,6 +6511,14 @@
 <file path=ppt/slides/slide9.xml><?xml version="1.0" encoding="utf-8"?>
 <p:sld xmlns:a="http://schemas.openxmlformats.org/drawingml/2006/main" xmlns:p="http://schemas.openxmlformats.org/presentationml/2006/main" xmlns:r="http://schemas.openxmlformats.org/officeDocument/2006/relationships">
   <p:cSld>
+    <p:bg>
+      <p:bgPr>
+        <a:solidFill>
+          <a:srgbClr val="14161A"/>
+        </a:solidFill>
+        <a:effectLst/>
+      </p:bgPr>
+    </p:bg>
     <p:spTree>
       <p:nvGrpSpPr>
         <p:cNvPr id="1" name=""/>
@@ -8111,93 +6528,7 @@
       <p:grpSpPr/>
       <p:sp>
         <p:nvSpPr>
-          <p:cNvPr id="2" name="Rectangle 1"/>
-          <p:cNvSpPr/>
-          <p:nvPr/>
-        </p:nvSpPr>
-        <p:spPr>
-          <a:xfrm>
-            <a:off x="0" y="0"/>
-            <a:ext cx="12191695" cy="6858000"/>
-          </a:xfrm>
-          <a:prstGeom prst="rect">
-            <a:avLst/>
-          </a:prstGeom>
-          <a:solidFill>
-            <a:srgbClr val="14161A"/>
-          </a:solidFill>
-          <a:ln>
-            <a:noFill/>
-          </a:ln>
-        </p:spPr>
-        <p:style>
-          <a:lnRef idx="1">
-            <a:schemeClr val="accent1"/>
-          </a:lnRef>
-          <a:fillRef idx="3">
-            <a:schemeClr val="accent1"/>
-          </a:fillRef>
-          <a:effectRef idx="2">
-            <a:schemeClr val="accent1"/>
-          </a:effectRef>
-          <a:fontRef idx="minor">
-            <a:schemeClr val="lt1"/>
-          </a:fontRef>
-        </p:style>
-        <p:txBody>
-          <a:bodyPr rtlCol="0" anchor="ctr"/>
-          <a:lstStyle/>
-          <a:p>
-            <a:pPr algn="ctr"/>
-          </a:p>
-        </p:txBody>
-      </p:sp>
-      <p:sp>
-        <p:nvSpPr>
-          <p:cNvPr id="3" name="Rectangle 2"/>
-          <p:cNvSpPr/>
-          <p:nvPr/>
-        </p:nvSpPr>
-        <p:spPr>
-          <a:xfrm>
-            <a:off x="0" y="0"/>
-            <a:ext cx="12191695" cy="73152"/>
-          </a:xfrm>
-          <a:prstGeom prst="rect">
-            <a:avLst/>
-          </a:prstGeom>
-          <a:solidFill>
-            <a:srgbClr val="C4964A"/>
-          </a:solidFill>
-          <a:ln>
-            <a:noFill/>
-          </a:ln>
-        </p:spPr>
-        <p:style>
-          <a:lnRef idx="1">
-            <a:schemeClr val="accent1"/>
-          </a:lnRef>
-          <a:fillRef idx="3">
-            <a:schemeClr val="accent1"/>
-          </a:fillRef>
-          <a:effectRef idx="2">
-            <a:schemeClr val="accent1"/>
-          </a:effectRef>
-          <a:fontRef idx="minor">
-            <a:schemeClr val="lt1"/>
-          </a:fontRef>
-        </p:style>
-        <p:txBody>
-          <a:bodyPr rtlCol="0" anchor="ctr"/>
-          <a:lstStyle/>
-          <a:p>
-            <a:pPr algn="ctr"/>
-          </a:p>
-        </p:txBody>
-      </p:sp>
-      <p:sp>
-        <p:nvSpPr>
-          <p:cNvPr id="4" name="TextBox 3"/>
+          <p:cNvPr id="2" name="TextBox 1"/>
           <p:cNvSpPr txBox="1"/>
           <p:nvPr/>
         </p:nvSpPr>
@@ -8212,33 +6543,38 @@
           <a:noFill/>
         </p:spPr>
         <p:txBody>
-          <a:bodyPr wrap="none">
+          <a:bodyPr wrap="square">
             <a:spAutoFit/>
           </a:bodyPr>
           <a:lstStyle/>
           <a:p>
+            <a:pPr>
+              <a:spcAft>
+                <a:spcPts val="800"/>
+              </a:spcAft>
+            </a:pPr>
             <a:r>
               <a:rPr sz="1300" b="1">
                 <a:solidFill>
                   <a:srgbClr val="C4964A"/>
                 </a:solidFill>
-                <a:latin typeface="Calibri"/>
-              </a:rPr>
-              <a:t>DRIVING THE ROBOT</a:t>
-            </a:r>
-          </a:p>
-        </p:txBody>
-      </p:sp>
-      <p:sp>
-        <p:nvSpPr>
-          <p:cNvPr id="5" name="TextBox 4"/>
+                <a:latin typeface="Arial"/>
+              </a:rPr>
+              <a:t>THE ROBOT’S COMPUTER CODE</a:t>
+            </a:r>
+          </a:p>
+        </p:txBody>
+      </p:sp>
+      <p:sp>
+        <p:nvSpPr>
+          <p:cNvPr id="3" name="TextBox 2"/>
           <p:cNvSpPr txBox="1"/>
           <p:nvPr/>
         </p:nvSpPr>
         <p:spPr>
           <a:xfrm>
-            <a:off x="640080" y="777240"/>
-            <a:ext cx="10972800" cy="1097280"/>
+            <a:off x="640080" y="914400"/>
+            <a:ext cx="10972800" cy="1280160"/>
           </a:xfrm>
           <a:prstGeom prst="rect">
             <a:avLst/>
@@ -8251,28 +6587,33 @@
           </a:bodyPr>
           <a:lstStyle/>
           <a:p>
-            <a:r>
-              <a:rPr sz="3400" b="1">
+            <a:pPr>
+              <a:spcAft>
+                <a:spcPts val="800"/>
+              </a:spcAft>
+            </a:pPr>
+            <a:r>
+              <a:rPr sz="3200" b="1">
                 <a:solidFill>
                   <a:srgbClr val="F2EBDF"/>
                 </a:solidFill>
-                <a:latin typeface="Georgia"/>
-              </a:rPr>
-              <a:t>Good code makes hard jobs feel easy</a:t>
-            </a:r>
-          </a:p>
-        </p:txBody>
-      </p:sp>
-      <p:sp>
-        <p:nvSpPr>
-          <p:cNvPr id="6" name="TextBox 5"/>
+                <a:latin typeface="Arial"/>
+              </a:rPr>
+              <a:t>Good code makes driving easier</a:t>
+            </a:r>
+          </a:p>
+        </p:txBody>
+      </p:sp>
+      <p:sp>
+        <p:nvSpPr>
+          <p:cNvPr id="4" name="TextBox 3"/>
           <p:cNvSpPr txBox="1"/>
           <p:nvPr/>
         </p:nvSpPr>
         <p:spPr>
           <a:xfrm>
-            <a:off x="731520" y="2468880"/>
-            <a:ext cx="10515600" cy="3474720"/>
+            <a:off x="640080" y="2377440"/>
+            <a:ext cx="10789920" cy="3474720"/>
           </a:xfrm>
           <a:prstGeom prst="rect">
             <a:avLst/>
@@ -8287,7 +6628,7 @@
           <a:p>
             <a:pPr>
               <a:spcAft>
-                <a:spcPts val="1400"/>
+                <a:spcPts val="800"/>
               </a:spcAft>
             </a:pPr>
             <a:r>
@@ -8295,15 +6636,15 @@
                 <a:solidFill>
                   <a:srgbClr val="F2EBDF"/>
                 </a:solidFill>
-                <a:latin typeface="Calibri"/>
-              </a:rPr>
-              <a:t>Helps the robot aim and score more consistently</a:t>
-            </a:r>
-          </a:p>
-          <a:p>
-            <a:pPr>
-              <a:spcAft>
-                <a:spcPts val="1400"/>
+                <a:latin typeface="Arial"/>
+              </a:rPr>
+              <a:t>• Helps the robot aim better</a:t>
+            </a:r>
+          </a:p>
+          <a:p>
+            <a:pPr>
+              <a:spcAft>
+                <a:spcPts val="800"/>
               </a:spcAft>
             </a:pPr>
             <a:r>
@@ -8311,15 +6652,15 @@
                 <a:solidFill>
                   <a:srgbClr val="F2EBDF"/>
                 </a:solidFill>
-                <a:latin typeface="Calibri"/>
-              </a:rPr>
-              <a:t>Gives drivers clear controls instead of button chaos</a:t>
-            </a:r>
-          </a:p>
-          <a:p>
-            <a:pPr>
-              <a:spcAft>
-                <a:spcPts val="1400"/>
+                <a:latin typeface="Arial"/>
+              </a:rPr>
+              <a:t>• Gives drivers simple controls</a:t>
+            </a:r>
+          </a:p>
+          <a:p>
+            <a:pPr>
+              <a:spcAft>
+                <a:spcPts val="800"/>
               </a:spcAft>
             </a:pPr>
             <a:r>
@@ -8327,15 +6668,15 @@
                 <a:solidFill>
                   <a:srgbClr val="F2EBDF"/>
                 </a:solidFill>
-                <a:latin typeface="Calibri"/>
-              </a:rPr>
-              <a:t>Uses cameras and sensors so the robot “sees” the field</a:t>
-            </a:r>
-          </a:p>
-          <a:p>
-            <a:pPr>
-              <a:spcAft>
-                <a:spcPts val="1400"/>
+                <a:latin typeface="Arial"/>
+              </a:rPr>
+              <a:t>• Uses cameras so the robot can “see” the field</a:t>
+            </a:r>
+          </a:p>
+          <a:p>
+            <a:pPr>
+              <a:spcAft>
+                <a:spcPts val="800"/>
               </a:spcAft>
             </a:pPr>
             <a:r>
@@ -8343,23 +6684,23 @@
                 <a:solidFill>
                   <a:srgbClr val="F2EBDF"/>
                 </a:solidFill>
-                <a:latin typeface="Calibri"/>
-              </a:rPr>
-              <a:t>When drivers trust the robot, they can play smarter</a:t>
-            </a:r>
-          </a:p>
-        </p:txBody>
-      </p:sp>
-      <p:sp>
-        <p:nvSpPr>
-          <p:cNvPr id="7" name="TextBox 6"/>
+                <a:latin typeface="Arial"/>
+              </a:rPr>
+              <a:t>• When drivers trust the robot, they play better</a:t>
+            </a:r>
+          </a:p>
+        </p:txBody>
+      </p:sp>
+      <p:sp>
+        <p:nvSpPr>
+          <p:cNvPr id="5" name="TextBox 4"/>
           <p:cNvSpPr txBox="1"/>
           <p:nvPr/>
         </p:nvSpPr>
         <p:spPr>
           <a:xfrm>
-            <a:off x="548640" y="6446520"/>
-            <a:ext cx="9144000" cy="274320"/>
+            <a:off x="640080" y="6309360"/>
+            <a:ext cx="10972800" cy="320040"/>
           </a:xfrm>
           <a:prstGeom prst="rect">
             <a:avLst/>
@@ -8367,19 +6708,24 @@
           <a:noFill/>
         </p:spPr>
         <p:txBody>
-          <a:bodyPr wrap="none">
+          <a:bodyPr wrap="square">
             <a:spAutoFit/>
           </a:bodyPr>
           <a:lstStyle/>
           <a:p>
+            <a:pPr>
+              <a:spcAft>
+                <a:spcPts val="800"/>
+              </a:spcAft>
+            </a:pPr>
             <a:r>
               <a:rPr sz="1100" b="0">
                 <a:solidFill>
                   <a:srgbClr val="A8A093"/>
                 </a:solidFill>
-                <a:latin typeface="Calibri"/>
-              </a:rPr>
-              <a:t>ENZO  ·  FRC Crescendo  ·  Team 1577 Steampunk  ·  9/11</a:t>
+                <a:latin typeface="Arial"/>
+              </a:rPr>
+              <a:t>ENZO  ·  Crescendo  ·  Team 1577 Steampunk  ·  9/11</a:t>
             </a:r>
           </a:p>
         </p:txBody>
